--- a/presentation/kob.pptx
+++ b/presentation/kob.pptx
@@ -3111,7 +3111,7 @@
             <a:avLst/>
           </a:prstGeom>
           <a:solidFill>
-            <a:srgbClr val="264653"/>
+            <a:srgbClr val="3A1647"/>
           </a:solidFill>
           <a:ln>
             <a:noFill/>
@@ -3155,7 +3155,7 @@
             <a:avLst/>
           </a:prstGeom>
           <a:solidFill>
-            <a:srgbClr val="2A9D8F"/>
+            <a:srgbClr val="C71E7A"/>
           </a:solidFill>
           <a:ln>
             <a:noFill/>
@@ -3265,7 +3265,7 @@
             <a:r>
               <a:rPr sz="2600" b="0" i="0">
                 <a:solidFill>
-                  <a:srgbClr val="CFE3DF"/>
+                  <a:srgbClr val="E6D8EE"/>
                 </a:solidFill>
                 <a:latin typeface="Calibri"/>
               </a:rPr>
@@ -3310,7 +3310,7 @@
             <a:r>
               <a:rPr sz="1600" b="0" i="1">
                 <a:solidFill>
-                  <a:srgbClr val="8A949E"/>
+                  <a:srgbClr val="B7A9C2"/>
                 </a:solidFill>
                 <a:latin typeface="Calibri"/>
               </a:rPr>
@@ -3355,7 +3355,7 @@
             <a:r>
               <a:rPr sz="1300" b="0" i="0">
                 <a:solidFill>
-                  <a:srgbClr val="CFE3DF"/>
+                  <a:srgbClr val="E6D8EE"/>
                 </a:solidFill>
                 <a:latin typeface="Calibri"/>
               </a:rPr>
@@ -3364,7 +3364,7 @@
             <a:r>
               <a:rPr sz="1300" b="1" i="0">
                 <a:solidFill>
-                  <a:srgbClr val="2A9D8F"/>
+                  <a:srgbClr val="CB9FE0"/>
                 </a:solidFill>
                 <a:latin typeface="Calibri"/>
               </a:rPr>
@@ -3406,7 +3406,7 @@
             <a:avLst/>
           </a:prstGeom>
           <a:solidFill>
-            <a:srgbClr val="2A9D8F"/>
+            <a:srgbClr val="6D2C8F"/>
           </a:solidFill>
           <a:ln>
             <a:noFill/>
@@ -3471,7 +3471,7 @@
             <a:r>
               <a:rPr sz="1200" b="1" i="0">
                 <a:solidFill>
-                  <a:srgbClr val="2A9D8F"/>
+                  <a:srgbClr val="C71E7A"/>
                 </a:solidFill>
                 <a:latin typeface="Calibri"/>
               </a:rPr>
@@ -3516,7 +3516,7 @@
             <a:r>
               <a:rPr sz="3000" b="1" i="0">
                 <a:solidFill>
-                  <a:srgbClr val="264653"/>
+                  <a:srgbClr val="3A1647"/>
                 </a:solidFill>
                 <a:latin typeface="Calibri"/>
               </a:rPr>
@@ -3540,7 +3540,7 @@
             <a:avLst/>
           </a:prstGeom>
           <a:solidFill>
-            <a:srgbClr val="2A9D8F"/>
+            <a:srgbClr val="6D2C8F"/>
           </a:solidFill>
           <a:ln>
             <a:noFill/>
@@ -3605,7 +3605,7 @@
             <a:r>
               <a:rPr sz="1000" b="1" i="0">
                 <a:solidFill>
-                  <a:srgbClr val="2A9D8F"/>
+                  <a:srgbClr val="6D2C8F"/>
                 </a:solidFill>
                 <a:latin typeface="Calibri"/>
               </a:rPr>
@@ -3614,7 +3614,7 @@
             <a:r>
               <a:rPr sz="1000" b="0" i="0">
                 <a:solidFill>
-                  <a:srgbClr val="8A949E"/>
+                  <a:srgbClr val="8A8692"/>
                 </a:solidFill>
                 <a:latin typeface="Calibri"/>
               </a:rPr>
@@ -3623,7 +3623,7 @@
             <a:r>
               <a:rPr sz="1000" b="0" i="0">
                 <a:solidFill>
-                  <a:srgbClr val="8A949E"/>
+                  <a:srgbClr val="8A8692"/>
                 </a:solidFill>
                 <a:latin typeface="Calibri"/>
               </a:rPr>
@@ -3668,7 +3668,7 @@
             <a:r>
               <a:rPr sz="1600" b="0" i="0">
                 <a:solidFill>
-                  <a:srgbClr val="1D2B3A"/>
+                  <a:srgbClr val="2B2230"/>
                 </a:solidFill>
                 <a:latin typeface="Calibri"/>
               </a:rPr>
@@ -3692,7 +3692,7 @@
             <a:avLst/>
           </a:prstGeom>
           <a:solidFill>
-            <a:srgbClr val="F2F3F5"/>
+            <a:srgbClr val="F4F1F6"/>
           </a:solidFill>
           <a:ln>
             <a:noFill/>
@@ -3736,7 +3736,7 @@
             <a:avLst/>
           </a:prstGeom>
           <a:solidFill>
-            <a:srgbClr val="264653"/>
+            <a:srgbClr val="6D2C8F"/>
           </a:solidFill>
           <a:ln>
             <a:noFill/>
@@ -3801,7 +3801,7 @@
             <a:r>
               <a:rPr sz="1600" b="1" i="0">
                 <a:solidFill>
-                  <a:srgbClr val="264653"/>
+                  <a:srgbClr val="3A1647"/>
                 </a:solidFill>
                 <a:latin typeface="Calibri"/>
               </a:rPr>
@@ -3823,7 +3823,7 @@
             <a:r>
               <a:rPr sz="1250" b="0" i="0">
                 <a:solidFill>
-                  <a:srgbClr val="1D2B3A"/>
+                  <a:srgbClr val="2B2230"/>
                 </a:solidFill>
                 <a:latin typeface="Calibri"/>
               </a:rPr>
@@ -3847,7 +3847,7 @@
             <a:avLst/>
           </a:prstGeom>
           <a:solidFill>
-            <a:srgbClr val="F2F3F5"/>
+            <a:srgbClr val="F4F1F6"/>
           </a:solidFill>
           <a:ln>
             <a:noFill/>
@@ -3891,7 +3891,7 @@
             <a:avLst/>
           </a:prstGeom>
           <a:solidFill>
-            <a:srgbClr val="F4A261"/>
+            <a:srgbClr val="A05EB5"/>
           </a:solidFill>
           <a:ln>
             <a:noFill/>
@@ -3956,7 +3956,7 @@
             <a:r>
               <a:rPr sz="1600" b="1" i="0">
                 <a:solidFill>
-                  <a:srgbClr val="264653"/>
+                  <a:srgbClr val="3A1647"/>
                 </a:solidFill>
                 <a:latin typeface="Calibri"/>
               </a:rPr>
@@ -3978,7 +3978,7 @@
             <a:r>
               <a:rPr sz="1250" b="0" i="0">
                 <a:solidFill>
-                  <a:srgbClr val="1D2B3A"/>
+                  <a:srgbClr val="2B2230"/>
                 </a:solidFill>
                 <a:latin typeface="Calibri"/>
               </a:rPr>
@@ -4002,7 +4002,7 @@
             <a:avLst/>
           </a:prstGeom>
           <a:solidFill>
-            <a:srgbClr val="F2F3F5"/>
+            <a:srgbClr val="F4F1F6"/>
           </a:solidFill>
           <a:ln>
             <a:noFill/>
@@ -4046,7 +4046,7 @@
             <a:avLst/>
           </a:prstGeom>
           <a:solidFill>
-            <a:srgbClr val="E76F51"/>
+            <a:srgbClr val="C71E7A"/>
           </a:solidFill>
           <a:ln>
             <a:noFill/>
@@ -4111,7 +4111,7 @@
             <a:r>
               <a:rPr sz="1600" b="1" i="0">
                 <a:solidFill>
-                  <a:srgbClr val="264653"/>
+                  <a:srgbClr val="3A1647"/>
                 </a:solidFill>
                 <a:latin typeface="Calibri"/>
               </a:rPr>
@@ -4133,7 +4133,7 @@
             <a:r>
               <a:rPr sz="1250" b="0" i="0">
                 <a:solidFill>
-                  <a:srgbClr val="1D2B3A"/>
+                  <a:srgbClr val="2B2230"/>
                 </a:solidFill>
                 <a:latin typeface="Calibri"/>
               </a:rPr>
@@ -4178,7 +4178,7 @@
             <a:r>
               <a:rPr sz="1700" b="1" i="0">
                 <a:solidFill>
-                  <a:srgbClr val="264653"/>
+                  <a:srgbClr val="3A1647"/>
                 </a:solidFill>
                 <a:latin typeface="Calibri"/>
               </a:rPr>
@@ -4187,7 +4187,7 @@
             <a:r>
               <a:rPr sz="1700" b="1" i="0">
                 <a:solidFill>
-                  <a:srgbClr val="2A9D8F"/>
+                  <a:srgbClr val="6D2C8F"/>
                 </a:solidFill>
                 <a:latin typeface="Calibri"/>
               </a:rPr>
@@ -4196,7 +4196,7 @@
             <a:r>
               <a:rPr sz="1700" b="0" i="0">
                 <a:solidFill>
-                  <a:srgbClr val="1D2B3A"/>
+                  <a:srgbClr val="2B2230"/>
                 </a:solidFill>
                 <a:latin typeface="Calibri"/>
               </a:rPr>
@@ -4205,7 +4205,7 @@
             <a:r>
               <a:rPr sz="1700" b="1" i="0">
                 <a:solidFill>
-                  <a:srgbClr val="2A9D8F"/>
+                  <a:srgbClr val="6D2C8F"/>
                 </a:solidFill>
                 <a:latin typeface="Calibri"/>
               </a:rPr>
@@ -4214,7 +4214,7 @@
             <a:r>
               <a:rPr sz="1700" b="0" i="0">
                 <a:solidFill>
-                  <a:srgbClr val="1D2B3A"/>
+                  <a:srgbClr val="2B2230"/>
                 </a:solidFill>
                 <a:latin typeface="Calibri"/>
               </a:rPr>
@@ -4223,7 +4223,7 @@
             <a:r>
               <a:rPr sz="1700" b="1" i="0">
                 <a:solidFill>
-                  <a:srgbClr val="2A9D8F"/>
+                  <a:srgbClr val="6D2C8F"/>
                 </a:solidFill>
                 <a:latin typeface="Calibri"/>
               </a:rPr>
@@ -4232,7 +4232,7 @@
             <a:r>
               <a:rPr sz="1700" b="0" i="0">
                 <a:solidFill>
-                  <a:srgbClr val="1D2B3A"/>
+                  <a:srgbClr val="2B2230"/>
                 </a:solidFill>
                 <a:latin typeface="Calibri"/>
               </a:rPr>
@@ -4274,7 +4274,7 @@
             <a:avLst/>
           </a:prstGeom>
           <a:solidFill>
-            <a:srgbClr val="2A9D8F"/>
+            <a:srgbClr val="6D2C8F"/>
           </a:solidFill>
           <a:ln>
             <a:noFill/>
@@ -4339,7 +4339,7 @@
             <a:r>
               <a:rPr sz="1200" b="1" i="0">
                 <a:solidFill>
-                  <a:srgbClr val="2A9D8F"/>
+                  <a:srgbClr val="C71E7A"/>
                 </a:solidFill>
                 <a:latin typeface="Calibri"/>
               </a:rPr>
@@ -4384,7 +4384,7 @@
             <a:r>
               <a:rPr sz="3000" b="1" i="0">
                 <a:solidFill>
-                  <a:srgbClr val="264653"/>
+                  <a:srgbClr val="3A1647"/>
                 </a:solidFill>
                 <a:latin typeface="Calibri"/>
               </a:rPr>
@@ -4408,7 +4408,7 @@
             <a:avLst/>
           </a:prstGeom>
           <a:solidFill>
-            <a:srgbClr val="2A9D8F"/>
+            <a:srgbClr val="6D2C8F"/>
           </a:solidFill>
           <a:ln>
             <a:noFill/>
@@ -4473,7 +4473,7 @@
             <a:r>
               <a:rPr sz="1000" b="1" i="0">
                 <a:solidFill>
-                  <a:srgbClr val="2A9D8F"/>
+                  <a:srgbClr val="6D2C8F"/>
                 </a:solidFill>
                 <a:latin typeface="Calibri"/>
               </a:rPr>
@@ -4482,7 +4482,7 @@
             <a:r>
               <a:rPr sz="1000" b="0" i="0">
                 <a:solidFill>
-                  <a:srgbClr val="8A949E"/>
+                  <a:srgbClr val="8A8692"/>
                 </a:solidFill>
                 <a:latin typeface="Calibri"/>
               </a:rPr>
@@ -4491,7 +4491,7 @@
             <a:r>
               <a:rPr sz="1000" b="0" i="0">
                 <a:solidFill>
-                  <a:srgbClr val="8A949E"/>
+                  <a:srgbClr val="8A8692"/>
                 </a:solidFill>
                 <a:latin typeface="Calibri"/>
               </a:rPr>
@@ -4536,7 +4536,7 @@
             <a:r>
               <a:rPr sz="1600" b="0" i="0">
                 <a:solidFill>
-                  <a:srgbClr val="1D2B3A"/>
+                  <a:srgbClr val="2B2230"/>
                 </a:solidFill>
                 <a:latin typeface="Calibri"/>
               </a:rPr>
@@ -4560,7 +4560,7 @@
             <a:avLst/>
           </a:prstGeom>
           <a:solidFill>
-            <a:srgbClr val="F2F3F5"/>
+            <a:srgbClr val="F4F1F6"/>
           </a:solidFill>
           <a:ln>
             <a:noFill/>
@@ -4604,7 +4604,7 @@
             <a:avLst/>
           </a:prstGeom>
           <a:solidFill>
-            <a:srgbClr val="2A9D8F"/>
+            <a:srgbClr val="6D2C8F"/>
           </a:solidFill>
           <a:ln>
             <a:noFill/>
@@ -4669,7 +4669,7 @@
             <a:r>
               <a:rPr sz="1600" b="1" i="0">
                 <a:solidFill>
-                  <a:srgbClr val="264653"/>
+                  <a:srgbClr val="3A1647"/>
                 </a:solidFill>
                 <a:latin typeface="Calibri"/>
               </a:rPr>
@@ -4691,7 +4691,7 @@
             <a:r>
               <a:rPr sz="1250" b="0" i="0">
                 <a:solidFill>
-                  <a:srgbClr val="1D2B3A"/>
+                  <a:srgbClr val="2B2230"/>
                 </a:solidFill>
                 <a:latin typeface="Calibri"/>
               </a:rPr>
@@ -4715,7 +4715,7 @@
             <a:avLst/>
           </a:prstGeom>
           <a:solidFill>
-            <a:srgbClr val="F2F3F5"/>
+            <a:srgbClr val="F4F1F6"/>
           </a:solidFill>
           <a:ln>
             <a:noFill/>
@@ -4759,7 +4759,7 @@
             <a:avLst/>
           </a:prstGeom>
           <a:solidFill>
-            <a:srgbClr val="264653"/>
+            <a:srgbClr val="C71E7A"/>
           </a:solidFill>
           <a:ln>
             <a:noFill/>
@@ -4824,7 +4824,7 @@
             <a:r>
               <a:rPr sz="1600" b="1" i="0">
                 <a:solidFill>
-                  <a:srgbClr val="264653"/>
+                  <a:srgbClr val="3A1647"/>
                 </a:solidFill>
                 <a:latin typeface="Calibri"/>
               </a:rPr>
@@ -4846,7 +4846,7 @@
             <a:r>
               <a:rPr sz="1250" b="0" i="0">
                 <a:solidFill>
-                  <a:srgbClr val="1D2B3A"/>
+                  <a:srgbClr val="2B2230"/>
                 </a:solidFill>
                 <a:latin typeface="Calibri"/>
               </a:rPr>
@@ -4870,7 +4870,7 @@
             <a:avLst/>
           </a:prstGeom>
           <a:solidFill>
-            <a:srgbClr val="F2F3F5"/>
+            <a:srgbClr val="F4F1F6"/>
           </a:solidFill>
           <a:ln>
             <a:noFill/>
@@ -4914,7 +4914,7 @@
             <a:avLst/>
           </a:prstGeom>
           <a:solidFill>
-            <a:srgbClr val="F4A261"/>
+            <a:srgbClr val="A05EB5"/>
           </a:solidFill>
           <a:ln>
             <a:noFill/>
@@ -4979,7 +4979,7 @@
             <a:r>
               <a:rPr sz="1600" b="1" i="0">
                 <a:solidFill>
-                  <a:srgbClr val="264653"/>
+                  <a:srgbClr val="3A1647"/>
                 </a:solidFill>
                 <a:latin typeface="Calibri"/>
               </a:rPr>
@@ -5001,7 +5001,7 @@
             <a:r>
               <a:rPr sz="1250" b="0" i="0">
                 <a:solidFill>
-                  <a:srgbClr val="1D2B3A"/>
+                  <a:srgbClr val="2B2230"/>
                 </a:solidFill>
                 <a:latin typeface="Calibri"/>
               </a:rPr>
@@ -5025,7 +5025,7 @@
             <a:avLst/>
           </a:prstGeom>
           <a:solidFill>
-            <a:srgbClr val="F2F3F5"/>
+            <a:srgbClr val="F4F1F6"/>
           </a:solidFill>
           <a:ln>
             <a:noFill/>
@@ -5069,7 +5069,7 @@
             <a:avLst/>
           </a:prstGeom>
           <a:solidFill>
-            <a:srgbClr val="E76F51"/>
+            <a:srgbClr val="3A1647"/>
           </a:solidFill>
           <a:ln>
             <a:noFill/>
@@ -5134,7 +5134,7 @@
             <a:r>
               <a:rPr sz="1600" b="1" i="0">
                 <a:solidFill>
-                  <a:srgbClr val="264653"/>
+                  <a:srgbClr val="3A1647"/>
                 </a:solidFill>
                 <a:latin typeface="Calibri"/>
               </a:rPr>
@@ -5156,7 +5156,7 @@
             <a:r>
               <a:rPr sz="1250" b="0" i="0">
                 <a:solidFill>
-                  <a:srgbClr val="1D2B3A"/>
+                  <a:srgbClr val="2B2230"/>
                 </a:solidFill>
                 <a:latin typeface="Calibri"/>
               </a:rPr>
@@ -5198,7 +5198,7 @@
             <a:avLst/>
           </a:prstGeom>
           <a:solidFill>
-            <a:srgbClr val="2A9D8F"/>
+            <a:srgbClr val="6D2C8F"/>
           </a:solidFill>
           <a:ln>
             <a:noFill/>
@@ -5263,7 +5263,7 @@
             <a:r>
               <a:rPr sz="1200" b="1" i="0">
                 <a:solidFill>
-                  <a:srgbClr val="2A9D8F"/>
+                  <a:srgbClr val="C71E7A"/>
                 </a:solidFill>
                 <a:latin typeface="Calibri"/>
               </a:rPr>
@@ -5308,7 +5308,7 @@
             <a:r>
               <a:rPr sz="3000" b="1" i="0">
                 <a:solidFill>
-                  <a:srgbClr val="264653"/>
+                  <a:srgbClr val="3A1647"/>
                 </a:solidFill>
                 <a:latin typeface="Calibri"/>
               </a:rPr>
@@ -5332,7 +5332,7 @@
             <a:avLst/>
           </a:prstGeom>
           <a:solidFill>
-            <a:srgbClr val="2A9D8F"/>
+            <a:srgbClr val="6D2C8F"/>
           </a:solidFill>
           <a:ln>
             <a:noFill/>
@@ -5397,7 +5397,7 @@
             <a:r>
               <a:rPr sz="1000" b="1" i="0">
                 <a:solidFill>
-                  <a:srgbClr val="2A9D8F"/>
+                  <a:srgbClr val="6D2C8F"/>
                 </a:solidFill>
                 <a:latin typeface="Calibri"/>
               </a:rPr>
@@ -5406,7 +5406,7 @@
             <a:r>
               <a:rPr sz="1000" b="0" i="0">
                 <a:solidFill>
-                  <a:srgbClr val="8A949E"/>
+                  <a:srgbClr val="8A8692"/>
                 </a:solidFill>
                 <a:latin typeface="Calibri"/>
               </a:rPr>
@@ -5415,7 +5415,7 @@
             <a:r>
               <a:rPr sz="1000" b="0" i="0">
                 <a:solidFill>
-                  <a:srgbClr val="8A949E"/>
+                  <a:srgbClr val="8A8692"/>
                 </a:solidFill>
                 <a:latin typeface="Calibri"/>
               </a:rPr>
@@ -5460,7 +5460,7 @@
             <a:r>
               <a:rPr sz="1600" b="1" i="0">
                 <a:solidFill>
-                  <a:srgbClr val="264653"/>
+                  <a:srgbClr val="3A1647"/>
                 </a:solidFill>
                 <a:latin typeface="Calibri"/>
               </a:rPr>
@@ -5482,7 +5482,7 @@
             <a:r>
               <a:rPr sz="1450" b="0" i="0">
                 <a:solidFill>
-                  <a:srgbClr val="1D2B3A"/>
+                  <a:srgbClr val="2B2230"/>
                 </a:solidFill>
                 <a:latin typeface="Calibri"/>
               </a:rPr>
@@ -5504,7 +5504,7 @@
             <a:r>
               <a:rPr sz="1450" b="0" i="0">
                 <a:solidFill>
-                  <a:srgbClr val="1D2B3A"/>
+                  <a:srgbClr val="2B2230"/>
                 </a:solidFill>
                 <a:latin typeface="Calibri"/>
               </a:rPr>
@@ -5526,7 +5526,7 @@
             <a:r>
               <a:rPr sz="1450" b="0" i="0">
                 <a:solidFill>
-                  <a:srgbClr val="1D2B3A"/>
+                  <a:srgbClr val="2B2230"/>
                 </a:solidFill>
                 <a:latin typeface="Calibri"/>
               </a:rPr>
@@ -5548,7 +5548,7 @@
             <a:r>
               <a:rPr sz="1450" b="0" i="0">
                 <a:solidFill>
-                  <a:srgbClr val="1D2B3A"/>
+                  <a:srgbClr val="2B2230"/>
                 </a:solidFill>
                 <a:latin typeface="Calibri"/>
               </a:rPr>
@@ -5599,7 +5599,7 @@
                   </a:txBody>
                   <a:tcPr marL="109728" marT="36576" marB="36576">
                     <a:solidFill>
-                      <a:srgbClr val="264653"/>
+                      <a:srgbClr val="3A1647"/>
                     </a:solidFill>
                   </a:tcPr>
                 </a:tc>
@@ -5621,7 +5621,7 @@
                   </a:txBody>
                   <a:tcPr marL="109728" marT="36576" marB="36576">
                     <a:solidFill>
-                      <a:srgbClr val="264653"/>
+                      <a:srgbClr val="3A1647"/>
                     </a:solidFill>
                   </a:tcPr>
                 </a:tc>
@@ -5643,7 +5643,7 @@
                   </a:txBody>
                   <a:tcPr marL="109728" marT="36576" marB="36576">
                     <a:solidFill>
-                      <a:srgbClr val="264653"/>
+                      <a:srgbClr val="3A1647"/>
                     </a:solidFill>
                   </a:tcPr>
                 </a:tc>
@@ -5657,7 +5657,7 @@
                       <a:r>
                         <a:rPr sz="1250" b="0">
                           <a:solidFill>
-                            <a:srgbClr val="1D2B3A"/>
+                            <a:srgbClr val="2B2230"/>
                           </a:solidFill>
                           <a:latin typeface="Calibri"/>
                         </a:rPr>
@@ -5679,7 +5679,7 @@
                       <a:r>
                         <a:rPr sz="1250" b="0">
                           <a:solidFill>
-                            <a:srgbClr val="1D2B3A"/>
+                            <a:srgbClr val="2B2230"/>
                           </a:solidFill>
                           <a:latin typeface="Calibri"/>
                         </a:rPr>
@@ -5701,7 +5701,7 @@
                       <a:r>
                         <a:rPr sz="1250" b="0">
                           <a:solidFill>
-                            <a:srgbClr val="1D2B3A"/>
+                            <a:srgbClr val="2B2230"/>
                           </a:solidFill>
                           <a:latin typeface="Calibri"/>
                         </a:rPr>
@@ -5725,7 +5725,7 @@
                       <a:r>
                         <a:rPr sz="1250" b="0">
                           <a:solidFill>
-                            <a:srgbClr val="1D2B3A"/>
+                            <a:srgbClr val="2B2230"/>
                           </a:solidFill>
                           <a:latin typeface="Calibri"/>
                         </a:rPr>
@@ -5735,7 +5735,7 @@
                   </a:txBody>
                   <a:tcPr marL="109728" marT="36576" marB="36576">
                     <a:solidFill>
-                      <a:srgbClr val="F2F3F5"/>
+                      <a:srgbClr val="F4F1F6"/>
                     </a:solidFill>
                   </a:tcPr>
                 </a:tc>
@@ -5747,7 +5747,7 @@
                       <a:r>
                         <a:rPr sz="1250" b="0">
                           <a:solidFill>
-                            <a:srgbClr val="1D2B3A"/>
+                            <a:srgbClr val="2B2230"/>
                           </a:solidFill>
                           <a:latin typeface="Calibri"/>
                         </a:rPr>
@@ -5757,7 +5757,7 @@
                   </a:txBody>
                   <a:tcPr marL="109728" marT="36576" marB="36576">
                     <a:solidFill>
-                      <a:srgbClr val="F2F3F5"/>
+                      <a:srgbClr val="F4F1F6"/>
                     </a:solidFill>
                   </a:tcPr>
                 </a:tc>
@@ -5769,7 +5769,7 @@
                       <a:r>
                         <a:rPr sz="1250" b="0">
                           <a:solidFill>
-                            <a:srgbClr val="1D2B3A"/>
+                            <a:srgbClr val="2B2230"/>
                           </a:solidFill>
                           <a:latin typeface="Calibri"/>
                         </a:rPr>
@@ -5779,7 +5779,7 @@
                   </a:txBody>
                   <a:tcPr marL="109728" marT="36576" marB="36576">
                     <a:solidFill>
-                      <a:srgbClr val="F2F3F5"/>
+                      <a:srgbClr val="F4F1F6"/>
                     </a:solidFill>
                   </a:tcPr>
                 </a:tc>
@@ -5793,7 +5793,7 @@
                       <a:r>
                         <a:rPr sz="1250" b="0">
                           <a:solidFill>
-                            <a:srgbClr val="1D2B3A"/>
+                            <a:srgbClr val="2B2230"/>
                           </a:solidFill>
                           <a:latin typeface="Calibri"/>
                         </a:rPr>
@@ -5815,7 +5815,7 @@
                       <a:r>
                         <a:rPr sz="1250" b="0">
                           <a:solidFill>
-                            <a:srgbClr val="1D2B3A"/>
+                            <a:srgbClr val="2B2230"/>
                           </a:solidFill>
                           <a:latin typeface="Calibri"/>
                         </a:rPr>
@@ -5837,7 +5837,7 @@
                       <a:r>
                         <a:rPr sz="1250" b="0">
                           <a:solidFill>
-                            <a:srgbClr val="1D2B3A"/>
+                            <a:srgbClr val="2B2230"/>
                           </a:solidFill>
                           <a:latin typeface="Calibri"/>
                         </a:rPr>
@@ -5861,7 +5861,7 @@
                       <a:r>
                         <a:rPr sz="1250" b="0">
                           <a:solidFill>
-                            <a:srgbClr val="1D2B3A"/>
+                            <a:srgbClr val="2B2230"/>
                           </a:solidFill>
                           <a:latin typeface="Calibri"/>
                         </a:rPr>
@@ -5871,7 +5871,7 @@
                   </a:txBody>
                   <a:tcPr marL="109728" marT="36576" marB="36576">
                     <a:solidFill>
-                      <a:srgbClr val="F2F3F5"/>
+                      <a:srgbClr val="F4F1F6"/>
                     </a:solidFill>
                   </a:tcPr>
                 </a:tc>
@@ -5883,7 +5883,7 @@
                       <a:r>
                         <a:rPr sz="1250" b="0">
                           <a:solidFill>
-                            <a:srgbClr val="1D2B3A"/>
+                            <a:srgbClr val="2B2230"/>
                           </a:solidFill>
                           <a:latin typeface="Calibri"/>
                         </a:rPr>
@@ -5893,7 +5893,7 @@
                   </a:txBody>
                   <a:tcPr marL="109728" marT="36576" marB="36576">
                     <a:solidFill>
-                      <a:srgbClr val="F2F3F5"/>
+                      <a:srgbClr val="F4F1F6"/>
                     </a:solidFill>
                   </a:tcPr>
                 </a:tc>
@@ -5905,7 +5905,7 @@
                       <a:r>
                         <a:rPr sz="1250" b="0">
                           <a:solidFill>
-                            <a:srgbClr val="1D2B3A"/>
+                            <a:srgbClr val="2B2230"/>
                           </a:solidFill>
                           <a:latin typeface="Calibri"/>
                         </a:rPr>
@@ -5915,7 +5915,7 @@
                   </a:txBody>
                   <a:tcPr marL="109728" marT="36576" marB="36576">
                     <a:solidFill>
-                      <a:srgbClr val="F2F3F5"/>
+                      <a:srgbClr val="F4F1F6"/>
                     </a:solidFill>
                   </a:tcPr>
                 </a:tc>
@@ -5960,7 +5960,7 @@
             <a:r>
               <a:rPr sz="1350" b="0" i="1">
                 <a:solidFill>
-                  <a:srgbClr val="264653"/>
+                  <a:srgbClr val="3A1647"/>
                 </a:solidFill>
                 <a:latin typeface="Calibri"/>
               </a:rPr>
@@ -5982,7 +5982,7 @@
             <a:r>
               <a:rPr sz="1200" b="0" i="0">
                 <a:solidFill>
-                  <a:srgbClr val="8A949E"/>
+                  <a:srgbClr val="8A8692"/>
                 </a:solidFill>
                 <a:latin typeface="Calibri"/>
               </a:rPr>
@@ -6024,7 +6024,7 @@
             <a:avLst/>
           </a:prstGeom>
           <a:solidFill>
-            <a:srgbClr val="2A9D8F"/>
+            <a:srgbClr val="6D2C8F"/>
           </a:solidFill>
           <a:ln>
             <a:noFill/>
@@ -6089,7 +6089,7 @@
             <a:r>
               <a:rPr sz="1200" b="1" i="0">
                 <a:solidFill>
-                  <a:srgbClr val="2A9D8F"/>
+                  <a:srgbClr val="C71E7A"/>
                 </a:solidFill>
                 <a:latin typeface="Calibri"/>
               </a:rPr>
@@ -6134,7 +6134,7 @@
             <a:r>
               <a:rPr sz="3000" b="1" i="0">
                 <a:solidFill>
-                  <a:srgbClr val="264653"/>
+                  <a:srgbClr val="3A1647"/>
                 </a:solidFill>
                 <a:latin typeface="Calibri"/>
               </a:rPr>
@@ -6158,7 +6158,7 @@
             <a:avLst/>
           </a:prstGeom>
           <a:solidFill>
-            <a:srgbClr val="2A9D8F"/>
+            <a:srgbClr val="6D2C8F"/>
           </a:solidFill>
           <a:ln>
             <a:noFill/>
@@ -6223,7 +6223,7 @@
             <a:r>
               <a:rPr sz="1000" b="1" i="0">
                 <a:solidFill>
-                  <a:srgbClr val="2A9D8F"/>
+                  <a:srgbClr val="6D2C8F"/>
                 </a:solidFill>
                 <a:latin typeface="Calibri"/>
               </a:rPr>
@@ -6232,7 +6232,7 @@
             <a:r>
               <a:rPr sz="1000" b="0" i="0">
                 <a:solidFill>
-                  <a:srgbClr val="8A949E"/>
+                  <a:srgbClr val="8A8692"/>
                 </a:solidFill>
                 <a:latin typeface="Calibri"/>
               </a:rPr>
@@ -6241,7 +6241,7 @@
             <a:r>
               <a:rPr sz="1000" b="0" i="0">
                 <a:solidFill>
-                  <a:srgbClr val="8A949E"/>
+                  <a:srgbClr val="8A8692"/>
                 </a:solidFill>
                 <a:latin typeface="Calibri"/>
               </a:rPr>
@@ -6286,7 +6286,7 @@
             <a:r>
               <a:rPr sz="1500" b="1" i="0">
                 <a:solidFill>
-                  <a:srgbClr val="264653"/>
+                  <a:srgbClr val="3A1647"/>
                 </a:solidFill>
                 <a:latin typeface="Calibri"/>
               </a:rPr>
@@ -6308,7 +6308,7 @@
             <a:r>
               <a:rPr sz="1350" b="0" i="0">
                 <a:solidFill>
-                  <a:srgbClr val="1D2B3A"/>
+                  <a:srgbClr val="2B2230"/>
                 </a:solidFill>
                 <a:latin typeface="Calibri"/>
               </a:rPr>
@@ -6330,7 +6330,7 @@
             <a:r>
               <a:rPr sz="1350" b="0" i="0">
                 <a:solidFill>
-                  <a:srgbClr val="1D2B3A"/>
+                  <a:srgbClr val="2B2230"/>
                 </a:solidFill>
                 <a:latin typeface="Calibri"/>
               </a:rPr>
@@ -6352,7 +6352,7 @@
             <a:r>
               <a:rPr sz="1350" b="0" i="0">
                 <a:solidFill>
-                  <a:srgbClr val="1D2B3A"/>
+                  <a:srgbClr val="2B2230"/>
                 </a:solidFill>
                 <a:latin typeface="Calibri"/>
               </a:rPr>
@@ -6374,7 +6374,7 @@
             <a:r>
               <a:rPr sz="1350" b="0" i="0">
                 <a:solidFill>
-                  <a:srgbClr val="1D2B3A"/>
+                  <a:srgbClr val="2B2230"/>
                 </a:solidFill>
                 <a:latin typeface="Calibri"/>
               </a:rPr>
@@ -6425,7 +6425,7 @@
                   </a:txBody>
                   <a:tcPr marL="109728" marT="36576" marB="36576">
                     <a:solidFill>
-                      <a:srgbClr val="264653"/>
+                      <a:srgbClr val="3A1647"/>
                     </a:solidFill>
                   </a:tcPr>
                 </a:tc>
@@ -6447,7 +6447,7 @@
                   </a:txBody>
                   <a:tcPr marL="109728" marT="36576" marB="36576">
                     <a:solidFill>
-                      <a:srgbClr val="264653"/>
+                      <a:srgbClr val="3A1647"/>
                     </a:solidFill>
                   </a:tcPr>
                 </a:tc>
@@ -6469,7 +6469,7 @@
                   </a:txBody>
                   <a:tcPr marL="109728" marT="36576" marB="36576">
                     <a:solidFill>
-                      <a:srgbClr val="264653"/>
+                      <a:srgbClr val="3A1647"/>
                     </a:solidFill>
                   </a:tcPr>
                 </a:tc>
@@ -6483,7 +6483,7 @@
                       <a:r>
                         <a:rPr sz="1250" b="0">
                           <a:solidFill>
-                            <a:srgbClr val="1D2B3A"/>
+                            <a:srgbClr val="2B2230"/>
                           </a:solidFill>
                           <a:latin typeface="Calibri"/>
                         </a:rPr>
@@ -6505,7 +6505,7 @@
                       <a:r>
                         <a:rPr sz="1250" b="0">
                           <a:solidFill>
-                            <a:srgbClr val="1D2B3A"/>
+                            <a:srgbClr val="2B2230"/>
                           </a:solidFill>
                           <a:latin typeface="Calibri"/>
                         </a:rPr>
@@ -6527,7 +6527,7 @@
                       <a:r>
                         <a:rPr sz="1250" b="0">
                           <a:solidFill>
-                            <a:srgbClr val="1D2B3A"/>
+                            <a:srgbClr val="2B2230"/>
                           </a:solidFill>
                           <a:latin typeface="Calibri"/>
                         </a:rPr>
@@ -6551,7 +6551,7 @@
                       <a:r>
                         <a:rPr sz="1250" b="0">
                           <a:solidFill>
-                            <a:srgbClr val="1D2B3A"/>
+                            <a:srgbClr val="2B2230"/>
                           </a:solidFill>
                           <a:latin typeface="Calibri"/>
                         </a:rPr>
@@ -6561,7 +6561,7 @@
                   </a:txBody>
                   <a:tcPr marL="109728" marT="36576" marB="36576">
                     <a:solidFill>
-                      <a:srgbClr val="F2F3F5"/>
+                      <a:srgbClr val="F4F1F6"/>
                     </a:solidFill>
                   </a:tcPr>
                 </a:tc>
@@ -6573,7 +6573,7 @@
                       <a:r>
                         <a:rPr sz="1250" b="0">
                           <a:solidFill>
-                            <a:srgbClr val="1D2B3A"/>
+                            <a:srgbClr val="2B2230"/>
                           </a:solidFill>
                           <a:latin typeface="Calibri"/>
                         </a:rPr>
@@ -6583,7 +6583,7 @@
                   </a:txBody>
                   <a:tcPr marL="109728" marT="36576" marB="36576">
                     <a:solidFill>
-                      <a:srgbClr val="F2F3F5"/>
+                      <a:srgbClr val="F4F1F6"/>
                     </a:solidFill>
                   </a:tcPr>
                 </a:tc>
@@ -6595,7 +6595,7 @@
                       <a:r>
                         <a:rPr sz="1250" b="0">
                           <a:solidFill>
-                            <a:srgbClr val="1D2B3A"/>
+                            <a:srgbClr val="2B2230"/>
                           </a:solidFill>
                           <a:latin typeface="Calibri"/>
                         </a:rPr>
@@ -6605,7 +6605,7 @@
                   </a:txBody>
                   <a:tcPr marL="109728" marT="36576" marB="36576">
                     <a:solidFill>
-                      <a:srgbClr val="F2F3F5"/>
+                      <a:srgbClr val="F4F1F6"/>
                     </a:solidFill>
                   </a:tcPr>
                 </a:tc>
@@ -6619,7 +6619,7 @@
                       <a:r>
                         <a:rPr sz="1250" b="0">
                           <a:solidFill>
-                            <a:srgbClr val="1D2B3A"/>
+                            <a:srgbClr val="2B2230"/>
                           </a:solidFill>
                           <a:latin typeface="Calibri"/>
                         </a:rPr>
@@ -6641,7 +6641,7 @@
                       <a:r>
                         <a:rPr sz="1250" b="0">
                           <a:solidFill>
-                            <a:srgbClr val="1D2B3A"/>
+                            <a:srgbClr val="2B2230"/>
                           </a:solidFill>
                           <a:latin typeface="Calibri"/>
                         </a:rPr>
@@ -6663,7 +6663,7 @@
                       <a:r>
                         <a:rPr sz="1250" b="0">
                           <a:solidFill>
-                            <a:srgbClr val="1D2B3A"/>
+                            <a:srgbClr val="2B2230"/>
                           </a:solidFill>
                           <a:latin typeface="Calibri"/>
                         </a:rPr>
@@ -6697,7 +6697,7 @@
             <a:avLst/>
           </a:prstGeom>
           <a:solidFill>
-            <a:srgbClr val="1E2A36"/>
+            <a:srgbClr val="2A1633"/>
           </a:solidFill>
           <a:ln>
             <a:noFill/>
@@ -6736,7 +6736,7 @@
             <a:r>
               <a:rPr sz="1250" b="0" i="0">
                 <a:solidFill>
-                  <a:srgbClr val="E6EDF3"/>
+                  <a:srgbClr val="ECE3F2"/>
                 </a:solidFill>
                 <a:latin typeface="Consolas"/>
               </a:rPr>
@@ -6758,7 +6758,7 @@
             <a:r>
               <a:rPr sz="1250" b="0" i="0">
                 <a:solidFill>
-                  <a:srgbClr val="E6EDF3"/>
+                  <a:srgbClr val="ECE3F2"/>
                 </a:solidFill>
                 <a:latin typeface="Consolas"/>
               </a:rPr>
@@ -6780,7 +6780,7 @@
             <a:r>
               <a:rPr sz="1250" b="0" i="0">
                 <a:solidFill>
-                  <a:srgbClr val="E6EDF3"/>
+                  <a:srgbClr val="ECE3F2"/>
                 </a:solidFill>
                 <a:latin typeface="Consolas"/>
               </a:rPr>
@@ -6822,7 +6822,7 @@
             <a:avLst/>
           </a:prstGeom>
           <a:solidFill>
-            <a:srgbClr val="2A9D8F"/>
+            <a:srgbClr val="6D2C8F"/>
           </a:solidFill>
           <a:ln>
             <a:noFill/>
@@ -6887,7 +6887,7 @@
             <a:r>
               <a:rPr sz="1200" b="1" i="0">
                 <a:solidFill>
-                  <a:srgbClr val="2A9D8F"/>
+                  <a:srgbClr val="C71E7A"/>
                 </a:solidFill>
                 <a:latin typeface="Calibri"/>
               </a:rPr>
@@ -6932,7 +6932,7 @@
             <a:r>
               <a:rPr sz="3000" b="1" i="0">
                 <a:solidFill>
-                  <a:srgbClr val="264653"/>
+                  <a:srgbClr val="3A1647"/>
                 </a:solidFill>
                 <a:latin typeface="Calibri"/>
               </a:rPr>
@@ -6956,7 +6956,7 @@
             <a:avLst/>
           </a:prstGeom>
           <a:solidFill>
-            <a:srgbClr val="2A9D8F"/>
+            <a:srgbClr val="6D2C8F"/>
           </a:solidFill>
           <a:ln>
             <a:noFill/>
@@ -7021,7 +7021,7 @@
             <a:r>
               <a:rPr sz="1000" b="1" i="0">
                 <a:solidFill>
-                  <a:srgbClr val="2A9D8F"/>
+                  <a:srgbClr val="6D2C8F"/>
                 </a:solidFill>
                 <a:latin typeface="Calibri"/>
               </a:rPr>
@@ -7030,7 +7030,7 @@
             <a:r>
               <a:rPr sz="1000" b="0" i="0">
                 <a:solidFill>
-                  <a:srgbClr val="8A949E"/>
+                  <a:srgbClr val="8A8692"/>
                 </a:solidFill>
                 <a:latin typeface="Calibri"/>
               </a:rPr>
@@ -7039,7 +7039,7 @@
             <a:r>
               <a:rPr sz="1000" b="0" i="0">
                 <a:solidFill>
-                  <a:srgbClr val="8A949E"/>
+                  <a:srgbClr val="8A8692"/>
                 </a:solidFill>
                 <a:latin typeface="Calibri"/>
               </a:rPr>
@@ -7084,7 +7084,7 @@
             <a:r>
               <a:rPr sz="1500" b="1" i="0">
                 <a:solidFill>
-                  <a:srgbClr val="264653"/>
+                  <a:srgbClr val="3A1647"/>
                 </a:solidFill>
                 <a:latin typeface="Calibri"/>
               </a:rPr>
@@ -7093,7 +7093,7 @@
             <a:r>
               <a:rPr sz="1500" b="0" i="0">
                 <a:solidFill>
-                  <a:srgbClr val="1D2B3A"/>
+                  <a:srgbClr val="2B2230"/>
                 </a:solidFill>
                 <a:latin typeface="Calibri"/>
               </a:rPr>
@@ -7115,7 +7115,7 @@
             <a:r>
               <a:rPr sz="1500" b="1" i="0">
                 <a:solidFill>
-                  <a:srgbClr val="264653"/>
+                  <a:srgbClr val="3A1647"/>
                 </a:solidFill>
                 <a:latin typeface="Calibri"/>
               </a:rPr>
@@ -7124,7 +7124,7 @@
             <a:r>
               <a:rPr sz="1500" b="0" i="0">
                 <a:solidFill>
-                  <a:srgbClr val="1D2B3A"/>
+                  <a:srgbClr val="2B2230"/>
                 </a:solidFill>
                 <a:latin typeface="Calibri"/>
               </a:rPr>
@@ -7146,7 +7146,7 @@
             <a:r>
               <a:rPr sz="1500" b="1" i="0">
                 <a:solidFill>
-                  <a:srgbClr val="264653"/>
+                  <a:srgbClr val="3A1647"/>
                 </a:solidFill>
                 <a:latin typeface="Calibri"/>
               </a:rPr>
@@ -7155,7 +7155,7 @@
             <a:r>
               <a:rPr sz="1500" b="0" i="0">
                 <a:solidFill>
-                  <a:srgbClr val="1D2B3A"/>
+                  <a:srgbClr val="2B2230"/>
                 </a:solidFill>
                 <a:latin typeface="Calibri"/>
               </a:rPr>
@@ -7177,7 +7177,7 @@
             <a:r>
               <a:rPr sz="1500" b="1" i="0">
                 <a:solidFill>
-                  <a:srgbClr val="264653"/>
+                  <a:srgbClr val="3A1647"/>
                 </a:solidFill>
                 <a:latin typeface="Calibri"/>
               </a:rPr>
@@ -7186,7 +7186,7 @@
             <a:r>
               <a:rPr sz="1500" b="0" i="0">
                 <a:solidFill>
-                  <a:srgbClr val="1D2B3A"/>
+                  <a:srgbClr val="2B2230"/>
                 </a:solidFill>
                 <a:latin typeface="Calibri"/>
               </a:rPr>
@@ -7208,7 +7208,7 @@
             <a:r>
               <a:rPr sz="1500" b="1" i="0">
                 <a:solidFill>
-                  <a:srgbClr val="264653"/>
+                  <a:srgbClr val="3A1647"/>
                 </a:solidFill>
                 <a:latin typeface="Calibri"/>
               </a:rPr>
@@ -7217,7 +7217,7 @@
             <a:r>
               <a:rPr sz="1500" b="0" i="0">
                 <a:solidFill>
-                  <a:srgbClr val="1D2B3A"/>
+                  <a:srgbClr val="2B2230"/>
                 </a:solidFill>
                 <a:latin typeface="Calibri"/>
               </a:rPr>
@@ -7286,7 +7286,7 @@
             <a:r>
               <a:rPr sz="1100" b="0" i="1">
                 <a:solidFill>
-                  <a:srgbClr val="8A949E"/>
+                  <a:srgbClr val="8A8692"/>
                 </a:solidFill>
                 <a:latin typeface="Calibri"/>
               </a:rPr>
@@ -7328,7 +7328,7 @@
             <a:avLst/>
           </a:prstGeom>
           <a:solidFill>
-            <a:srgbClr val="2A9D8F"/>
+            <a:srgbClr val="6D2C8F"/>
           </a:solidFill>
           <a:ln>
             <a:noFill/>
@@ -7393,7 +7393,7 @@
             <a:r>
               <a:rPr sz="1200" b="1" i="0">
                 <a:solidFill>
-                  <a:srgbClr val="2A9D8F"/>
+                  <a:srgbClr val="C71E7A"/>
                 </a:solidFill>
                 <a:latin typeface="Calibri"/>
               </a:rPr>
@@ -7438,7 +7438,7 @@
             <a:r>
               <a:rPr sz="3000" b="1" i="0">
                 <a:solidFill>
-                  <a:srgbClr val="264653"/>
+                  <a:srgbClr val="3A1647"/>
                 </a:solidFill>
                 <a:latin typeface="Calibri"/>
               </a:rPr>
@@ -7462,7 +7462,7 @@
             <a:avLst/>
           </a:prstGeom>
           <a:solidFill>
-            <a:srgbClr val="2A9D8F"/>
+            <a:srgbClr val="6D2C8F"/>
           </a:solidFill>
           <a:ln>
             <a:noFill/>
@@ -7527,7 +7527,7 @@
             <a:r>
               <a:rPr sz="1000" b="1" i="0">
                 <a:solidFill>
-                  <a:srgbClr val="2A9D8F"/>
+                  <a:srgbClr val="6D2C8F"/>
                 </a:solidFill>
                 <a:latin typeface="Calibri"/>
               </a:rPr>
@@ -7536,7 +7536,7 @@
             <a:r>
               <a:rPr sz="1000" b="0" i="0">
                 <a:solidFill>
-                  <a:srgbClr val="8A949E"/>
+                  <a:srgbClr val="8A8692"/>
                 </a:solidFill>
                 <a:latin typeface="Calibri"/>
               </a:rPr>
@@ -7545,7 +7545,7 @@
             <a:r>
               <a:rPr sz="1000" b="0" i="0">
                 <a:solidFill>
-                  <a:srgbClr val="8A949E"/>
+                  <a:srgbClr val="8A8692"/>
                 </a:solidFill>
                 <a:latin typeface="Calibri"/>
               </a:rPr>
@@ -7614,7 +7614,7 @@
             <a:r>
               <a:rPr sz="1500" b="1" i="0">
                 <a:solidFill>
-                  <a:srgbClr val="264653"/>
+                  <a:srgbClr val="3A1647"/>
                 </a:solidFill>
                 <a:latin typeface="Calibri"/>
               </a:rPr>
@@ -7636,7 +7636,7 @@
             <a:r>
               <a:rPr sz="1150" b="0" i="0">
                 <a:solidFill>
-                  <a:srgbClr val="8A949E"/>
+                  <a:srgbClr val="8A8692"/>
                 </a:solidFill>
                 <a:latin typeface="Calibri"/>
               </a:rPr>
@@ -7658,7 +7658,7 @@
             <a:r>
               <a:rPr sz="1400" b="1" i="0">
                 <a:solidFill>
-                  <a:srgbClr val="2A9D8F"/>
+                  <a:srgbClr val="6D2C8F"/>
                 </a:solidFill>
                 <a:latin typeface="Calibri"/>
               </a:rPr>
@@ -7667,7 +7667,7 @@
             <a:r>
               <a:rPr sz="1400" b="0" i="0">
                 <a:solidFill>
-                  <a:srgbClr val="1D2B3A"/>
+                  <a:srgbClr val="2B2230"/>
                 </a:solidFill>
                 <a:latin typeface="Calibri"/>
               </a:rPr>
@@ -7689,7 +7689,7 @@
             <a:r>
               <a:rPr sz="1400" b="1" i="0">
                 <a:solidFill>
-                  <a:srgbClr val="E76F51"/>
+                  <a:srgbClr val="C71E7A"/>
                 </a:solidFill>
                 <a:latin typeface="Calibri"/>
               </a:rPr>
@@ -7698,7 +7698,7 @@
             <a:r>
               <a:rPr sz="1400" b="0" i="0">
                 <a:solidFill>
-                  <a:srgbClr val="1D2B3A"/>
+                  <a:srgbClr val="2B2230"/>
                 </a:solidFill>
                 <a:latin typeface="Calibri"/>
               </a:rPr>
@@ -7720,7 +7720,7 @@
             <a:r>
               <a:rPr sz="1300" b="0" i="1">
                 <a:solidFill>
-                  <a:srgbClr val="264653"/>
+                  <a:srgbClr val="3A1647"/>
                 </a:solidFill>
                 <a:latin typeface="Calibri"/>
               </a:rPr>
@@ -7742,7 +7742,7 @@
             <a:r>
               <a:rPr sz="1150" b="0" i="0">
                 <a:solidFill>
-                  <a:srgbClr val="8A949E"/>
+                  <a:srgbClr val="8A8692"/>
                 </a:solidFill>
                 <a:latin typeface="Calibri"/>
               </a:rPr>
@@ -7787,7 +7787,7 @@
             <a:r>
               <a:rPr sz="1050" b="0" i="1">
                 <a:solidFill>
-                  <a:srgbClr val="8A949E"/>
+                  <a:srgbClr val="8A8692"/>
                 </a:solidFill>
                 <a:latin typeface="Calibri"/>
               </a:rPr>
@@ -7829,7 +7829,7 @@
             <a:avLst/>
           </a:prstGeom>
           <a:solidFill>
-            <a:srgbClr val="2A9D8F"/>
+            <a:srgbClr val="6D2C8F"/>
           </a:solidFill>
           <a:ln>
             <a:noFill/>
@@ -7894,7 +7894,7 @@
             <a:r>
               <a:rPr sz="1200" b="1" i="0">
                 <a:solidFill>
-                  <a:srgbClr val="2A9D8F"/>
+                  <a:srgbClr val="C71E7A"/>
                 </a:solidFill>
                 <a:latin typeface="Calibri"/>
               </a:rPr>
@@ -7939,7 +7939,7 @@
             <a:r>
               <a:rPr sz="3000" b="1" i="0">
                 <a:solidFill>
-                  <a:srgbClr val="264653"/>
+                  <a:srgbClr val="3A1647"/>
                 </a:solidFill>
                 <a:latin typeface="Calibri"/>
               </a:rPr>
@@ -7963,7 +7963,7 @@
             <a:avLst/>
           </a:prstGeom>
           <a:solidFill>
-            <a:srgbClr val="2A9D8F"/>
+            <a:srgbClr val="6D2C8F"/>
           </a:solidFill>
           <a:ln>
             <a:noFill/>
@@ -8028,7 +8028,7 @@
             <a:r>
               <a:rPr sz="1000" b="1" i="0">
                 <a:solidFill>
-                  <a:srgbClr val="2A9D8F"/>
+                  <a:srgbClr val="6D2C8F"/>
                 </a:solidFill>
                 <a:latin typeface="Calibri"/>
               </a:rPr>
@@ -8037,7 +8037,7 @@
             <a:r>
               <a:rPr sz="1000" b="0" i="0">
                 <a:solidFill>
-                  <a:srgbClr val="8A949E"/>
+                  <a:srgbClr val="8A8692"/>
                 </a:solidFill>
                 <a:latin typeface="Calibri"/>
               </a:rPr>
@@ -8046,7 +8046,7 @@
             <a:r>
               <a:rPr sz="1000" b="0" i="0">
                 <a:solidFill>
-                  <a:srgbClr val="8A949E"/>
+                  <a:srgbClr val="8A8692"/>
                 </a:solidFill>
                 <a:latin typeface="Calibri"/>
               </a:rPr>
@@ -8091,7 +8091,7 @@
             <a:r>
               <a:rPr sz="1500" b="0" i="0">
                 <a:solidFill>
-                  <a:srgbClr val="1D2B3A"/>
+                  <a:srgbClr val="2B2230"/>
                 </a:solidFill>
                 <a:latin typeface="Calibri"/>
               </a:rPr>
@@ -8113,7 +8113,7 @@
             <a:r>
               <a:rPr sz="1400" b="1" i="0">
                 <a:solidFill>
-                  <a:srgbClr val="264653"/>
+                  <a:srgbClr val="3A1647"/>
                 </a:solidFill>
                 <a:latin typeface="Calibri"/>
               </a:rPr>
@@ -8135,7 +8135,7 @@
             <a:r>
               <a:rPr sz="1400" b="0" i="0">
                 <a:solidFill>
-                  <a:srgbClr val="1D2B3A"/>
+                  <a:srgbClr val="2B2230"/>
                 </a:solidFill>
                 <a:latin typeface="Calibri"/>
               </a:rPr>
@@ -8144,7 +8144,7 @@
             <a:r>
               <a:rPr sz="1400" b="1" i="0">
                 <a:solidFill>
-                  <a:srgbClr val="2A9D8F"/>
+                  <a:srgbClr val="6D2C8F"/>
                 </a:solidFill>
                 <a:latin typeface="Calibri"/>
               </a:rPr>
@@ -8153,7 +8153,7 @@
             <a:r>
               <a:rPr sz="1400" b="0" i="0">
                 <a:solidFill>
-                  <a:srgbClr val="1D2B3A"/>
+                  <a:srgbClr val="2B2230"/>
                 </a:solidFill>
                 <a:latin typeface="Calibri"/>
               </a:rPr>
@@ -8175,7 +8175,7 @@
             <a:r>
               <a:rPr sz="1400" b="0" i="0">
                 <a:solidFill>
-                  <a:srgbClr val="1D2B3A"/>
+                  <a:srgbClr val="2B2230"/>
                 </a:solidFill>
                 <a:latin typeface="Calibri"/>
               </a:rPr>
@@ -8199,7 +8199,7 @@
             <a:avLst/>
           </a:prstGeom>
           <a:solidFill>
-            <a:srgbClr val="1E2A36"/>
+            <a:srgbClr val="2A1633"/>
           </a:solidFill>
           <a:ln>
             <a:noFill/>
@@ -8238,7 +8238,7 @@
             <a:r>
               <a:rPr sz="1300" b="0" i="0">
                 <a:solidFill>
-                  <a:srgbClr val="E6EDF3"/>
+                  <a:srgbClr val="ECE3F2"/>
                 </a:solidFill>
                 <a:latin typeface="Consolas"/>
               </a:rPr>
@@ -8260,7 +8260,7 @@
             <a:r>
               <a:rPr sz="1300" b="0" i="0">
                 <a:solidFill>
-                  <a:srgbClr val="E6EDF3"/>
+                  <a:srgbClr val="ECE3F2"/>
                 </a:solidFill>
                 <a:latin typeface="Consolas"/>
               </a:rPr>
@@ -8282,7 +8282,7 @@
             <a:r>
               <a:rPr sz="1300" b="0" i="0">
                 <a:solidFill>
-                  <a:srgbClr val="E6EDF3"/>
+                  <a:srgbClr val="ECE3F2"/>
                 </a:solidFill>
                 <a:latin typeface="Consolas"/>
               </a:rPr>
@@ -8306,7 +8306,7 @@
             <a:avLst/>
           </a:prstGeom>
           <a:solidFill>
-            <a:srgbClr val="1E2A36"/>
+            <a:srgbClr val="2A1633"/>
           </a:solidFill>
           <a:ln>
             <a:noFill/>
@@ -8345,7 +8345,7 @@
             <a:r>
               <a:rPr sz="1150" b="0" i="0">
                 <a:solidFill>
-                  <a:srgbClr val="E6EDF3"/>
+                  <a:srgbClr val="ECE3F2"/>
                 </a:solidFill>
                 <a:latin typeface="Consolas"/>
               </a:rPr>
@@ -8367,7 +8367,7 @@
             <a:r>
               <a:rPr sz="1150" b="0" i="0">
                 <a:solidFill>
-                  <a:srgbClr val="E6EDF3"/>
+                  <a:srgbClr val="ECE3F2"/>
                 </a:solidFill>
                 <a:latin typeface="Consolas"/>
               </a:rPr>
@@ -8389,7 +8389,7 @@
             <a:r>
               <a:rPr sz="1150" b="0" i="0">
                 <a:solidFill>
-                  <a:srgbClr val="E6EDF3"/>
+                  <a:srgbClr val="ECE3F2"/>
                 </a:solidFill>
                 <a:latin typeface="Consolas"/>
               </a:rPr>
@@ -8411,7 +8411,7 @@
             <a:r>
               <a:rPr sz="1150" b="0" i="0">
                 <a:solidFill>
-                  <a:srgbClr val="E6EDF3"/>
+                  <a:srgbClr val="ECE3F2"/>
                 </a:solidFill>
                 <a:latin typeface="Consolas"/>
               </a:rPr>
@@ -8433,7 +8433,7 @@
             <a:r>
               <a:rPr sz="1150" b="0" i="0">
                 <a:solidFill>
-                  <a:srgbClr val="E6EDF3"/>
+                  <a:srgbClr val="ECE3F2"/>
                 </a:solidFill>
                 <a:latin typeface="Consolas"/>
               </a:rPr>
@@ -8455,7 +8455,7 @@
             <a:r>
               <a:rPr sz="1150" b="0" i="0">
                 <a:solidFill>
-                  <a:srgbClr val="E6EDF3"/>
+                  <a:srgbClr val="ECE3F2"/>
                 </a:solidFill>
                 <a:latin typeface="Consolas"/>
               </a:rPr>
@@ -8477,7 +8477,7 @@
             <a:r>
               <a:rPr sz="1150" b="0" i="0">
                 <a:solidFill>
-                  <a:srgbClr val="E6EDF3"/>
+                  <a:srgbClr val="ECE3F2"/>
                 </a:solidFill>
                 <a:latin typeface="Consolas"/>
               </a:rPr>
@@ -8499,7 +8499,7 @@
             <a:r>
               <a:rPr sz="1150" b="0" i="0">
                 <a:solidFill>
-                  <a:srgbClr val="E6EDF3"/>
+                  <a:srgbClr val="ECE3F2"/>
                 </a:solidFill>
                 <a:latin typeface="Consolas"/>
               </a:rPr>
@@ -8544,7 +8544,7 @@
             <a:r>
               <a:rPr sz="1100" b="0" i="1">
                 <a:solidFill>
-                  <a:srgbClr val="8A949E"/>
+                  <a:srgbClr val="8A8692"/>
                 </a:solidFill>
                 <a:latin typeface="Calibri"/>
               </a:rPr>
@@ -8586,7 +8586,7 @@
             <a:avLst/>
           </a:prstGeom>
           <a:solidFill>
-            <a:srgbClr val="264653"/>
+            <a:srgbClr val="3A1647"/>
           </a:solidFill>
           <a:ln>
             <a:noFill/>
@@ -8630,7 +8630,7 @@
             <a:avLst/>
           </a:prstGeom>
           <a:solidFill>
-            <a:srgbClr val="2A9D8F"/>
+            <a:srgbClr val="C71E7A"/>
           </a:solidFill>
           <a:ln>
             <a:noFill/>
@@ -8740,7 +8740,7 @@
             <a:r>
               <a:rPr sz="1800" b="1" i="0">
                 <a:solidFill>
-                  <a:srgbClr val="2A9D8F"/>
+                  <a:srgbClr val="CB9FE0"/>
                 </a:solidFill>
                 <a:latin typeface="Calibri"/>
               </a:rPr>
@@ -8749,7 +8749,7 @@
             <a:r>
               <a:rPr sz="1800" b="0" i="0">
                 <a:solidFill>
-                  <a:srgbClr val="DFEAE8"/>
+                  <a:srgbClr val="E6D8EE"/>
                 </a:solidFill>
                 <a:latin typeface="Calibri"/>
               </a:rPr>
@@ -8771,7 +8771,7 @@
             <a:r>
               <a:rPr sz="1800" b="1" i="0">
                 <a:solidFill>
-                  <a:srgbClr val="2A9D8F"/>
+                  <a:srgbClr val="CB9FE0"/>
                 </a:solidFill>
                 <a:latin typeface="Calibri"/>
               </a:rPr>
@@ -8780,7 +8780,7 @@
             <a:r>
               <a:rPr sz="1800" b="0" i="0">
                 <a:solidFill>
-                  <a:srgbClr val="DFEAE8"/>
+                  <a:srgbClr val="E6D8EE"/>
                 </a:solidFill>
                 <a:latin typeface="Calibri"/>
               </a:rPr>
@@ -8802,7 +8802,7 @@
             <a:r>
               <a:rPr sz="1800" b="1" i="0">
                 <a:solidFill>
-                  <a:srgbClr val="2A9D8F"/>
+                  <a:srgbClr val="CB9FE0"/>
                 </a:solidFill>
                 <a:latin typeface="Calibri"/>
               </a:rPr>
@@ -8811,7 +8811,7 @@
             <a:r>
               <a:rPr sz="1800" b="0" i="0">
                 <a:solidFill>
-                  <a:srgbClr val="DFEAE8"/>
+                  <a:srgbClr val="E6D8EE"/>
                 </a:solidFill>
                 <a:latin typeface="Calibri"/>
               </a:rPr>
@@ -8833,7 +8833,7 @@
             <a:r>
               <a:rPr sz="1800" b="1" i="0">
                 <a:solidFill>
-                  <a:srgbClr val="2A9D8F"/>
+                  <a:srgbClr val="CB9FE0"/>
                 </a:solidFill>
                 <a:latin typeface="Calibri"/>
               </a:rPr>
@@ -8842,7 +8842,7 @@
             <a:r>
               <a:rPr sz="1800" b="0" i="0">
                 <a:solidFill>
-                  <a:srgbClr val="DFEAE8"/>
+                  <a:srgbClr val="E6D8EE"/>
                 </a:solidFill>
                 <a:latin typeface="Calibri"/>
               </a:rPr>
@@ -8887,7 +8887,7 @@
             <a:r>
               <a:rPr sz="1300" b="0" i="0">
                 <a:solidFill>
-                  <a:srgbClr val="8A949E"/>
+                  <a:srgbClr val="B7A9C2"/>
                 </a:solidFill>
                 <a:latin typeface="Calibri"/>
               </a:rPr>
@@ -8896,7 +8896,7 @@
             <a:r>
               <a:rPr sz="1300" b="1" i="0">
                 <a:solidFill>
-                  <a:srgbClr val="2A9D8F"/>
+                  <a:srgbClr val="CB9FE0"/>
                 </a:solidFill>
                 <a:latin typeface="Calibri"/>
               </a:rPr>

--- a/presentation/kob.pptx
+++ b/presentation/kob.pptx
@@ -3222,7 +3222,7 @@
                 <a:solidFill>
                   <a:srgbClr val="FFFFFF"/>
                 </a:solidFill>
-                <a:latin typeface="Calibri"/>
+                <a:latin typeface="Georgia"/>
               </a:rPr>
               <a:t>kob</a:t>
             </a:r>
@@ -3267,7 +3267,7 @@
                 <a:solidFill>
                   <a:srgbClr val="E6D8EE"/>
                 </a:solidFill>
-                <a:latin typeface="Calibri"/>
+                <a:latin typeface="Georgia"/>
               </a:rPr>
               <a:t>A tiny, self-discovering Parquet query server — served as Apache Arrow, fast.</a:t>
             </a:r>
@@ -3312,7 +3312,7 @@
                 <a:solidFill>
                   <a:srgbClr val="B7A9C2"/>
                 </a:solidFill>
-                <a:latin typeface="Calibri"/>
+                <a:latin typeface="Georgia"/>
               </a:rPr>
               <a:t>Drop Parquet in a folder → a discoverable, filterable, blazing-fast Arrow API.</a:t>
             </a:r>
@@ -3357,7 +3357,7 @@
                 <a:solidFill>
                   <a:srgbClr val="E6D8EE"/>
                 </a:solidFill>
-                <a:latin typeface="Calibri"/>
+                <a:latin typeface="Georgia"/>
               </a:rPr>
               <a:t>Apache Arrow Flight   ·   DuckDB   ·   FastAPI / Swagger          </a:t>
             </a:r>
@@ -3366,7 +3366,7 @@
                 <a:solidFill>
                   <a:srgbClr val="CB9FE0"/>
                 </a:solidFill>
-                <a:latin typeface="Calibri"/>
+                <a:latin typeface="Georgia"/>
               </a:rPr>
               <a:t>github.com/iyedexe/kob</a:t>
             </a:r>
@@ -3473,7 +3473,7 @@
                 <a:solidFill>
                   <a:srgbClr val="C71E7A"/>
                 </a:solidFill>
-                <a:latin typeface="Calibri"/>
+                <a:latin typeface="Georgia"/>
               </a:rPr>
               <a:t>MOTIVATION</a:t>
             </a:r>
@@ -3518,7 +3518,7 @@
                 <a:solidFill>
                   <a:srgbClr val="3A1647"/>
                 </a:solidFill>
-                <a:latin typeface="Calibri"/>
+                <a:latin typeface="Georgia"/>
               </a:rPr>
               <a:t>Serving a folder of Parquet shouldn't be hard — or slow</a:t>
             </a:r>
@@ -3607,7 +3607,7 @@
                 <a:solidFill>
                   <a:srgbClr val="6D2C8F"/>
                 </a:solidFill>
-                <a:latin typeface="Calibri"/>
+                <a:latin typeface="Georgia"/>
               </a:rPr>
               <a:t>kob</a:t>
             </a:r>
@@ -3616,7 +3616,7 @@
                 <a:solidFill>
                   <a:srgbClr val="8A8692"/>
                 </a:solidFill>
-                <a:latin typeface="Calibri"/>
+                <a:latin typeface="Georgia"/>
               </a:rPr>
               <a:t>  ·  self-discovering Parquet → Apache Arrow</a:t>
             </a:r>
@@ -3625,7 +3625,7 @@
                 <a:solidFill>
                   <a:srgbClr val="8A8692"/>
                 </a:solidFill>
-                <a:latin typeface="Calibri"/>
+                <a:latin typeface="Georgia"/>
               </a:rPr>
               <a:t>          2 / 9</a:t>
             </a:r>
@@ -3670,7 +3670,7 @@
                 <a:solidFill>
                   <a:srgbClr val="2B2230"/>
                 </a:solidFill>
-                <a:latin typeface="Calibri"/>
+                <a:latin typeface="Georgia"/>
               </a:rPr>
               <a:t>A producer microservice writes Parquet to a folder. You must serve it, read-only, to Python / C# / C++ / Excel clients. Every usual option is overkill or slow:</a:t>
             </a:r>
@@ -3803,7 +3803,7 @@
                 <a:solidFill>
                   <a:srgbClr val="3A1647"/>
                 </a:solidFill>
-                <a:latin typeface="Calibri"/>
+                <a:latin typeface="Georgia"/>
               </a:rPr>
               <a:t>A warehouse / broker</a:t>
             </a:r>
@@ -3825,7 +3825,7 @@
                 <a:solidFill>
                   <a:srgbClr val="2B2230"/>
                 </a:solidFill>
-                <a:latin typeface="Calibri"/>
+                <a:latin typeface="Georgia"/>
               </a:rPr>
               <a:t>Heavy infrastructure in front of what is already a queryable, columnar file format.</a:t>
             </a:r>
@@ -3958,7 +3958,7 @@
                 <a:solidFill>
                   <a:srgbClr val="3A1647"/>
                 </a:solidFill>
-                <a:latin typeface="Calibri"/>
+                <a:latin typeface="Georgia"/>
               </a:rPr>
               <a:t>A hand-written API</a:t>
             </a:r>
@@ -3980,7 +3980,7 @@
                 <a:solidFill>
                   <a:srgbClr val="2B2230"/>
                 </a:solidFill>
-                <a:latin typeface="Calibri"/>
+                <a:latin typeface="Georgia"/>
               </a:rPr>
               <a:t>Declare a schema + catalog in code, then redeploy on every new dataset, partition or column.</a:t>
             </a:r>
@@ -4113,7 +4113,7 @@
                 <a:solidFill>
                   <a:srgbClr val="3A1647"/>
                 </a:solidFill>
-                <a:latin typeface="Calibri"/>
+                <a:latin typeface="Georgia"/>
               </a:rPr>
               <a:t>A JSON / Protobuf endpoint</a:t>
             </a:r>
@@ -4135,7 +4135,7 @@
                 <a:solidFill>
                   <a:srgbClr val="2B2230"/>
                 </a:solidFill>
-                <a:latin typeface="Calibri"/>
+                <a:latin typeface="Georgia"/>
               </a:rPr>
               <a:t>Pays the serialization tax — Arrow's FAQ puts (de)serialization at 80–90% of compute cost.</a:t>
             </a:r>
@@ -4180,7 +4180,7 @@
                 <a:solidFill>
                   <a:srgbClr val="3A1647"/>
                 </a:solidFill>
-                <a:latin typeface="Calibri"/>
+                <a:latin typeface="Georgia"/>
               </a:rPr>
               <a:t>What we actually want:  </a:t>
             </a:r>
@@ -4189,7 +4189,7 @@
                 <a:solidFill>
                   <a:srgbClr val="6D2C8F"/>
                 </a:solidFill>
-                <a:latin typeface="Calibri"/>
+                <a:latin typeface="Georgia"/>
               </a:rPr>
               <a:t>self-discovering</a:t>
             </a:r>
@@ -4198,7 +4198,7 @@
                 <a:solidFill>
                   <a:srgbClr val="2B2230"/>
                 </a:solidFill>
-                <a:latin typeface="Calibri"/>
+                <a:latin typeface="Georgia"/>
               </a:rPr>
               <a:t> (no hardcoded schema)  ·  </a:t>
             </a:r>
@@ -4207,7 +4207,7 @@
                 <a:solidFill>
                   <a:srgbClr val="6D2C8F"/>
                 </a:solidFill>
-                <a:latin typeface="Calibri"/>
+                <a:latin typeface="Georgia"/>
               </a:rPr>
               <a:t>minimal</a:t>
             </a:r>
@@ -4216,7 +4216,7 @@
                 <a:solidFill>
                   <a:srgbClr val="2B2230"/>
                 </a:solidFill>
-                <a:latin typeface="Calibri"/>
+                <a:latin typeface="Georgia"/>
               </a:rPr>
               <a:t> (tiny footprint)  ·  </a:t>
             </a:r>
@@ -4225,7 +4225,7 @@
                 <a:solidFill>
                   <a:srgbClr val="6D2C8F"/>
                 </a:solidFill>
-                <a:latin typeface="Calibri"/>
+                <a:latin typeface="Georgia"/>
               </a:rPr>
               <a:t>blazing fast</a:t>
             </a:r>
@@ -4234,7 +4234,7 @@
                 <a:solidFill>
                   <a:srgbClr val="2B2230"/>
                 </a:solidFill>
-                <a:latin typeface="Calibri"/>
+                <a:latin typeface="Georgia"/>
               </a:rPr>
               <a:t> (no serialization tax).</a:t>
             </a:r>
@@ -4341,7 +4341,7 @@
                 <a:solidFill>
                   <a:srgbClr val="C71E7A"/>
                 </a:solidFill>
-                <a:latin typeface="Calibri"/>
+                <a:latin typeface="Georgia"/>
               </a:rPr>
               <a:t>OVERVIEW</a:t>
             </a:r>
@@ -4386,7 +4386,7 @@
                 <a:solidFill>
                   <a:srgbClr val="3A1647"/>
                 </a:solidFill>
-                <a:latin typeface="Calibri"/>
+                <a:latin typeface="Georgia"/>
               </a:rPr>
               <a:t>What kob is</a:t>
             </a:r>
@@ -4475,7 +4475,7 @@
                 <a:solidFill>
                   <a:srgbClr val="6D2C8F"/>
                 </a:solidFill>
-                <a:latin typeface="Calibri"/>
+                <a:latin typeface="Georgia"/>
               </a:rPr>
               <a:t>kob</a:t>
             </a:r>
@@ -4484,7 +4484,7 @@
                 <a:solidFill>
                   <a:srgbClr val="8A8692"/>
                 </a:solidFill>
-                <a:latin typeface="Calibri"/>
+                <a:latin typeface="Georgia"/>
               </a:rPr>
               <a:t>  ·  self-discovering Parquet → Apache Arrow</a:t>
             </a:r>
@@ -4493,7 +4493,7 @@
                 <a:solidFill>
                   <a:srgbClr val="8A8692"/>
                 </a:solidFill>
-                <a:latin typeface="Calibri"/>
+                <a:latin typeface="Georgia"/>
               </a:rPr>
               <a:t>          3 / 9</a:t>
             </a:r>
@@ -4538,7 +4538,7 @@
                 <a:solidFill>
                   <a:srgbClr val="2B2230"/>
                 </a:solidFill>
-                <a:latin typeface="Calibri"/>
+                <a:latin typeface="Georgia"/>
               </a:rPr>
               <a:t>Point it at a directory; it discovers your datasets, tells clients what they can filter on per folder and per column, and streams results as Apache Arrow. ~750 lines of core server.</a:t>
             </a:r>
@@ -4671,7 +4671,7 @@
                 <a:solidFill>
                   <a:srgbClr val="3A1647"/>
                 </a:solidFill>
-                <a:latin typeface="Calibri"/>
+                <a:latin typeface="Georgia"/>
               </a:rPr>
               <a:t>Tiny</a:t>
             </a:r>
@@ -4693,7 +4693,7 @@
                 <a:solidFill>
                   <a:srgbClr val="2B2230"/>
                 </a:solidFill>
-                <a:latin typeface="Calibri"/>
+                <a:latin typeface="Georgia"/>
               </a:rPr>
               <a:t>Four dependencies — DuckDB, PyArrow, FastAPI, uvicorn. No DB, no broker, no config, no schema.</a:t>
             </a:r>
@@ -4826,7 +4826,7 @@
                 <a:solidFill>
                   <a:srgbClr val="3A1647"/>
                 </a:solidFill>
-                <a:latin typeface="Calibri"/>
+                <a:latin typeface="Georgia"/>
               </a:rPr>
               <a:t>Self-configuring</a:t>
             </a:r>
@@ -4848,7 +4848,7 @@
                 <a:solidFill>
                   <a:srgbClr val="2B2230"/>
                 </a:solidFill>
-                <a:latin typeface="Calibri"/>
+                <a:latin typeface="Georgia"/>
               </a:rPr>
               <a:t>Drop new files / partitions / datasets — they appear live. Discovery reads folder names + one file's metadata; never scans data.</a:t>
             </a:r>
@@ -4981,7 +4981,7 @@
                 <a:solidFill>
                   <a:srgbClr val="3A1647"/>
                 </a:solidFill>
-                <a:latin typeface="Calibri"/>
+                <a:latin typeface="Georgia"/>
               </a:rPr>
               <a:t>Fast</a:t>
             </a:r>
@@ -5003,7 +5003,7 @@
                 <a:solidFill>
                   <a:srgbClr val="2B2230"/>
                 </a:solidFill>
-                <a:latin typeface="Calibri"/>
+                <a:latin typeface="Georgia"/>
               </a:rPr>
               <a:t>DuckDB pushes partition/predicate/projection pruning into the scan; results stream as Arrow over Flight — nothing to deserialize.</a:t>
             </a:r>
@@ -5136,7 +5136,7 @@
                 <a:solidFill>
                   <a:srgbClr val="3A1647"/>
                 </a:solidFill>
-                <a:latin typeface="Calibri"/>
+                <a:latin typeface="Georgia"/>
               </a:rPr>
               <a:t>Safe</a:t>
             </a:r>
@@ -5158,7 +5158,7 @@
                 <a:solidFill>
                   <a:srgbClr val="2B2230"/>
                 </a:solidFill>
-                <a:latin typeface="Calibri"/>
+                <a:latin typeface="Georgia"/>
               </a:rPr>
               <a:t>Read-only. Dataset names sandboxed to the root; columns/ops validated; every value a bound parameter (no SQL injection).</a:t>
             </a:r>
@@ -5265,7 +5265,7 @@
                 <a:solidFill>
                   <a:srgbClr val="C71E7A"/>
                 </a:solidFill>
-                <a:latin typeface="Calibri"/>
+                <a:latin typeface="Georgia"/>
               </a:rPr>
               <a:t>THEORY</a:t>
             </a:r>
@@ -5310,7 +5310,7 @@
                 <a:solidFill>
                   <a:srgbClr val="3A1647"/>
                 </a:solidFill>
-                <a:latin typeface="Calibri"/>
+                <a:latin typeface="Georgia"/>
               </a:rPr>
               <a:t>Why Apache Arrow — the 30-second theory</a:t>
             </a:r>
@@ -5399,7 +5399,7 @@
                 <a:solidFill>
                   <a:srgbClr val="6D2C8F"/>
                 </a:solidFill>
-                <a:latin typeface="Calibri"/>
+                <a:latin typeface="Georgia"/>
               </a:rPr>
               <a:t>kob</a:t>
             </a:r>
@@ -5408,7 +5408,7 @@
                 <a:solidFill>
                   <a:srgbClr val="8A8692"/>
                 </a:solidFill>
-                <a:latin typeface="Calibri"/>
+                <a:latin typeface="Georgia"/>
               </a:rPr>
               <a:t>  ·  self-discovering Parquet → Apache Arrow</a:t>
             </a:r>
@@ -5417,7 +5417,7 @@
                 <a:solidFill>
                   <a:srgbClr val="8A8692"/>
                 </a:solidFill>
-                <a:latin typeface="Calibri"/>
+                <a:latin typeface="Georgia"/>
               </a:rPr>
               <a:t>          4 / 9</a:t>
             </a:r>
@@ -5462,7 +5462,7 @@
                 <a:solidFill>
                   <a:srgbClr val="3A1647"/>
                 </a:solidFill>
-                <a:latin typeface="Calibri"/>
+                <a:latin typeface="Georgia"/>
               </a:rPr>
               <a:t>Row vs. columnar is the whole story:</a:t>
             </a:r>
@@ -5484,7 +5484,7 @@
                 <a:solidFill>
                   <a:srgbClr val="2B2230"/>
                 </a:solidFill>
-                <a:latin typeface="Calibri"/>
+                <a:latin typeface="Georgia"/>
               </a:rPr>
               <a:t>●  JSON &amp; Protobuf are row-oriented. The sender encodes every value field-by-field; the receiver decodes every value and rebuilds columns.</a:t>
             </a:r>
@@ -5506,7 +5506,7 @@
                 <a:solidFill>
                   <a:srgbClr val="2B2230"/>
                 </a:solidFill>
-                <a:latin typeface="Calibri"/>
+                <a:latin typeface="Georgia"/>
               </a:rPr>
               <a:t>●  Cost scales with rows × cols — and grows super-linearly with result size.</a:t>
             </a:r>
@@ -5528,7 +5528,7 @@
                 <a:solidFill>
                   <a:srgbClr val="2B2230"/>
                 </a:solidFill>
-                <a:latin typeface="Calibri"/>
+                <a:latin typeface="Georgia"/>
               </a:rPr>
               <a:t>●  Arrow's columnar wire layout IS its in-memory layout. Reading a result is a header parse + buffer-pointer setup — essentially nothing to deserialize.</a:t>
             </a:r>
@@ -5550,7 +5550,7 @@
                 <a:solidFill>
                   <a:srgbClr val="2B2230"/>
                 </a:solidFill>
-                <a:latin typeface="Calibri"/>
+                <a:latin typeface="Georgia"/>
               </a:rPr>
               <a:t>●  Arrow Flight uses Protobuf only for its tiny control envelope (tickets), never for the bulk data.</a:t>
             </a:r>
@@ -5591,7 +5591,7 @@
                           <a:solidFill>
                             <a:srgbClr val="FFFFFF"/>
                           </a:solidFill>
-                          <a:latin typeface="Calibri"/>
+                          <a:latin typeface="Georgia"/>
                         </a:rPr>
                         <a:t>Format</a:t>
                       </a:r>
@@ -5613,7 +5613,7 @@
                           <a:solidFill>
                             <a:srgbClr val="FFFFFF"/>
                           </a:solidFill>
-                          <a:latin typeface="Calibri"/>
+                          <a:latin typeface="Georgia"/>
                         </a:rPr>
                         <a:t>Layout</a:t>
                       </a:r>
@@ -5635,7 +5635,7 @@
                           <a:solidFill>
                             <a:srgbClr val="FFFFFF"/>
                           </a:solidFill>
-                          <a:latin typeface="Calibri"/>
+                          <a:latin typeface="Georgia"/>
                         </a:rPr>
                         <a:t>Verdict</a:t>
                       </a:r>
@@ -5659,7 +5659,7 @@
                           <a:solidFill>
                             <a:srgbClr val="2B2230"/>
                           </a:solidFill>
-                          <a:latin typeface="Calibri"/>
+                          <a:latin typeface="Georgia"/>
                         </a:rPr>
                         <a:t>JSON</a:t>
                       </a:r>
@@ -5681,7 +5681,7 @@
                           <a:solidFill>
                             <a:srgbClr val="2B2230"/>
                           </a:solidFill>
-                          <a:latin typeface="Calibri"/>
+                          <a:latin typeface="Georgia"/>
                         </a:rPr>
                         <a:t>row, text</a:t>
                       </a:r>
@@ -5703,7 +5703,7 @@
                           <a:solidFill>
                             <a:srgbClr val="2B2230"/>
                           </a:solidFill>
-                          <a:latin typeface="Calibri"/>
+                          <a:latin typeface="Georgia"/>
                         </a:rPr>
                         <a:t>slowest</a:t>
                       </a:r>
@@ -5727,7 +5727,7 @@
                           <a:solidFill>
                             <a:srgbClr val="2B2230"/>
                           </a:solidFill>
-                          <a:latin typeface="Calibri"/>
+                          <a:latin typeface="Georgia"/>
                         </a:rPr>
                         <a:t>Protobuf</a:t>
                       </a:r>
@@ -5749,7 +5749,7 @@
                           <a:solidFill>
                             <a:srgbClr val="2B2230"/>
                           </a:solidFill>
-                          <a:latin typeface="Calibri"/>
+                          <a:latin typeface="Georgia"/>
                         </a:rPr>
                         <a:t>row, binary</a:t>
                       </a:r>
@@ -5771,7 +5771,7 @@
                           <a:solidFill>
                             <a:srgbClr val="2B2230"/>
                           </a:solidFill>
-                          <a:latin typeface="Calibri"/>
+                          <a:latin typeface="Georgia"/>
                         </a:rPr>
                         <a:t>binary ≠ fast</a:t>
                       </a:r>
@@ -5795,7 +5795,7 @@
                           <a:solidFill>
                             <a:srgbClr val="2B2230"/>
                           </a:solidFill>
-                          <a:latin typeface="Calibri"/>
+                          <a:latin typeface="Georgia"/>
                         </a:rPr>
                         <a:t>Arrow IPC</a:t>
                       </a:r>
@@ -5817,7 +5817,7 @@
                           <a:solidFill>
                             <a:srgbClr val="2B2230"/>
                           </a:solidFill>
-                          <a:latin typeface="Calibri"/>
+                          <a:latin typeface="Georgia"/>
                         </a:rPr>
                         <a:t>columnar</a:t>
                       </a:r>
@@ -5839,7 +5839,7 @@
                           <a:solidFill>
                             <a:srgbClr val="2B2230"/>
                           </a:solidFill>
-                          <a:latin typeface="Calibri"/>
+                          <a:latin typeface="Georgia"/>
                         </a:rPr>
                         <a:t>near-zero decode</a:t>
                       </a:r>
@@ -5863,7 +5863,7 @@
                           <a:solidFill>
                             <a:srgbClr val="2B2230"/>
                           </a:solidFill>
-                          <a:latin typeface="Calibri"/>
+                          <a:latin typeface="Georgia"/>
                         </a:rPr>
                         <a:t>Arrow Flight</a:t>
                       </a:r>
@@ -5885,7 +5885,7 @@
                           <a:solidFill>
                             <a:srgbClr val="2B2230"/>
                           </a:solidFill>
-                          <a:latin typeface="Calibri"/>
+                          <a:latin typeface="Georgia"/>
                         </a:rPr>
                         <a:t>columnar + gRPC</a:t>
                       </a:r>
@@ -5907,7 +5907,7 @@
                           <a:solidFill>
                             <a:srgbClr val="2B2230"/>
                           </a:solidFill>
-                          <a:latin typeface="Calibri"/>
+                          <a:latin typeface="Georgia"/>
                         </a:rPr>
                         <a:t>the default</a:t>
                       </a:r>
@@ -5962,7 +5962,7 @@
                 <a:solidFill>
                   <a:srgbClr val="3A1647"/>
                 </a:solidFill>
-                <a:latin typeface="Calibri"/>
+                <a:latin typeface="Georgia"/>
               </a:rPr>
               <a:t>“(De)serialization can represent 80–90% of computing costs.”</a:t>
             </a:r>
@@ -5984,7 +5984,7 @@
                 <a:solidFill>
                   <a:srgbClr val="8A8692"/>
                 </a:solidFill>
-                <a:latin typeface="Calibri"/>
+                <a:latin typeface="Georgia"/>
               </a:rPr>
               <a:t>— Apache Arrow FAQ. That is exactly the cost Arrow removes.</a:t>
             </a:r>
@@ -6091,7 +6091,7 @@
                 <a:solidFill>
                   <a:srgbClr val="C71E7A"/>
                 </a:solidFill>
-                <a:latin typeface="Calibri"/>
+                <a:latin typeface="Georgia"/>
               </a:rPr>
               <a:t>HOW IT WORKS</a:t>
             </a:r>
@@ -6136,7 +6136,7 @@
                 <a:solidFill>
                   <a:srgbClr val="3A1647"/>
                 </a:solidFill>
-                <a:latin typeface="Calibri"/>
+                <a:latin typeface="Georgia"/>
               </a:rPr>
               <a:t>Architecture: Flight + Swagger, one command</a:t>
             </a:r>
@@ -6225,7 +6225,7 @@
                 <a:solidFill>
                   <a:srgbClr val="6D2C8F"/>
                 </a:solidFill>
-                <a:latin typeface="Calibri"/>
+                <a:latin typeface="Georgia"/>
               </a:rPr>
               <a:t>kob</a:t>
             </a:r>
@@ -6234,7 +6234,7 @@
                 <a:solidFill>
                   <a:srgbClr val="8A8692"/>
                 </a:solidFill>
-                <a:latin typeface="Calibri"/>
+                <a:latin typeface="Georgia"/>
               </a:rPr>
               <a:t>  ·  self-discovering Parquet → Apache Arrow</a:t>
             </a:r>
@@ -6243,7 +6243,7 @@
                 <a:solidFill>
                   <a:srgbClr val="8A8692"/>
                 </a:solidFill>
-                <a:latin typeface="Calibri"/>
+                <a:latin typeface="Georgia"/>
               </a:rPr>
               <a:t>          5 / 9</a:t>
             </a:r>
@@ -6288,7 +6288,7 @@
                 <a:solidFill>
                   <a:srgbClr val="3A1647"/>
                 </a:solidFill>
-                <a:latin typeface="Calibri"/>
+                <a:latin typeface="Georgia"/>
               </a:rPr>
               <a:t>One straight line, folder → Arrow stream:</a:t>
             </a:r>
@@ -6310,7 +6310,7 @@
                 <a:solidFill>
                   <a:srgbClr val="2B2230"/>
                 </a:solidFill>
-                <a:latin typeface="Calibri"/>
+                <a:latin typeface="Georgia"/>
               </a:rPr>
               <a:t>●  core — discover (catalog), validate the query (contract), execute on DuckDB → Arrow (engine).</a:t>
             </a:r>
@@ -6332,7 +6332,7 @@
                 <a:solidFill>
                   <a:srgbClr val="2B2230"/>
                 </a:solidFill>
-                <a:latin typeface="Calibri"/>
+                <a:latin typeface="Georgia"/>
               </a:rPr>
               <a:t>●  server — the kob entry point: Flight + a Swagger HTTP control plane, one process, one engine.</a:t>
             </a:r>
@@ -6354,7 +6354,7 @@
                 <a:solidFill>
                   <a:srgbClr val="2B2230"/>
                 </a:solidFill>
-                <a:latin typeface="Calibri"/>
+                <a:latin typeface="Georgia"/>
               </a:rPr>
               <a:t>●  demos — Arrow-over-HTTP / JSON / Protobuf servers, only to demonstrate the alternatives.</a:t>
             </a:r>
@@ -6376,7 +6376,7 @@
                 <a:solidFill>
                   <a:srgbClr val="2B2230"/>
                 </a:solidFill>
-                <a:latin typeface="Calibri"/>
+                <a:latin typeface="Georgia"/>
               </a:rPr>
               <a:t>●  tools — sample-data generator, reference client, benchmark.</a:t>
             </a:r>
@@ -6417,7 +6417,7 @@
                           <a:solidFill>
                             <a:srgbClr val="FFFFFF"/>
                           </a:solidFill>
-                          <a:latin typeface="Calibri"/>
+                          <a:latin typeface="Georgia"/>
                         </a:rPr>
                         <a:t/>
                       </a:r>
@@ -6439,7 +6439,7 @@
                           <a:solidFill>
                             <a:srgbClr val="FFFFFF"/>
                           </a:solidFill>
-                          <a:latin typeface="Calibri"/>
+                          <a:latin typeface="Georgia"/>
                         </a:rPr>
                         <a:t>Arrow Flight</a:t>
                       </a:r>
@@ -6461,7 +6461,7 @@
                           <a:solidFill>
                             <a:srgbClr val="FFFFFF"/>
                           </a:solidFill>
-                          <a:latin typeface="Calibri"/>
+                          <a:latin typeface="Georgia"/>
                         </a:rPr>
                         <a:t>Swagger HTTP</a:t>
                       </a:r>
@@ -6485,7 +6485,7 @@
                           <a:solidFill>
                             <a:srgbClr val="2B2230"/>
                           </a:solidFill>
-                          <a:latin typeface="Calibri"/>
+                          <a:latin typeface="Georgia"/>
                         </a:rPr>
                         <a:t>for</a:t>
                       </a:r>
@@ -6507,7 +6507,7 @@
                           <a:solidFill>
                             <a:srgbClr val="2B2230"/>
                           </a:solidFill>
-                          <a:latin typeface="Calibri"/>
+                          <a:latin typeface="Georgia"/>
                         </a:rPr>
                         <a:t>machines, fast</a:t>
                       </a:r>
@@ -6529,7 +6529,7 @@
                           <a:solidFill>
                             <a:srgbClr val="2B2230"/>
                           </a:solidFill>
-                          <a:latin typeface="Calibri"/>
+                          <a:latin typeface="Georgia"/>
                         </a:rPr>
                         <a:t>humans, discovery</a:t>
                       </a:r>
@@ -6553,7 +6553,7 @@
                           <a:solidFill>
                             <a:srgbClr val="2B2230"/>
                           </a:solidFill>
-                          <a:latin typeface="Calibri"/>
+                          <a:latin typeface="Georgia"/>
                         </a:rPr>
                         <a:t>port</a:t>
                       </a:r>
@@ -6575,7 +6575,7 @@
                           <a:solidFill>
                             <a:srgbClr val="2B2230"/>
                           </a:solidFill>
-                          <a:latin typeface="Calibri"/>
+                          <a:latin typeface="Georgia"/>
                         </a:rPr>
                         <a:t>8815 (gRPC)</a:t>
                       </a:r>
@@ -6597,7 +6597,7 @@
                           <a:solidFill>
                             <a:srgbClr val="2B2230"/>
                           </a:solidFill>
-                          <a:latin typeface="Calibri"/>
+                          <a:latin typeface="Georgia"/>
                         </a:rPr>
                         <a:t>8000 (/docs)</a:t>
                       </a:r>
@@ -6621,7 +6621,7 @@
                           <a:solidFill>
                             <a:srgbClr val="2B2230"/>
                           </a:solidFill>
-                          <a:latin typeface="Calibri"/>
+                          <a:latin typeface="Georgia"/>
                         </a:rPr>
                         <a:t>payload</a:t>
                       </a:r>
@@ -6643,7 +6643,7 @@
                           <a:solidFill>
                             <a:srgbClr val="2B2230"/>
                           </a:solidFill>
-                          <a:latin typeface="Calibri"/>
+                          <a:latin typeface="Georgia"/>
                         </a:rPr>
                         <a:t>Arrow, zero-decode</a:t>
                       </a:r>
@@ -6665,7 +6665,7 @@
                           <a:solidFill>
                             <a:srgbClr val="2B2230"/>
                           </a:solidFill>
-                          <a:latin typeface="Calibri"/>
+                          <a:latin typeface="Georgia"/>
                         </a:rPr>
                         <a:t>JSON / CSV</a:t>
                       </a:r>
@@ -6889,7 +6889,7 @@
                 <a:solidFill>
                   <a:srgbClr val="C71E7A"/>
                 </a:solidFill>
-                <a:latin typeface="Calibri"/>
+                <a:latin typeface="Georgia"/>
               </a:rPr>
               <a:t>RESULTS</a:t>
             </a:r>
@@ -6934,7 +6934,7 @@
                 <a:solidFill>
                   <a:srgbClr val="3A1647"/>
                 </a:solidFill>
-                <a:latin typeface="Calibri"/>
+                <a:latin typeface="Georgia"/>
               </a:rPr>
               <a:t>Key findings</a:t>
             </a:r>
@@ -7023,7 +7023,7 @@
                 <a:solidFill>
                   <a:srgbClr val="6D2C8F"/>
                 </a:solidFill>
-                <a:latin typeface="Calibri"/>
+                <a:latin typeface="Georgia"/>
               </a:rPr>
               <a:t>kob</a:t>
             </a:r>
@@ -7032,7 +7032,7 @@
                 <a:solidFill>
                   <a:srgbClr val="8A8692"/>
                 </a:solidFill>
-                <a:latin typeface="Calibri"/>
+                <a:latin typeface="Georgia"/>
               </a:rPr>
               <a:t>  ·  self-discovering Parquet → Apache Arrow</a:t>
             </a:r>
@@ -7041,7 +7041,7 @@
                 <a:solidFill>
                   <a:srgbClr val="8A8692"/>
                 </a:solidFill>
-                <a:latin typeface="Calibri"/>
+                <a:latin typeface="Georgia"/>
               </a:rPr>
               <a:t>          6 / 9</a:t>
             </a:r>
@@ -7086,7 +7086,7 @@
                 <a:solidFill>
                   <a:srgbClr val="3A1647"/>
                 </a:solidFill>
-                <a:latin typeface="Calibri"/>
+                <a:latin typeface="Georgia"/>
               </a:rPr>
               <a:t>●  Arrow wins by 1–3 orders of magnitude</a:t>
             </a:r>
@@ -7095,7 +7095,7 @@
                 <a:solidFill>
                   <a:srgbClr val="2B2230"/>
                 </a:solidFill>
-                <a:latin typeface="Calibri"/>
+                <a:latin typeface="Georgia"/>
               </a:rPr>
               <a:t> — 150–1750× faster than JSON, 5–56× faster than the best Protobuf.</a:t>
             </a:r>
@@ -7117,7 +7117,7 @@
                 <a:solidFill>
                   <a:srgbClr val="3A1647"/>
                 </a:solidFill>
-                <a:latin typeface="Calibri"/>
+                <a:latin typeface="Georgia"/>
               </a:rPr>
               <a:t>●  Binary ≠ fast.</a:t>
             </a:r>
@@ -7126,7 +7126,7 @@
                 <a:solidFill>
                   <a:srgbClr val="2B2230"/>
                 </a:solidFill>
-                <a:latin typeface="Calibri"/>
+                <a:latin typeface="Georgia"/>
               </a:rPr>
               <a:t> Protobuf is binary and still 5–56× slower — it must parse every value.</a:t>
             </a:r>
@@ -7148,7 +7148,7 @@
                 <a:solidFill>
                   <a:srgbClr val="3A1647"/>
                 </a:solidFill>
-                <a:latin typeface="Calibri"/>
+                <a:latin typeface="Georgia"/>
               </a:rPr>
               <a:t>●  The gap grows with result size</a:t>
             </a:r>
@@ -7157,7 +7157,7 @@
                 <a:solidFill>
                   <a:srgbClr val="2B2230"/>
                 </a:solidFill>
-                <a:latin typeface="Calibri"/>
+                <a:latin typeface="Georgia"/>
               </a:rPr>
               <a:t> — ~150× on 29k rows → ~1750× on 1.75M rows.</a:t>
             </a:r>
@@ -7179,7 +7179,7 @@
                 <a:solidFill>
                   <a:srgbClr val="3A1647"/>
                 </a:solidFill>
-                <a:latin typeface="Calibri"/>
+                <a:latin typeface="Georgia"/>
               </a:rPr>
               <a:t>●  JSON is a bandwidth hog too</a:t>
             </a:r>
@@ -7188,7 +7188,7 @@
                 <a:solidFill>
                   <a:srgbClr val="2B2230"/>
                 </a:solidFill>
-                <a:latin typeface="Calibri"/>
+                <a:latin typeface="Georgia"/>
               </a:rPr>
               <a:t> — 8× heavier on the wire than Arrow + zstd.</a:t>
             </a:r>
@@ -7210,7 +7210,7 @@
                 <a:solidFill>
                   <a:srgbClr val="3A1647"/>
                 </a:solidFill>
-                <a:latin typeface="Calibri"/>
+                <a:latin typeface="Georgia"/>
               </a:rPr>
               <a:t>●  Same engine throughout.</a:t>
             </a:r>
@@ -7219,7 +7219,7 @@
                 <a:solidFill>
                   <a:srgbClr val="2B2230"/>
                 </a:solidFill>
-                <a:latin typeface="Calibri"/>
+                <a:latin typeface="Georgia"/>
               </a:rPr>
               <a:t> Only the wire format changes — so the wire is the cause.</a:t>
             </a:r>
@@ -7288,7 +7288,7 @@
                 <a:solidFill>
                   <a:srgbClr val="8A8692"/>
                 </a:solidFill>
-                <a:latin typeface="Calibri"/>
+                <a:latin typeface="Georgia"/>
               </a:rPr>
               <a:t>Speedup vs REST/JSON, 1.75M-row pull (medium dataset).</a:t>
             </a:r>
@@ -7395,7 +7395,7 @@
                 <a:solidFill>
                   <a:srgbClr val="C71E7A"/>
                 </a:solidFill>
-                <a:latin typeface="Calibri"/>
+                <a:latin typeface="Georgia"/>
               </a:rPr>
               <a:t>BENCHMARK</a:t>
             </a:r>
@@ -7440,7 +7440,7 @@
                 <a:solidFill>
                   <a:srgbClr val="3A1647"/>
                 </a:solidFill>
-                <a:latin typeface="Calibri"/>
+                <a:latin typeface="Georgia"/>
               </a:rPr>
               <a:t>Performance: same query, five wire formats</a:t>
             </a:r>
@@ -7529,7 +7529,7 @@
                 <a:solidFill>
                   <a:srgbClr val="6D2C8F"/>
                 </a:solidFill>
-                <a:latin typeface="Calibri"/>
+                <a:latin typeface="Georgia"/>
               </a:rPr>
               <a:t>kob</a:t>
             </a:r>
@@ -7538,7 +7538,7 @@
                 <a:solidFill>
                   <a:srgbClr val="8A8692"/>
                 </a:solidFill>
-                <a:latin typeface="Calibri"/>
+                <a:latin typeface="Georgia"/>
               </a:rPr>
               <a:t>  ·  self-discovering Parquet → Apache Arrow</a:t>
             </a:r>
@@ -7547,7 +7547,7 @@
                 <a:solidFill>
                   <a:srgbClr val="8A8692"/>
                 </a:solidFill>
-                <a:latin typeface="Calibri"/>
+                <a:latin typeface="Georgia"/>
               </a:rPr>
               <a:t>          7 / 9</a:t>
             </a:r>
@@ -7571,7 +7571,7 @@
         <p:spPr>
           <a:xfrm>
             <a:off x="1234440" y="1508760"/>
-            <a:ext cx="7680960" cy="3445169"/>
+            <a:ext cx="7680960" cy="3443189"/>
           </a:xfrm>
           <a:prstGeom prst="rect">
             <a:avLst/>
@@ -7616,7 +7616,7 @@
                 <a:solidFill>
                   <a:srgbClr val="3A1647"/>
                 </a:solidFill>
-                <a:latin typeface="Calibri"/>
+                <a:latin typeface="Georgia"/>
               </a:rPr>
               <a:t>1.75M rows</a:t>
             </a:r>
@@ -7638,7 +7638,7 @@
                 <a:solidFill>
                   <a:srgbClr val="8A8692"/>
                 </a:solidFill>
-                <a:latin typeface="Calibri"/>
+                <a:latin typeface="Georgia"/>
               </a:rPr>
               <a:t>one query, one engine</a:t>
             </a:r>
@@ -7660,7 +7660,7 @@
                 <a:solidFill>
                   <a:srgbClr val="6D2C8F"/>
                 </a:solidFill>
-                <a:latin typeface="Calibri"/>
+                <a:latin typeface="Georgia"/>
               </a:rPr>
               <a:t>Flight  </a:t>
             </a:r>
@@ -7669,7 +7669,7 @@
                 <a:solidFill>
                   <a:srgbClr val="2B2230"/>
                 </a:solidFill>
-                <a:latin typeface="Calibri"/>
+                <a:latin typeface="Georgia"/>
               </a:rPr>
               <a:t>67 ms</a:t>
             </a:r>
@@ -7691,7 +7691,7 @@
                 <a:solidFill>
                   <a:srgbClr val="C71E7A"/>
                 </a:solidFill>
-                <a:latin typeface="Calibri"/>
+                <a:latin typeface="Georgia"/>
               </a:rPr>
               <a:t>JSON  </a:t>
             </a:r>
@@ -7700,7 +7700,7 @@
                 <a:solidFill>
                   <a:srgbClr val="2B2230"/>
                 </a:solidFill>
-                <a:latin typeface="Calibri"/>
+                <a:latin typeface="Georgia"/>
               </a:rPr>
               <a:t>117 s</a:t>
             </a:r>
@@ -7722,7 +7722,7 @@
                 <a:solidFill>
                   <a:srgbClr val="3A1647"/>
                 </a:solidFill>
-                <a:latin typeface="Calibri"/>
+                <a:latin typeface="Georgia"/>
               </a:rPr>
               <a:t>Same result, ~1750× apart.</a:t>
             </a:r>
@@ -7744,7 +7744,7 @@
                 <a:solidFill>
                   <a:srgbClr val="8A8692"/>
                 </a:solidFill>
-                <a:latin typeface="Calibri"/>
+                <a:latin typeface="Georgia"/>
               </a:rPr>
               <a:t>Pushdown happens before serialization — and compounds with picking a fast wire.</a:t>
             </a:r>
@@ -7789,7 +7789,7 @@
                 <a:solidFill>
                   <a:srgbClr val="8A8692"/>
                 </a:solidFill>
-                <a:latin typeface="Calibri"/>
+                <a:latin typeface="Georgia"/>
               </a:rPr>
               <a:t>Apple M4, localhost loopback (understates Arrow's win on a real network). Source: docs/PERFORMANCE_REPORT.md</a:t>
             </a:r>
@@ -7896,7 +7896,7 @@
                 <a:solidFill>
                   <a:srgbClr val="C71E7A"/>
                 </a:solidFill>
-                <a:latin typeface="Calibri"/>
+                <a:latin typeface="Georgia"/>
               </a:rPr>
               <a:t>SEE IT</a:t>
             </a:r>
@@ -7941,7 +7941,7 @@
                 <a:solidFill>
                   <a:srgbClr val="3A1647"/>
                 </a:solidFill>
-                <a:latin typeface="Calibri"/>
+                <a:latin typeface="Georgia"/>
               </a:rPr>
               <a:t>Demo: one query, every transport</a:t>
             </a:r>
@@ -8030,7 +8030,7 @@
                 <a:solidFill>
                   <a:srgbClr val="6D2C8F"/>
                 </a:solidFill>
-                <a:latin typeface="Calibri"/>
+                <a:latin typeface="Georgia"/>
               </a:rPr>
               <a:t>kob</a:t>
             </a:r>
@@ -8039,7 +8039,7 @@
                 <a:solidFill>
                   <a:srgbClr val="8A8692"/>
                 </a:solidFill>
-                <a:latin typeface="Calibri"/>
+                <a:latin typeface="Georgia"/>
               </a:rPr>
               <a:t>  ·  self-discovering Parquet → Apache Arrow</a:t>
             </a:r>
@@ -8048,7 +8048,7 @@
                 <a:solidFill>
                   <a:srgbClr val="8A8692"/>
                 </a:solidFill>
-                <a:latin typeface="Calibri"/>
+                <a:latin typeface="Georgia"/>
               </a:rPr>
               <a:t>          8 / 9</a:t>
             </a:r>
@@ -8093,7 +8093,7 @@
                 <a:solidFill>
                   <a:srgbClr val="2B2230"/>
                 </a:solidFill>
-                <a:latin typeface="Calibri"/>
+                <a:latin typeface="Georgia"/>
               </a:rPr>
               <a:t>A runnable notebook spins up all four transports, runs the SAME query over each, checks they return identical data, and times them.</a:t>
             </a:r>
@@ -8115,7 +8115,7 @@
                 <a:solidFill>
                   <a:srgbClr val="3A1647"/>
                 </a:solidFill>
-                <a:latin typeface="Calibri"/>
+                <a:latin typeface="Georgia"/>
               </a:rPr>
               <a:t>●  Arrow Flight  ·  Arrow-over-HTTP  ·  REST/JSON  ·  gRPC/Protobuf</a:t>
             </a:r>
@@ -8137,7 +8137,7 @@
                 <a:solidFill>
                   <a:srgbClr val="2B2230"/>
                 </a:solidFill>
-                <a:latin typeface="Calibri"/>
+                <a:latin typeface="Georgia"/>
               </a:rPr>
               <a:t>●  Result:  </a:t>
             </a:r>
@@ -8146,7 +8146,7 @@
                 <a:solidFill>
                   <a:srgbClr val="6D2C8F"/>
                 </a:solidFill>
-                <a:latin typeface="Calibri"/>
+                <a:latin typeface="Georgia"/>
               </a:rPr>
               <a:t>all four return the identical 14,006 rows</a:t>
             </a:r>
@@ -8155,7 +8155,7 @@
                 <a:solidFill>
                   <a:srgbClr val="2B2230"/>
                 </a:solidFill>
-                <a:latin typeface="Calibri"/>
+                <a:latin typeface="Georgia"/>
               </a:rPr>
               <a:t> — Flight fastest by far.</a:t>
             </a:r>
@@ -8177,7 +8177,7 @@
                 <a:solidFill>
                   <a:srgbClr val="2B2230"/>
                 </a:solidFill>
-                <a:latin typeface="Calibri"/>
+                <a:latin typeface="Georgia"/>
               </a:rPr>
               <a:t>●  Discovery, filtering and serialization are all kob's job — zero schema config.</a:t>
             </a:r>
@@ -8546,7 +8546,7 @@
                 <a:solidFill>
                   <a:srgbClr val="8A8692"/>
                 </a:solidFill>
-                <a:latin typeface="Calibri"/>
+                <a:latin typeface="Georgia"/>
               </a:rPr>
               <a:t>notebooks/kob_transports_demo.ipynb</a:t>
             </a:r>
@@ -8697,7 +8697,7 @@
                 <a:solidFill>
                   <a:srgbClr val="FFFFFF"/>
                 </a:solidFill>
-                <a:latin typeface="Calibri"/>
+                <a:latin typeface="Georgia"/>
               </a:rPr>
               <a:t>Takeaways</a:t>
             </a:r>
@@ -8742,7 +8742,7 @@
                 <a:solidFill>
                   <a:srgbClr val="CB9FE0"/>
                 </a:solidFill>
-                <a:latin typeface="Calibri"/>
+                <a:latin typeface="Georgia"/>
               </a:rPr>
               <a:t>●  Use Arrow on the wire, default to Flight. </a:t>
             </a:r>
@@ -8751,7 +8751,7 @@
                 <a:solidFill>
                   <a:srgbClr val="E6D8EE"/>
                 </a:solidFill>
-                <a:latin typeface="Calibri"/>
+                <a:latin typeface="Georgia"/>
               </a:rPr>
               <a:t>Not JSON (150–1750× slower, 8× heavier), not Protobuf (5–56× slower).</a:t>
             </a:r>
@@ -8773,7 +8773,7 @@
                 <a:solidFill>
                   <a:srgbClr val="CB9FE0"/>
                 </a:solidFill>
-                <a:latin typeface="Calibri"/>
+                <a:latin typeface="Georgia"/>
               </a:rPr>
               <a:t>●  Self-discovering beats configured. </a:t>
             </a:r>
@@ -8782,7 +8782,7 @@
                 <a:solidFill>
                   <a:srgbClr val="E6D8EE"/>
                 </a:solidFill>
-                <a:latin typeface="Calibri"/>
+                <a:latin typeface="Georgia"/>
               </a:rPr>
               <a:t>Point kob at a folder; new data appears live, no restart, no schema.</a:t>
             </a:r>
@@ -8804,7 +8804,7 @@
                 <a:solidFill>
                   <a:srgbClr val="CB9FE0"/>
                 </a:solidFill>
-                <a:latin typeface="Calibri"/>
+                <a:latin typeface="Georgia"/>
               </a:rPr>
               <a:t>●  Minimal &amp; safe by construction. </a:t>
             </a:r>
@@ -8813,7 +8813,7 @@
                 <a:solidFill>
                   <a:srgbClr val="E6D8EE"/>
                 </a:solidFill>
-                <a:latin typeface="Calibri"/>
+                <a:latin typeface="Georgia"/>
               </a:rPr>
               <a:t>Four deps, ~750-line core, read-only, parameterised, sandboxed.</a:t>
             </a:r>
@@ -8835,7 +8835,7 @@
                 <a:solidFill>
                   <a:srgbClr val="CB9FE0"/>
                 </a:solidFill>
-                <a:latin typeface="Calibri"/>
+                <a:latin typeface="Georgia"/>
               </a:rPr>
               <a:t>●  It's the wire, not the engine. </a:t>
             </a:r>
@@ -8844,7 +8844,7 @@
                 <a:solidFill>
                   <a:srgbClr val="E6D8EE"/>
                 </a:solidFill>
-                <a:latin typeface="Calibri"/>
+                <a:latin typeface="Georgia"/>
               </a:rPr>
               <a:t>Hold DuckDB constant and the format alone moves latency by 1750×.</a:t>
             </a:r>
@@ -8889,7 +8889,7 @@
                 <a:solidFill>
                   <a:srgbClr val="B7A9C2"/>
                 </a:solidFill>
-                <a:latin typeface="Calibri"/>
+                <a:latin typeface="Georgia"/>
               </a:rPr>
               <a:t>README.md  ·  docs/DESIGN.md  ·  docs/PERFORMANCE_REPORT.md          </a:t>
             </a:r>
@@ -8898,7 +8898,7 @@
                 <a:solidFill>
                   <a:srgbClr val="CB9FE0"/>
                 </a:solidFill>
-                <a:latin typeface="Calibri"/>
+                <a:latin typeface="Georgia"/>
               </a:rPr>
               <a:t>github.com/iyedexe/kob</a:t>
             </a:r>

--- a/presentation/kob.pptx
+++ b/presentation/kob.pptx
@@ -3192,8 +3192,8 @@
         </p:nvSpPr>
         <p:spPr>
           <a:xfrm>
-            <a:off x="822960" y="1554480"/>
-            <a:ext cx="10515600" cy="1463040"/>
+            <a:off x="822960" y="1234440"/>
+            <a:ext cx="10515600" cy="1783080"/>
           </a:xfrm>
           <a:prstGeom prst="rect">
             <a:avLst/>
@@ -3208,7 +3208,7 @@
           <a:p>
             <a:pPr algn="l">
               <a:lnSpc>
-                <a:spcPct val="105000"/>
+                <a:spcPct val="118000"/>
               </a:lnSpc>
               <a:spcBef>
                 <a:spcPts val="0"/>
@@ -3237,8 +3237,8 @@
         </p:nvSpPr>
         <p:spPr>
           <a:xfrm>
-            <a:off x="868680" y="3108960"/>
-            <a:ext cx="10515600" cy="914400"/>
+            <a:off x="868680" y="2926080"/>
+            <a:ext cx="10607040" cy="1280160"/>
           </a:xfrm>
           <a:prstGeom prst="rect">
             <a:avLst/>
@@ -3253,7 +3253,29 @@
           <a:p>
             <a:pPr algn="l">
               <a:lnSpc>
-                <a:spcPct val="105000"/>
+                <a:spcPct val="128000"/>
+              </a:lnSpc>
+              <a:spcBef>
+                <a:spcPts val="0"/>
+              </a:spcBef>
+              <a:spcAft>
+                <a:spcPts val="500"/>
+              </a:spcAft>
+            </a:pPr>
+            <a:r>
+              <a:rPr sz="2300" b="0" i="0">
+                <a:solidFill>
+                  <a:srgbClr val="E6D8EE"/>
+                </a:solidFill>
+                <a:latin typeface="Georgia"/>
+              </a:rPr>
+              <a:t>A tiny, self-discovering Parquet query server —</a:t>
+            </a:r>
+          </a:p>
+          <a:p>
+            <a:pPr algn="l">
+              <a:lnSpc>
+                <a:spcPct val="128000"/>
               </a:lnSpc>
               <a:spcBef>
                 <a:spcPts val="0"/>
@@ -3263,13 +3285,13 @@
               </a:spcAft>
             </a:pPr>
             <a:r>
-              <a:rPr sz="2600" b="0" i="0">
+              <a:rPr sz="2300" b="0" i="0">
                 <a:solidFill>
                   <a:srgbClr val="E6D8EE"/>
                 </a:solidFill>
                 <a:latin typeface="Georgia"/>
               </a:rPr>
-              <a:t>A tiny, self-discovering Parquet query server — served as Apache Arrow, fast.</a:t>
+              <a:t>served, read-only, as Apache Arrow — fast.</a:t>
             </a:r>
           </a:p>
         </p:txBody>
@@ -3282,8 +3304,8 @@
         </p:nvSpPr>
         <p:spPr>
           <a:xfrm>
-            <a:off x="868680" y="3886200"/>
-            <a:ext cx="10515600" cy="548640"/>
+            <a:off x="868680" y="4206240"/>
+            <a:ext cx="10607040" cy="548640"/>
           </a:xfrm>
           <a:prstGeom prst="rect">
             <a:avLst/>
@@ -3298,7 +3320,7 @@
           <a:p>
             <a:pPr algn="l">
               <a:lnSpc>
-                <a:spcPct val="105000"/>
+                <a:spcPct val="118000"/>
               </a:lnSpc>
               <a:spcBef>
                 <a:spcPts val="0"/>
@@ -3308,7 +3330,7 @@
               </a:spcAft>
             </a:pPr>
             <a:r>
-              <a:rPr sz="1600" b="0" i="1">
+              <a:rPr sz="1500" b="0" i="1">
                 <a:solidFill>
                   <a:srgbClr val="B7A9C2"/>
                 </a:solidFill>
@@ -3343,7 +3365,7 @@
           <a:p>
             <a:pPr algn="l">
               <a:lnSpc>
-                <a:spcPct val="105000"/>
+                <a:spcPct val="118000"/>
               </a:lnSpc>
               <a:spcBef>
                 <a:spcPts val="0"/>
@@ -3459,7 +3481,7 @@
           <a:p>
             <a:pPr algn="l">
               <a:lnSpc>
-                <a:spcPct val="105000"/>
+                <a:spcPct val="118000"/>
               </a:lnSpc>
               <a:spcBef>
                 <a:spcPts val="0"/>
@@ -3488,8 +3510,8 @@
         </p:nvSpPr>
         <p:spPr>
           <a:xfrm>
-            <a:off x="685800" y="566928"/>
-            <a:ext cx="10789920" cy="640080"/>
+            <a:off x="685800" y="585216"/>
+            <a:ext cx="10789920" cy="548640"/>
           </a:xfrm>
           <a:prstGeom prst="rect">
             <a:avLst/>
@@ -3504,7 +3526,7 @@
           <a:p>
             <a:pPr algn="l">
               <a:lnSpc>
-                <a:spcPct val="105000"/>
+                <a:spcPct val="118000"/>
               </a:lnSpc>
               <a:spcBef>
                 <a:spcPts val="0"/>
@@ -3514,13 +3536,13 @@
               </a:spcAft>
             </a:pPr>
             <a:r>
-              <a:rPr sz="3000" b="1" i="0">
+              <a:rPr sz="2500" b="1" i="0">
                 <a:solidFill>
                   <a:srgbClr val="3A1647"/>
                 </a:solidFill>
                 <a:latin typeface="Georgia"/>
               </a:rPr>
-              <a:t>Serving a folder of Parquet shouldn't be hard — or slow</a:t>
+              <a:t>Serving Parquet shouldn't be hard — or slow</a:t>
             </a:r>
           </a:p>
         </p:txBody>
@@ -3533,7 +3555,7 @@
         </p:nvSpPr>
         <p:spPr>
           <a:xfrm>
-            <a:off x="685800" y="1225296"/>
+            <a:off x="685800" y="1207008"/>
             <a:ext cx="1920240" cy="38100"/>
           </a:xfrm>
           <a:prstGeom prst="rect">
@@ -3593,7 +3615,7 @@
           <a:p>
             <a:pPr algn="l">
               <a:lnSpc>
-                <a:spcPct val="105000"/>
+                <a:spcPct val="118000"/>
               </a:lnSpc>
               <a:spcBef>
                 <a:spcPts val="0"/>
@@ -3641,7 +3663,7 @@
         <p:spPr>
           <a:xfrm>
             <a:off x="685800" y="1417320"/>
-            <a:ext cx="10789920" cy="640080"/>
+            <a:ext cx="10789920" cy="731520"/>
           </a:xfrm>
           <a:prstGeom prst="rect">
             <a:avLst/>
@@ -3656,7 +3678,7 @@
           <a:p>
             <a:pPr algn="l">
               <a:lnSpc>
-                <a:spcPct val="110000"/>
+                <a:spcPct val="122000"/>
               </a:lnSpc>
               <a:spcBef>
                 <a:spcPts val="0"/>
@@ -3666,13 +3688,13 @@
               </a:spcAft>
             </a:pPr>
             <a:r>
-              <a:rPr sz="1600" b="0" i="0">
+              <a:rPr sz="1500" b="0" i="0">
                 <a:solidFill>
                   <a:srgbClr val="2B2230"/>
                 </a:solidFill>
                 <a:latin typeface="Georgia"/>
               </a:rPr>
-              <a:t>A producer microservice writes Parquet to a folder. You must serve it, read-only, to Python / C# / C++ / Excel clients. Every usual option is overkill or slow:</a:t>
+              <a:t>A producer writes Parquet to a folder. You must serve it, read-only, to Python / C# / C++ / Excel clients. Every usual option is overkill or slow:</a:t>
             </a:r>
           </a:p>
         </p:txBody>
@@ -3685,8 +3707,8 @@
         </p:nvSpPr>
         <p:spPr>
           <a:xfrm>
-            <a:off x="685800" y="2286000"/>
-            <a:ext cx="3429000" cy="1737360"/>
+            <a:off x="685800" y="2331720"/>
+            <a:ext cx="3429000" cy="1965960"/>
           </a:xfrm>
           <a:prstGeom prst="roundRect">
             <a:avLst/>
@@ -3729,8 +3751,8 @@
         </p:nvSpPr>
         <p:spPr>
           <a:xfrm>
-            <a:off x="685800" y="2286000"/>
-            <a:ext cx="82296" cy="1737360"/>
+            <a:off x="685800" y="2331720"/>
+            <a:ext cx="82296" cy="1965960"/>
           </a:xfrm>
           <a:prstGeom prst="roundRect">
             <a:avLst/>
@@ -3773,8 +3795,8 @@
         </p:nvSpPr>
         <p:spPr>
           <a:xfrm>
-            <a:off x="941832" y="2432304"/>
-            <a:ext cx="3063240" cy="1463040"/>
+            <a:off x="978408" y="2532888"/>
+            <a:ext cx="2935224" cy="365760"/>
           </a:xfrm>
           <a:prstGeom prst="rect">
             <a:avLst/>
@@ -3789,29 +3811,7 @@
           <a:p>
             <a:pPr algn="l">
               <a:lnSpc>
-                <a:spcPct val="105000"/>
-              </a:lnSpc>
-              <a:spcBef>
-                <a:spcPts val="0"/>
-              </a:spcBef>
-              <a:spcAft>
-                <a:spcPts val="400"/>
-              </a:spcAft>
-            </a:pPr>
-            <a:r>
-              <a:rPr sz="1600" b="1" i="0">
-                <a:solidFill>
-                  <a:srgbClr val="3A1647"/>
-                </a:solidFill>
-                <a:latin typeface="Georgia"/>
-              </a:rPr>
-              <a:t>A warehouse / broker</a:t>
-            </a:r>
-          </a:p>
-          <a:p>
-            <a:pPr algn="l">
-              <a:lnSpc>
-                <a:spcPct val="108000"/>
+                <a:spcPct val="118000"/>
               </a:lnSpc>
               <a:spcBef>
                 <a:spcPts val="0"/>
@@ -3821,115 +3821,27 @@
               </a:spcAft>
             </a:pPr>
             <a:r>
-              <a:rPr sz="1250" b="0" i="0">
-                <a:solidFill>
-                  <a:srgbClr val="2B2230"/>
-                </a:solidFill>
-                <a:latin typeface="Georgia"/>
-              </a:rPr>
-              <a:t>Heavy infrastructure in front of what is already a queryable, columnar file format.</a:t>
-            </a:r>
-          </a:p>
-        </p:txBody>
-      </p:sp>
-      <p:sp>
-        <p:nvSpPr>
-          <p:cNvPr id="11" name="Rounded Rectangle 10"/>
-          <p:cNvSpPr/>
-          <p:nvPr/>
-        </p:nvSpPr>
-        <p:spPr>
-          <a:xfrm>
-            <a:off x="4370832" y="2286000"/>
-            <a:ext cx="3429000" cy="1737360"/>
-          </a:xfrm>
-          <a:prstGeom prst="roundRect">
-            <a:avLst/>
-          </a:prstGeom>
-          <a:solidFill>
-            <a:srgbClr val="F4F1F6"/>
-          </a:solidFill>
-          <a:ln>
-            <a:noFill/>
-          </a:ln>
-          <a:effectLst/>
-        </p:spPr>
-        <p:style>
-          <a:lnRef idx="1">
-            <a:schemeClr val="accent1"/>
-          </a:lnRef>
-          <a:fillRef idx="3">
-            <a:schemeClr val="accent1"/>
-          </a:fillRef>
-          <a:effectRef idx="2">
-            <a:schemeClr val="accent1"/>
-          </a:effectRef>
-          <a:fontRef idx="minor">
-            <a:schemeClr val="lt1"/>
-          </a:fontRef>
-        </p:style>
-        <p:txBody>
-          <a:bodyPr rtlCol="0" anchor="ctr"/>
-          <a:lstStyle/>
-          <a:p>
-            <a:pPr algn="ctr"/>
-          </a:p>
-        </p:txBody>
-      </p:sp>
-      <p:sp>
-        <p:nvSpPr>
-          <p:cNvPr id="12" name="Rounded Rectangle 11"/>
-          <p:cNvSpPr/>
-          <p:nvPr/>
-        </p:nvSpPr>
-        <p:spPr>
-          <a:xfrm>
-            <a:off x="4370832" y="2286000"/>
-            <a:ext cx="82296" cy="1737360"/>
-          </a:xfrm>
-          <a:prstGeom prst="roundRect">
-            <a:avLst/>
-          </a:prstGeom>
-          <a:solidFill>
-            <a:srgbClr val="A05EB5"/>
-          </a:solidFill>
-          <a:ln>
-            <a:noFill/>
-          </a:ln>
-          <a:effectLst/>
-        </p:spPr>
-        <p:style>
-          <a:lnRef idx="1">
-            <a:schemeClr val="accent1"/>
-          </a:lnRef>
-          <a:fillRef idx="3">
-            <a:schemeClr val="accent1"/>
-          </a:fillRef>
-          <a:effectRef idx="2">
-            <a:schemeClr val="accent1"/>
-          </a:effectRef>
-          <a:fontRef idx="minor">
-            <a:schemeClr val="lt1"/>
-          </a:fontRef>
-        </p:style>
-        <p:txBody>
-          <a:bodyPr rtlCol="0" anchor="ctr"/>
-          <a:lstStyle/>
-          <a:p>
-            <a:pPr algn="ctr"/>
-          </a:p>
-        </p:txBody>
-      </p:sp>
-      <p:sp>
-        <p:nvSpPr>
-          <p:cNvPr id="13" name="TextBox 12"/>
+              <a:rPr sz="1500" b="1" i="0">
+                <a:solidFill>
+                  <a:srgbClr val="3A1647"/>
+                </a:solidFill>
+                <a:latin typeface="Georgia"/>
+              </a:rPr>
+              <a:t>A warehouse / broker</a:t>
+            </a:r>
+          </a:p>
+        </p:txBody>
+      </p:sp>
+      <p:sp>
+        <p:nvSpPr>
+          <p:cNvPr id="11" name="TextBox 10"/>
           <p:cNvSpPr txBox="1"/>
           <p:nvPr/>
         </p:nvSpPr>
         <p:spPr>
           <a:xfrm>
-            <a:off x="4626864" y="2432304"/>
-            <a:ext cx="3063240" cy="1463040"/>
+            <a:off x="978408" y="3008376"/>
+            <a:ext cx="2935224" cy="1124712"/>
           </a:xfrm>
           <a:prstGeom prst="rect">
             <a:avLst/>
@@ -3944,29 +3856,7 @@
           <a:p>
             <a:pPr algn="l">
               <a:lnSpc>
-                <a:spcPct val="105000"/>
-              </a:lnSpc>
-              <a:spcBef>
-                <a:spcPts val="0"/>
-              </a:spcBef>
-              <a:spcAft>
-                <a:spcPts val="400"/>
-              </a:spcAft>
-            </a:pPr>
-            <a:r>
-              <a:rPr sz="1600" b="1" i="0">
-                <a:solidFill>
-                  <a:srgbClr val="3A1647"/>
-                </a:solidFill>
-                <a:latin typeface="Georgia"/>
-              </a:rPr>
-              <a:t>A hand-written API</a:t>
-            </a:r>
-          </a:p>
-          <a:p>
-            <a:pPr algn="l">
-              <a:lnSpc>
-                <a:spcPct val="108000"/>
+                <a:spcPct val="125000"/>
               </a:lnSpc>
               <a:spcBef>
                 <a:spcPts val="0"/>
@@ -3976,27 +3866,27 @@
               </a:spcAft>
             </a:pPr>
             <a:r>
-              <a:rPr sz="1250" b="0" i="0">
+              <a:rPr sz="1200" b="0" i="0">
                 <a:solidFill>
                   <a:srgbClr val="2B2230"/>
                 </a:solidFill>
                 <a:latin typeface="Georgia"/>
               </a:rPr>
-              <a:t>Declare a schema + catalog in code, then redeploy on every new dataset, partition or column.</a:t>
-            </a:r>
-          </a:p>
-        </p:txBody>
-      </p:sp>
-      <p:sp>
-        <p:nvSpPr>
-          <p:cNvPr id="14" name="Rounded Rectangle 13"/>
+              <a:t>Heavy infrastructure in front of an already-queryable, columnar file format.</a:t>
+            </a:r>
+          </a:p>
+        </p:txBody>
+      </p:sp>
+      <p:sp>
+        <p:nvSpPr>
+          <p:cNvPr id="12" name="Rounded Rectangle 11"/>
           <p:cNvSpPr/>
           <p:nvPr/>
         </p:nvSpPr>
         <p:spPr>
           <a:xfrm>
-            <a:off x="8055864" y="2286000"/>
-            <a:ext cx="3429000" cy="1737360"/>
+            <a:off x="4370832" y="2331720"/>
+            <a:ext cx="3429000" cy="1965960"/>
           </a:xfrm>
           <a:prstGeom prst="roundRect">
             <a:avLst/>
@@ -4033,20 +3923,20 @@
       </p:sp>
       <p:sp>
         <p:nvSpPr>
-          <p:cNvPr id="15" name="Rounded Rectangle 14"/>
+          <p:cNvPr id="13" name="Rounded Rectangle 12"/>
           <p:cNvSpPr/>
           <p:nvPr/>
         </p:nvSpPr>
         <p:spPr>
           <a:xfrm>
-            <a:off x="8055864" y="2286000"/>
-            <a:ext cx="82296" cy="1737360"/>
+            <a:off x="4370832" y="2331720"/>
+            <a:ext cx="82296" cy="1965960"/>
           </a:xfrm>
           <a:prstGeom prst="roundRect">
             <a:avLst/>
           </a:prstGeom>
           <a:solidFill>
-            <a:srgbClr val="C71E7A"/>
+            <a:srgbClr val="A05EB5"/>
           </a:solidFill>
           <a:ln>
             <a:noFill/>
@@ -4077,14 +3967,14 @@
       </p:sp>
       <p:sp>
         <p:nvSpPr>
-          <p:cNvPr id="16" name="TextBox 15"/>
+          <p:cNvPr id="14" name="TextBox 13"/>
           <p:cNvSpPr txBox="1"/>
           <p:nvPr/>
         </p:nvSpPr>
         <p:spPr>
           <a:xfrm>
-            <a:off x="8311896" y="2432304"/>
-            <a:ext cx="3063240" cy="1463040"/>
+            <a:off x="4663440" y="2532888"/>
+            <a:ext cx="2935224" cy="365760"/>
           </a:xfrm>
           <a:prstGeom prst="rect">
             <a:avLst/>
@@ -4099,29 +3989,7 @@
           <a:p>
             <a:pPr algn="l">
               <a:lnSpc>
-                <a:spcPct val="105000"/>
-              </a:lnSpc>
-              <a:spcBef>
-                <a:spcPts val="0"/>
-              </a:spcBef>
-              <a:spcAft>
-                <a:spcPts val="400"/>
-              </a:spcAft>
-            </a:pPr>
-            <a:r>
-              <a:rPr sz="1600" b="1" i="0">
-                <a:solidFill>
-                  <a:srgbClr val="3A1647"/>
-                </a:solidFill>
-                <a:latin typeface="Georgia"/>
-              </a:rPr>
-              <a:t>A JSON / Protobuf endpoint</a:t>
-            </a:r>
-          </a:p>
-          <a:p>
-            <a:pPr algn="l">
-              <a:lnSpc>
-                <a:spcPct val="108000"/>
+                <a:spcPct val="118000"/>
               </a:lnSpc>
               <a:spcBef>
                 <a:spcPts val="0"/>
@@ -4131,27 +3999,27 @@
               </a:spcAft>
             </a:pPr>
             <a:r>
-              <a:rPr sz="1250" b="0" i="0">
-                <a:solidFill>
-                  <a:srgbClr val="2B2230"/>
-                </a:solidFill>
-                <a:latin typeface="Georgia"/>
-              </a:rPr>
-              <a:t>Pays the serialization tax — Arrow's FAQ puts (de)serialization at 80–90% of compute cost.</a:t>
-            </a:r>
-          </a:p>
-        </p:txBody>
-      </p:sp>
-      <p:sp>
-        <p:nvSpPr>
-          <p:cNvPr id="17" name="TextBox 16"/>
+              <a:rPr sz="1500" b="1" i="0">
+                <a:solidFill>
+                  <a:srgbClr val="3A1647"/>
+                </a:solidFill>
+                <a:latin typeface="Georgia"/>
+              </a:rPr>
+              <a:t>A hand-written API</a:t>
+            </a:r>
+          </a:p>
+        </p:txBody>
+      </p:sp>
+      <p:sp>
+        <p:nvSpPr>
+          <p:cNvPr id="15" name="TextBox 14"/>
           <p:cNvSpPr txBox="1"/>
           <p:nvPr/>
         </p:nvSpPr>
         <p:spPr>
           <a:xfrm>
-            <a:off x="685800" y="4434840"/>
-            <a:ext cx="10789920" cy="1280160"/>
+            <a:off x="4663440" y="3008376"/>
+            <a:ext cx="2935224" cy="1124712"/>
           </a:xfrm>
           <a:prstGeom prst="rect">
             <a:avLst/>
@@ -4166,26 +4034,249 @@
           <a:p>
             <a:pPr algn="l">
               <a:lnSpc>
-                <a:spcPct val="105000"/>
+                <a:spcPct val="125000"/>
               </a:lnSpc>
               <a:spcBef>
                 <a:spcPts val="0"/>
               </a:spcBef>
               <a:spcAft>
-                <a:spcPts val="800"/>
+                <a:spcPts val="600"/>
               </a:spcAft>
             </a:pPr>
             <a:r>
-              <a:rPr sz="1700" b="1" i="0">
+              <a:rPr sz="1200" b="0" i="0">
+                <a:solidFill>
+                  <a:srgbClr val="2B2230"/>
+                </a:solidFill>
+                <a:latin typeface="Georgia"/>
+              </a:rPr>
+              <a:t>Declare a schema + catalog in code; redeploy on every new dataset or column.</a:t>
+            </a:r>
+          </a:p>
+        </p:txBody>
+      </p:sp>
+      <p:sp>
+        <p:nvSpPr>
+          <p:cNvPr id="16" name="Rounded Rectangle 15"/>
+          <p:cNvSpPr/>
+          <p:nvPr/>
+        </p:nvSpPr>
+        <p:spPr>
+          <a:xfrm>
+            <a:off x="8055864" y="2331720"/>
+            <a:ext cx="3429000" cy="1965960"/>
+          </a:xfrm>
+          <a:prstGeom prst="roundRect">
+            <a:avLst/>
+          </a:prstGeom>
+          <a:solidFill>
+            <a:srgbClr val="F4F1F6"/>
+          </a:solidFill>
+          <a:ln>
+            <a:noFill/>
+          </a:ln>
+          <a:effectLst/>
+        </p:spPr>
+        <p:style>
+          <a:lnRef idx="1">
+            <a:schemeClr val="accent1"/>
+          </a:lnRef>
+          <a:fillRef idx="3">
+            <a:schemeClr val="accent1"/>
+          </a:fillRef>
+          <a:effectRef idx="2">
+            <a:schemeClr val="accent1"/>
+          </a:effectRef>
+          <a:fontRef idx="minor">
+            <a:schemeClr val="lt1"/>
+          </a:fontRef>
+        </p:style>
+        <p:txBody>
+          <a:bodyPr rtlCol="0" anchor="ctr"/>
+          <a:lstStyle/>
+          <a:p>
+            <a:pPr algn="ctr"/>
+          </a:p>
+        </p:txBody>
+      </p:sp>
+      <p:sp>
+        <p:nvSpPr>
+          <p:cNvPr id="17" name="Rounded Rectangle 16"/>
+          <p:cNvSpPr/>
+          <p:nvPr/>
+        </p:nvSpPr>
+        <p:spPr>
+          <a:xfrm>
+            <a:off x="8055864" y="2331720"/>
+            <a:ext cx="82296" cy="1965960"/>
+          </a:xfrm>
+          <a:prstGeom prst="roundRect">
+            <a:avLst/>
+          </a:prstGeom>
+          <a:solidFill>
+            <a:srgbClr val="C71E7A"/>
+          </a:solidFill>
+          <a:ln>
+            <a:noFill/>
+          </a:ln>
+          <a:effectLst/>
+        </p:spPr>
+        <p:style>
+          <a:lnRef idx="1">
+            <a:schemeClr val="accent1"/>
+          </a:lnRef>
+          <a:fillRef idx="3">
+            <a:schemeClr val="accent1"/>
+          </a:fillRef>
+          <a:effectRef idx="2">
+            <a:schemeClr val="accent1"/>
+          </a:effectRef>
+          <a:fontRef idx="minor">
+            <a:schemeClr val="lt1"/>
+          </a:fontRef>
+        </p:style>
+        <p:txBody>
+          <a:bodyPr rtlCol="0" anchor="ctr"/>
+          <a:lstStyle/>
+          <a:p>
+            <a:pPr algn="ctr"/>
+          </a:p>
+        </p:txBody>
+      </p:sp>
+      <p:sp>
+        <p:nvSpPr>
+          <p:cNvPr id="18" name="TextBox 17"/>
+          <p:cNvSpPr txBox="1"/>
+          <p:nvPr/>
+        </p:nvSpPr>
+        <p:spPr>
+          <a:xfrm>
+            <a:off x="8348472" y="2532888"/>
+            <a:ext cx="2935224" cy="365760"/>
+          </a:xfrm>
+          <a:prstGeom prst="rect">
+            <a:avLst/>
+          </a:prstGeom>
+          <a:noFill/>
+        </p:spPr>
+        <p:txBody>
+          <a:bodyPr wrap="square" anchor="t" lIns="0" rIns="0" tIns="0" bIns="0">
+            <a:spAutoFit/>
+          </a:bodyPr>
+          <a:lstStyle/>
+          <a:p>
+            <a:pPr algn="l">
+              <a:lnSpc>
+                <a:spcPct val="118000"/>
+              </a:lnSpc>
+              <a:spcBef>
+                <a:spcPts val="0"/>
+              </a:spcBef>
+              <a:spcAft>
+                <a:spcPts val="600"/>
+              </a:spcAft>
+            </a:pPr>
+            <a:r>
+              <a:rPr sz="1500" b="1" i="0">
                 <a:solidFill>
                   <a:srgbClr val="3A1647"/>
                 </a:solidFill>
                 <a:latin typeface="Georgia"/>
               </a:rPr>
+              <a:t>A JSON / Protobuf API</a:t>
+            </a:r>
+          </a:p>
+        </p:txBody>
+      </p:sp>
+      <p:sp>
+        <p:nvSpPr>
+          <p:cNvPr id="19" name="TextBox 18"/>
+          <p:cNvSpPr txBox="1"/>
+          <p:nvPr/>
+        </p:nvSpPr>
+        <p:spPr>
+          <a:xfrm>
+            <a:off x="8348472" y="3008376"/>
+            <a:ext cx="2935224" cy="1124712"/>
+          </a:xfrm>
+          <a:prstGeom prst="rect">
+            <a:avLst/>
+          </a:prstGeom>
+          <a:noFill/>
+        </p:spPr>
+        <p:txBody>
+          <a:bodyPr wrap="square" anchor="t" lIns="0" rIns="0" tIns="0" bIns="0">
+            <a:spAutoFit/>
+          </a:bodyPr>
+          <a:lstStyle/>
+          <a:p>
+            <a:pPr algn="l">
+              <a:lnSpc>
+                <a:spcPct val="125000"/>
+              </a:lnSpc>
+              <a:spcBef>
+                <a:spcPts val="0"/>
+              </a:spcBef>
+              <a:spcAft>
+                <a:spcPts val="600"/>
+              </a:spcAft>
+            </a:pPr>
+            <a:r>
+              <a:rPr sz="1200" b="0" i="0">
+                <a:solidFill>
+                  <a:srgbClr val="2B2230"/>
+                </a:solidFill>
+                <a:latin typeface="Georgia"/>
+              </a:rPr>
+              <a:t>Pays the serialization tax — Arrow's FAQ: (de)serialization is 80–90% of compute.</a:t>
+            </a:r>
+          </a:p>
+        </p:txBody>
+      </p:sp>
+      <p:sp>
+        <p:nvSpPr>
+          <p:cNvPr id="20" name="TextBox 19"/>
+          <p:cNvSpPr txBox="1"/>
+          <p:nvPr/>
+        </p:nvSpPr>
+        <p:spPr>
+          <a:xfrm>
+            <a:off x="685800" y="4709160"/>
+            <a:ext cx="10789920" cy="1280160"/>
+          </a:xfrm>
+          <a:prstGeom prst="rect">
+            <a:avLst/>
+          </a:prstGeom>
+          <a:noFill/>
+        </p:spPr>
+        <p:txBody>
+          <a:bodyPr wrap="square" anchor="t" lIns="0" rIns="0" tIns="0" bIns="0">
+            <a:spAutoFit/>
+          </a:bodyPr>
+          <a:lstStyle/>
+          <a:p>
+            <a:pPr algn="l">
+              <a:lnSpc>
+                <a:spcPct val="130000"/>
+              </a:lnSpc>
+              <a:spcBef>
+                <a:spcPts val="0"/>
+              </a:spcBef>
+              <a:spcAft>
+                <a:spcPts val="600"/>
+              </a:spcAft>
+            </a:pPr>
+            <a:r>
+              <a:rPr sz="1600" b="1" i="0">
+                <a:solidFill>
+                  <a:srgbClr val="3A1647"/>
+                </a:solidFill>
+                <a:latin typeface="Georgia"/>
+              </a:rPr>
               <a:t>What we actually want:  </a:t>
             </a:r>
             <a:r>
-              <a:rPr sz="1700" b="1" i="0">
+              <a:rPr sz="1600" b="1" i="0">
                 <a:solidFill>
                   <a:srgbClr val="6D2C8F"/>
                 </a:solidFill>
@@ -4194,16 +4285,16 @@
               <a:t>self-discovering</a:t>
             </a:r>
             <a:r>
-              <a:rPr sz="1700" b="0" i="0">
+              <a:rPr sz="1600" b="0" i="0">
                 <a:solidFill>
                   <a:srgbClr val="2B2230"/>
                 </a:solidFill>
                 <a:latin typeface="Georgia"/>
               </a:rPr>
-              <a:t> (no hardcoded schema)  ·  </a:t>
-            </a:r>
-            <a:r>
-              <a:rPr sz="1700" b="1" i="0">
+              <a:t> (no hardcoded schema)   ·   </a:t>
+            </a:r>
+            <a:r>
+              <a:rPr sz="1600" b="1" i="0">
                 <a:solidFill>
                   <a:srgbClr val="6D2C8F"/>
                 </a:solidFill>
@@ -4212,16 +4303,16 @@
               <a:t>minimal</a:t>
             </a:r>
             <a:r>
-              <a:rPr sz="1700" b="0" i="0">
+              <a:rPr sz="1600" b="0" i="0">
                 <a:solidFill>
                   <a:srgbClr val="2B2230"/>
                 </a:solidFill>
                 <a:latin typeface="Georgia"/>
               </a:rPr>
-              <a:t> (tiny footprint)  ·  </a:t>
-            </a:r>
-            <a:r>
-              <a:rPr sz="1700" b="1" i="0">
+              <a:t> (tiny footprint)   ·   </a:t>
+            </a:r>
+            <a:r>
+              <a:rPr sz="1600" b="1" i="0">
                 <a:solidFill>
                   <a:srgbClr val="6D2C8F"/>
                 </a:solidFill>
@@ -4230,7 +4321,7 @@
               <a:t>blazing fast</a:t>
             </a:r>
             <a:r>
-              <a:rPr sz="1700" b="0" i="0">
+              <a:rPr sz="1600" b="0" i="0">
                 <a:solidFill>
                   <a:srgbClr val="2B2230"/>
                 </a:solidFill>
@@ -4327,7 +4418,7 @@
           <a:p>
             <a:pPr algn="l">
               <a:lnSpc>
-                <a:spcPct val="105000"/>
+                <a:spcPct val="118000"/>
               </a:lnSpc>
               <a:spcBef>
                 <a:spcPts val="0"/>
@@ -4356,8 +4447,8 @@
         </p:nvSpPr>
         <p:spPr>
           <a:xfrm>
-            <a:off x="685800" y="566928"/>
-            <a:ext cx="10789920" cy="640080"/>
+            <a:off x="685800" y="585216"/>
+            <a:ext cx="10789920" cy="548640"/>
           </a:xfrm>
           <a:prstGeom prst="rect">
             <a:avLst/>
@@ -4372,7 +4463,7 @@
           <a:p>
             <a:pPr algn="l">
               <a:lnSpc>
-                <a:spcPct val="105000"/>
+                <a:spcPct val="118000"/>
               </a:lnSpc>
               <a:spcBef>
                 <a:spcPts val="0"/>
@@ -4382,7 +4473,7 @@
               </a:spcAft>
             </a:pPr>
             <a:r>
-              <a:rPr sz="3000" b="1" i="0">
+              <a:rPr sz="2500" b="1" i="0">
                 <a:solidFill>
                   <a:srgbClr val="3A1647"/>
                 </a:solidFill>
@@ -4401,7 +4492,7 @@
         </p:nvSpPr>
         <p:spPr>
           <a:xfrm>
-            <a:off x="685800" y="1225296"/>
+            <a:off x="685800" y="1207008"/>
             <a:ext cx="1920240" cy="38100"/>
           </a:xfrm>
           <a:prstGeom prst="rect">
@@ -4461,7 +4552,7 @@
           <a:p>
             <a:pPr algn="l">
               <a:lnSpc>
-                <a:spcPct val="105000"/>
+                <a:spcPct val="118000"/>
               </a:lnSpc>
               <a:spcBef>
                 <a:spcPts val="0"/>
@@ -4524,7 +4615,7 @@
           <a:p>
             <a:pPr algn="l">
               <a:lnSpc>
-                <a:spcPct val="110000"/>
+                <a:spcPct val="125000"/>
               </a:lnSpc>
               <a:spcBef>
                 <a:spcPts val="0"/>
@@ -4534,7 +4625,7 @@
               </a:spcAft>
             </a:pPr>
             <a:r>
-              <a:rPr sz="1600" b="0" i="0">
+              <a:rPr sz="1500" b="0" i="0">
                 <a:solidFill>
                   <a:srgbClr val="2B2230"/>
                 </a:solidFill>
@@ -4553,8 +4644,8 @@
         </p:nvSpPr>
         <p:spPr>
           <a:xfrm>
-            <a:off x="685800" y="2331720"/>
-            <a:ext cx="5349240" cy="1645920"/>
+            <a:off x="685800" y="2286000"/>
+            <a:ext cx="5349240" cy="1783080"/>
           </a:xfrm>
           <a:prstGeom prst="roundRect">
             <a:avLst/>
@@ -4597,8 +4688,8 @@
         </p:nvSpPr>
         <p:spPr>
           <a:xfrm>
-            <a:off x="685800" y="2331720"/>
-            <a:ext cx="82296" cy="1645920"/>
+            <a:off x="685800" y="2286000"/>
+            <a:ext cx="82296" cy="1783080"/>
           </a:xfrm>
           <a:prstGeom prst="roundRect">
             <a:avLst/>
@@ -4641,8 +4732,8 @@
         </p:nvSpPr>
         <p:spPr>
           <a:xfrm>
-            <a:off x="941832" y="2478024"/>
-            <a:ext cx="4983480" cy="1371600"/>
+            <a:off x="978408" y="2487168"/>
+            <a:ext cx="4855464" cy="365760"/>
           </a:xfrm>
           <a:prstGeom prst="rect">
             <a:avLst/>
@@ -4657,29 +4748,7 @@
           <a:p>
             <a:pPr algn="l">
               <a:lnSpc>
-                <a:spcPct val="105000"/>
-              </a:lnSpc>
-              <a:spcBef>
-                <a:spcPts val="0"/>
-              </a:spcBef>
-              <a:spcAft>
-                <a:spcPts val="400"/>
-              </a:spcAft>
-            </a:pPr>
-            <a:r>
-              <a:rPr sz="1600" b="1" i="0">
-                <a:solidFill>
-                  <a:srgbClr val="3A1647"/>
-                </a:solidFill>
-                <a:latin typeface="Georgia"/>
-              </a:rPr>
-              <a:t>Tiny</a:t>
-            </a:r>
-          </a:p>
-          <a:p>
-            <a:pPr algn="l">
-              <a:lnSpc>
-                <a:spcPct val="108000"/>
+                <a:spcPct val="118000"/>
               </a:lnSpc>
               <a:spcBef>
                 <a:spcPts val="0"/>
@@ -4689,115 +4758,27 @@
               </a:spcAft>
             </a:pPr>
             <a:r>
-              <a:rPr sz="1250" b="0" i="0">
-                <a:solidFill>
-                  <a:srgbClr val="2B2230"/>
-                </a:solidFill>
-                <a:latin typeface="Georgia"/>
-              </a:rPr>
-              <a:t>Four dependencies — DuckDB, PyArrow, FastAPI, uvicorn. No DB, no broker, no config, no schema.</a:t>
-            </a:r>
-          </a:p>
-        </p:txBody>
-      </p:sp>
-      <p:sp>
-        <p:nvSpPr>
-          <p:cNvPr id="11" name="Rounded Rectangle 10"/>
-          <p:cNvSpPr/>
-          <p:nvPr/>
-        </p:nvSpPr>
-        <p:spPr>
-          <a:xfrm>
-            <a:off x="6126480" y="2331720"/>
-            <a:ext cx="5349240" cy="1645920"/>
-          </a:xfrm>
-          <a:prstGeom prst="roundRect">
-            <a:avLst/>
-          </a:prstGeom>
-          <a:solidFill>
-            <a:srgbClr val="F4F1F6"/>
-          </a:solidFill>
-          <a:ln>
-            <a:noFill/>
-          </a:ln>
-          <a:effectLst/>
-        </p:spPr>
-        <p:style>
-          <a:lnRef idx="1">
-            <a:schemeClr val="accent1"/>
-          </a:lnRef>
-          <a:fillRef idx="3">
-            <a:schemeClr val="accent1"/>
-          </a:fillRef>
-          <a:effectRef idx="2">
-            <a:schemeClr val="accent1"/>
-          </a:effectRef>
-          <a:fontRef idx="minor">
-            <a:schemeClr val="lt1"/>
-          </a:fontRef>
-        </p:style>
-        <p:txBody>
-          <a:bodyPr rtlCol="0" anchor="ctr"/>
-          <a:lstStyle/>
-          <a:p>
-            <a:pPr algn="ctr"/>
-          </a:p>
-        </p:txBody>
-      </p:sp>
-      <p:sp>
-        <p:nvSpPr>
-          <p:cNvPr id="12" name="Rounded Rectangle 11"/>
-          <p:cNvSpPr/>
-          <p:nvPr/>
-        </p:nvSpPr>
-        <p:spPr>
-          <a:xfrm>
-            <a:off x="6126480" y="2331720"/>
-            <a:ext cx="82296" cy="1645920"/>
-          </a:xfrm>
-          <a:prstGeom prst="roundRect">
-            <a:avLst/>
-          </a:prstGeom>
-          <a:solidFill>
-            <a:srgbClr val="C71E7A"/>
-          </a:solidFill>
-          <a:ln>
-            <a:noFill/>
-          </a:ln>
-          <a:effectLst/>
-        </p:spPr>
-        <p:style>
-          <a:lnRef idx="1">
-            <a:schemeClr val="accent1"/>
-          </a:lnRef>
-          <a:fillRef idx="3">
-            <a:schemeClr val="accent1"/>
-          </a:fillRef>
-          <a:effectRef idx="2">
-            <a:schemeClr val="accent1"/>
-          </a:effectRef>
-          <a:fontRef idx="minor">
-            <a:schemeClr val="lt1"/>
-          </a:fontRef>
-        </p:style>
-        <p:txBody>
-          <a:bodyPr rtlCol="0" anchor="ctr"/>
-          <a:lstStyle/>
-          <a:p>
-            <a:pPr algn="ctr"/>
-          </a:p>
-        </p:txBody>
-      </p:sp>
-      <p:sp>
-        <p:nvSpPr>
-          <p:cNvPr id="13" name="TextBox 12"/>
+              <a:rPr sz="1500" b="1" i="0">
+                <a:solidFill>
+                  <a:srgbClr val="3A1647"/>
+                </a:solidFill>
+                <a:latin typeface="Georgia"/>
+              </a:rPr>
+              <a:t>Tiny</a:t>
+            </a:r>
+          </a:p>
+        </p:txBody>
+      </p:sp>
+      <p:sp>
+        <p:nvSpPr>
+          <p:cNvPr id="11" name="TextBox 10"/>
           <p:cNvSpPr txBox="1"/>
           <p:nvPr/>
         </p:nvSpPr>
         <p:spPr>
           <a:xfrm>
-            <a:off x="6382512" y="2478024"/>
-            <a:ext cx="4983480" cy="1371600"/>
+            <a:off x="978408" y="2962656"/>
+            <a:ext cx="4855464" cy="941832"/>
           </a:xfrm>
           <a:prstGeom prst="rect">
             <a:avLst/>
@@ -4812,29 +4793,7 @@
           <a:p>
             <a:pPr algn="l">
               <a:lnSpc>
-                <a:spcPct val="105000"/>
-              </a:lnSpc>
-              <a:spcBef>
-                <a:spcPts val="0"/>
-              </a:spcBef>
-              <a:spcAft>
-                <a:spcPts val="400"/>
-              </a:spcAft>
-            </a:pPr>
-            <a:r>
-              <a:rPr sz="1600" b="1" i="0">
-                <a:solidFill>
-                  <a:srgbClr val="3A1647"/>
-                </a:solidFill>
-                <a:latin typeface="Georgia"/>
-              </a:rPr>
-              <a:t>Self-configuring</a:t>
-            </a:r>
-          </a:p>
-          <a:p>
-            <a:pPr algn="l">
-              <a:lnSpc>
-                <a:spcPct val="108000"/>
+                <a:spcPct val="125000"/>
               </a:lnSpc>
               <a:spcBef>
                 <a:spcPts val="0"/>
@@ -4844,27 +4803,27 @@
               </a:spcAft>
             </a:pPr>
             <a:r>
-              <a:rPr sz="1250" b="0" i="0">
+              <a:rPr sz="1200" b="0" i="0">
                 <a:solidFill>
                   <a:srgbClr val="2B2230"/>
                 </a:solidFill>
                 <a:latin typeface="Georgia"/>
               </a:rPr>
-              <a:t>Drop new files / partitions / datasets — they appear live. Discovery reads folder names + one file's metadata; never scans data.</a:t>
-            </a:r>
-          </a:p>
-        </p:txBody>
-      </p:sp>
-      <p:sp>
-        <p:nvSpPr>
-          <p:cNvPr id="14" name="Rounded Rectangle 13"/>
+              <a:t>Four dependencies — DuckDB, PyArrow, FastAPI, uvicorn. No DB, no broker, no config, no schema.</a:t>
+            </a:r>
+          </a:p>
+        </p:txBody>
+      </p:sp>
+      <p:sp>
+        <p:nvSpPr>
+          <p:cNvPr id="12" name="Rounded Rectangle 11"/>
           <p:cNvSpPr/>
           <p:nvPr/>
         </p:nvSpPr>
         <p:spPr>
           <a:xfrm>
-            <a:off x="685800" y="4160520"/>
-            <a:ext cx="5349240" cy="1645920"/>
+            <a:off x="6126480" y="2286000"/>
+            <a:ext cx="5349240" cy="1783080"/>
           </a:xfrm>
           <a:prstGeom prst="roundRect">
             <a:avLst/>
@@ -4901,20 +4860,20 @@
       </p:sp>
       <p:sp>
         <p:nvSpPr>
-          <p:cNvPr id="15" name="Rounded Rectangle 14"/>
+          <p:cNvPr id="13" name="Rounded Rectangle 12"/>
           <p:cNvSpPr/>
           <p:nvPr/>
         </p:nvSpPr>
         <p:spPr>
           <a:xfrm>
-            <a:off x="685800" y="4160520"/>
-            <a:ext cx="82296" cy="1645920"/>
+            <a:off x="6126480" y="2286000"/>
+            <a:ext cx="82296" cy="1783080"/>
           </a:xfrm>
           <a:prstGeom prst="roundRect">
             <a:avLst/>
           </a:prstGeom>
           <a:solidFill>
-            <a:srgbClr val="A05EB5"/>
+            <a:srgbClr val="C71E7A"/>
           </a:solidFill>
           <a:ln>
             <a:noFill/>
@@ -4945,14 +4904,14 @@
       </p:sp>
       <p:sp>
         <p:nvSpPr>
-          <p:cNvPr id="16" name="TextBox 15"/>
+          <p:cNvPr id="14" name="TextBox 13"/>
           <p:cNvSpPr txBox="1"/>
           <p:nvPr/>
         </p:nvSpPr>
         <p:spPr>
           <a:xfrm>
-            <a:off x="941832" y="4306824"/>
-            <a:ext cx="4983480" cy="1371600"/>
+            <a:off x="6419088" y="2487168"/>
+            <a:ext cx="4855464" cy="365760"/>
           </a:xfrm>
           <a:prstGeom prst="rect">
             <a:avLst/>
@@ -4967,29 +4926,7 @@
           <a:p>
             <a:pPr algn="l">
               <a:lnSpc>
-                <a:spcPct val="105000"/>
-              </a:lnSpc>
-              <a:spcBef>
-                <a:spcPts val="0"/>
-              </a:spcBef>
-              <a:spcAft>
-                <a:spcPts val="400"/>
-              </a:spcAft>
-            </a:pPr>
-            <a:r>
-              <a:rPr sz="1600" b="1" i="0">
-                <a:solidFill>
-                  <a:srgbClr val="3A1647"/>
-                </a:solidFill>
-                <a:latin typeface="Georgia"/>
-              </a:rPr>
-              <a:t>Fast</a:t>
-            </a:r>
-          </a:p>
-          <a:p>
-            <a:pPr algn="l">
-              <a:lnSpc>
-                <a:spcPct val="108000"/>
+                <a:spcPct val="118000"/>
               </a:lnSpc>
               <a:spcBef>
                 <a:spcPts val="0"/>
@@ -4999,115 +4936,27 @@
               </a:spcAft>
             </a:pPr>
             <a:r>
-              <a:rPr sz="1250" b="0" i="0">
-                <a:solidFill>
-                  <a:srgbClr val="2B2230"/>
-                </a:solidFill>
-                <a:latin typeface="Georgia"/>
-              </a:rPr>
-              <a:t>DuckDB pushes partition/predicate/projection pruning into the scan; results stream as Arrow over Flight — nothing to deserialize.</a:t>
-            </a:r>
-          </a:p>
-        </p:txBody>
-      </p:sp>
-      <p:sp>
-        <p:nvSpPr>
-          <p:cNvPr id="17" name="Rounded Rectangle 16"/>
-          <p:cNvSpPr/>
-          <p:nvPr/>
-        </p:nvSpPr>
-        <p:spPr>
-          <a:xfrm>
-            <a:off x="6126480" y="4160520"/>
-            <a:ext cx="5349240" cy="1645920"/>
-          </a:xfrm>
-          <a:prstGeom prst="roundRect">
-            <a:avLst/>
-          </a:prstGeom>
-          <a:solidFill>
-            <a:srgbClr val="F4F1F6"/>
-          </a:solidFill>
-          <a:ln>
-            <a:noFill/>
-          </a:ln>
-          <a:effectLst/>
-        </p:spPr>
-        <p:style>
-          <a:lnRef idx="1">
-            <a:schemeClr val="accent1"/>
-          </a:lnRef>
-          <a:fillRef idx="3">
-            <a:schemeClr val="accent1"/>
-          </a:fillRef>
-          <a:effectRef idx="2">
-            <a:schemeClr val="accent1"/>
-          </a:effectRef>
-          <a:fontRef idx="minor">
-            <a:schemeClr val="lt1"/>
-          </a:fontRef>
-        </p:style>
-        <p:txBody>
-          <a:bodyPr rtlCol="0" anchor="ctr"/>
-          <a:lstStyle/>
-          <a:p>
-            <a:pPr algn="ctr"/>
-          </a:p>
-        </p:txBody>
-      </p:sp>
-      <p:sp>
-        <p:nvSpPr>
-          <p:cNvPr id="18" name="Rounded Rectangle 17"/>
-          <p:cNvSpPr/>
-          <p:nvPr/>
-        </p:nvSpPr>
-        <p:spPr>
-          <a:xfrm>
-            <a:off x="6126480" y="4160520"/>
-            <a:ext cx="82296" cy="1645920"/>
-          </a:xfrm>
-          <a:prstGeom prst="roundRect">
-            <a:avLst/>
-          </a:prstGeom>
-          <a:solidFill>
-            <a:srgbClr val="3A1647"/>
-          </a:solidFill>
-          <a:ln>
-            <a:noFill/>
-          </a:ln>
-          <a:effectLst/>
-        </p:spPr>
-        <p:style>
-          <a:lnRef idx="1">
-            <a:schemeClr val="accent1"/>
-          </a:lnRef>
-          <a:fillRef idx="3">
-            <a:schemeClr val="accent1"/>
-          </a:fillRef>
-          <a:effectRef idx="2">
-            <a:schemeClr val="accent1"/>
-          </a:effectRef>
-          <a:fontRef idx="minor">
-            <a:schemeClr val="lt1"/>
-          </a:fontRef>
-        </p:style>
-        <p:txBody>
-          <a:bodyPr rtlCol="0" anchor="ctr"/>
-          <a:lstStyle/>
-          <a:p>
-            <a:pPr algn="ctr"/>
-          </a:p>
-        </p:txBody>
-      </p:sp>
-      <p:sp>
-        <p:nvSpPr>
-          <p:cNvPr id="19" name="TextBox 18"/>
+              <a:rPr sz="1500" b="1" i="0">
+                <a:solidFill>
+                  <a:srgbClr val="3A1647"/>
+                </a:solidFill>
+                <a:latin typeface="Georgia"/>
+              </a:rPr>
+              <a:t>Self-configuring</a:t>
+            </a:r>
+          </a:p>
+        </p:txBody>
+      </p:sp>
+      <p:sp>
+        <p:nvSpPr>
+          <p:cNvPr id="15" name="TextBox 14"/>
           <p:cNvSpPr txBox="1"/>
           <p:nvPr/>
         </p:nvSpPr>
         <p:spPr>
           <a:xfrm>
-            <a:off x="6382512" y="4306824"/>
-            <a:ext cx="4983480" cy="1371600"/>
+            <a:off x="6419088" y="2962656"/>
+            <a:ext cx="4855464" cy="941832"/>
           </a:xfrm>
           <a:prstGeom prst="rect">
             <a:avLst/>
@@ -5122,29 +4971,7 @@
           <a:p>
             <a:pPr algn="l">
               <a:lnSpc>
-                <a:spcPct val="105000"/>
-              </a:lnSpc>
-              <a:spcBef>
-                <a:spcPts val="0"/>
-              </a:spcBef>
-              <a:spcAft>
-                <a:spcPts val="400"/>
-              </a:spcAft>
-            </a:pPr>
-            <a:r>
-              <a:rPr sz="1600" b="1" i="0">
-                <a:solidFill>
-                  <a:srgbClr val="3A1647"/>
-                </a:solidFill>
-                <a:latin typeface="Georgia"/>
-              </a:rPr>
-              <a:t>Safe</a:t>
-            </a:r>
-          </a:p>
-          <a:p>
-            <a:pPr algn="l">
-              <a:lnSpc>
-                <a:spcPct val="108000"/>
+                <a:spcPct val="125000"/>
               </a:lnSpc>
               <a:spcBef>
                 <a:spcPts val="0"/>
@@ -5154,7 +4981,363 @@
               </a:spcAft>
             </a:pPr>
             <a:r>
-              <a:rPr sz="1250" b="0" i="0">
+              <a:rPr sz="1200" b="0" i="0">
+                <a:solidFill>
+                  <a:srgbClr val="2B2230"/>
+                </a:solidFill>
+                <a:latin typeface="Georgia"/>
+              </a:rPr>
+              <a:t>Drop new files / partitions / datasets — they appear live. Discovery reads folder names + one file's metadata; never scans data.</a:t>
+            </a:r>
+          </a:p>
+        </p:txBody>
+      </p:sp>
+      <p:sp>
+        <p:nvSpPr>
+          <p:cNvPr id="16" name="Rounded Rectangle 15"/>
+          <p:cNvSpPr/>
+          <p:nvPr/>
+        </p:nvSpPr>
+        <p:spPr>
+          <a:xfrm>
+            <a:off x="685800" y="4160520"/>
+            <a:ext cx="5349240" cy="1783080"/>
+          </a:xfrm>
+          <a:prstGeom prst="roundRect">
+            <a:avLst/>
+          </a:prstGeom>
+          <a:solidFill>
+            <a:srgbClr val="F4F1F6"/>
+          </a:solidFill>
+          <a:ln>
+            <a:noFill/>
+          </a:ln>
+          <a:effectLst/>
+        </p:spPr>
+        <p:style>
+          <a:lnRef idx="1">
+            <a:schemeClr val="accent1"/>
+          </a:lnRef>
+          <a:fillRef idx="3">
+            <a:schemeClr val="accent1"/>
+          </a:fillRef>
+          <a:effectRef idx="2">
+            <a:schemeClr val="accent1"/>
+          </a:effectRef>
+          <a:fontRef idx="minor">
+            <a:schemeClr val="lt1"/>
+          </a:fontRef>
+        </p:style>
+        <p:txBody>
+          <a:bodyPr rtlCol="0" anchor="ctr"/>
+          <a:lstStyle/>
+          <a:p>
+            <a:pPr algn="ctr"/>
+          </a:p>
+        </p:txBody>
+      </p:sp>
+      <p:sp>
+        <p:nvSpPr>
+          <p:cNvPr id="17" name="Rounded Rectangle 16"/>
+          <p:cNvSpPr/>
+          <p:nvPr/>
+        </p:nvSpPr>
+        <p:spPr>
+          <a:xfrm>
+            <a:off x="685800" y="4160520"/>
+            <a:ext cx="82296" cy="1783080"/>
+          </a:xfrm>
+          <a:prstGeom prst="roundRect">
+            <a:avLst/>
+          </a:prstGeom>
+          <a:solidFill>
+            <a:srgbClr val="A05EB5"/>
+          </a:solidFill>
+          <a:ln>
+            <a:noFill/>
+          </a:ln>
+          <a:effectLst/>
+        </p:spPr>
+        <p:style>
+          <a:lnRef idx="1">
+            <a:schemeClr val="accent1"/>
+          </a:lnRef>
+          <a:fillRef idx="3">
+            <a:schemeClr val="accent1"/>
+          </a:fillRef>
+          <a:effectRef idx="2">
+            <a:schemeClr val="accent1"/>
+          </a:effectRef>
+          <a:fontRef idx="minor">
+            <a:schemeClr val="lt1"/>
+          </a:fontRef>
+        </p:style>
+        <p:txBody>
+          <a:bodyPr rtlCol="0" anchor="ctr"/>
+          <a:lstStyle/>
+          <a:p>
+            <a:pPr algn="ctr"/>
+          </a:p>
+        </p:txBody>
+      </p:sp>
+      <p:sp>
+        <p:nvSpPr>
+          <p:cNvPr id="18" name="TextBox 17"/>
+          <p:cNvSpPr txBox="1"/>
+          <p:nvPr/>
+        </p:nvSpPr>
+        <p:spPr>
+          <a:xfrm>
+            <a:off x="978408" y="4361688"/>
+            <a:ext cx="4855464" cy="365760"/>
+          </a:xfrm>
+          <a:prstGeom prst="rect">
+            <a:avLst/>
+          </a:prstGeom>
+          <a:noFill/>
+        </p:spPr>
+        <p:txBody>
+          <a:bodyPr wrap="square" anchor="t" lIns="0" rIns="0" tIns="0" bIns="0">
+            <a:spAutoFit/>
+          </a:bodyPr>
+          <a:lstStyle/>
+          <a:p>
+            <a:pPr algn="l">
+              <a:lnSpc>
+                <a:spcPct val="118000"/>
+              </a:lnSpc>
+              <a:spcBef>
+                <a:spcPts val="0"/>
+              </a:spcBef>
+              <a:spcAft>
+                <a:spcPts val="600"/>
+              </a:spcAft>
+            </a:pPr>
+            <a:r>
+              <a:rPr sz="1500" b="1" i="0">
+                <a:solidFill>
+                  <a:srgbClr val="3A1647"/>
+                </a:solidFill>
+                <a:latin typeface="Georgia"/>
+              </a:rPr>
+              <a:t>Fast</a:t>
+            </a:r>
+          </a:p>
+        </p:txBody>
+      </p:sp>
+      <p:sp>
+        <p:nvSpPr>
+          <p:cNvPr id="19" name="TextBox 18"/>
+          <p:cNvSpPr txBox="1"/>
+          <p:nvPr/>
+        </p:nvSpPr>
+        <p:spPr>
+          <a:xfrm>
+            <a:off x="978408" y="4837176"/>
+            <a:ext cx="4855464" cy="941832"/>
+          </a:xfrm>
+          <a:prstGeom prst="rect">
+            <a:avLst/>
+          </a:prstGeom>
+          <a:noFill/>
+        </p:spPr>
+        <p:txBody>
+          <a:bodyPr wrap="square" anchor="t" lIns="0" rIns="0" tIns="0" bIns="0">
+            <a:spAutoFit/>
+          </a:bodyPr>
+          <a:lstStyle/>
+          <a:p>
+            <a:pPr algn="l">
+              <a:lnSpc>
+                <a:spcPct val="125000"/>
+              </a:lnSpc>
+              <a:spcBef>
+                <a:spcPts val="0"/>
+              </a:spcBef>
+              <a:spcAft>
+                <a:spcPts val="600"/>
+              </a:spcAft>
+            </a:pPr>
+            <a:r>
+              <a:rPr sz="1200" b="0" i="0">
+                <a:solidFill>
+                  <a:srgbClr val="2B2230"/>
+                </a:solidFill>
+                <a:latin typeface="Georgia"/>
+              </a:rPr>
+              <a:t>DuckDB pushes partition/predicate/projection pruning into the scan; results stream as Arrow over Flight — nothing to deserialize.</a:t>
+            </a:r>
+          </a:p>
+        </p:txBody>
+      </p:sp>
+      <p:sp>
+        <p:nvSpPr>
+          <p:cNvPr id="20" name="Rounded Rectangle 19"/>
+          <p:cNvSpPr/>
+          <p:nvPr/>
+        </p:nvSpPr>
+        <p:spPr>
+          <a:xfrm>
+            <a:off x="6126480" y="4160520"/>
+            <a:ext cx="5349240" cy="1783080"/>
+          </a:xfrm>
+          <a:prstGeom prst="roundRect">
+            <a:avLst/>
+          </a:prstGeom>
+          <a:solidFill>
+            <a:srgbClr val="F4F1F6"/>
+          </a:solidFill>
+          <a:ln>
+            <a:noFill/>
+          </a:ln>
+          <a:effectLst/>
+        </p:spPr>
+        <p:style>
+          <a:lnRef idx="1">
+            <a:schemeClr val="accent1"/>
+          </a:lnRef>
+          <a:fillRef idx="3">
+            <a:schemeClr val="accent1"/>
+          </a:fillRef>
+          <a:effectRef idx="2">
+            <a:schemeClr val="accent1"/>
+          </a:effectRef>
+          <a:fontRef idx="minor">
+            <a:schemeClr val="lt1"/>
+          </a:fontRef>
+        </p:style>
+        <p:txBody>
+          <a:bodyPr rtlCol="0" anchor="ctr"/>
+          <a:lstStyle/>
+          <a:p>
+            <a:pPr algn="ctr"/>
+          </a:p>
+        </p:txBody>
+      </p:sp>
+      <p:sp>
+        <p:nvSpPr>
+          <p:cNvPr id="21" name="Rounded Rectangle 20"/>
+          <p:cNvSpPr/>
+          <p:nvPr/>
+        </p:nvSpPr>
+        <p:spPr>
+          <a:xfrm>
+            <a:off x="6126480" y="4160520"/>
+            <a:ext cx="82296" cy="1783080"/>
+          </a:xfrm>
+          <a:prstGeom prst="roundRect">
+            <a:avLst/>
+          </a:prstGeom>
+          <a:solidFill>
+            <a:srgbClr val="3A1647"/>
+          </a:solidFill>
+          <a:ln>
+            <a:noFill/>
+          </a:ln>
+          <a:effectLst/>
+        </p:spPr>
+        <p:style>
+          <a:lnRef idx="1">
+            <a:schemeClr val="accent1"/>
+          </a:lnRef>
+          <a:fillRef idx="3">
+            <a:schemeClr val="accent1"/>
+          </a:fillRef>
+          <a:effectRef idx="2">
+            <a:schemeClr val="accent1"/>
+          </a:effectRef>
+          <a:fontRef idx="minor">
+            <a:schemeClr val="lt1"/>
+          </a:fontRef>
+        </p:style>
+        <p:txBody>
+          <a:bodyPr rtlCol="0" anchor="ctr"/>
+          <a:lstStyle/>
+          <a:p>
+            <a:pPr algn="ctr"/>
+          </a:p>
+        </p:txBody>
+      </p:sp>
+      <p:sp>
+        <p:nvSpPr>
+          <p:cNvPr id="22" name="TextBox 21"/>
+          <p:cNvSpPr txBox="1"/>
+          <p:nvPr/>
+        </p:nvSpPr>
+        <p:spPr>
+          <a:xfrm>
+            <a:off x="6419088" y="4361688"/>
+            <a:ext cx="4855464" cy="365760"/>
+          </a:xfrm>
+          <a:prstGeom prst="rect">
+            <a:avLst/>
+          </a:prstGeom>
+          <a:noFill/>
+        </p:spPr>
+        <p:txBody>
+          <a:bodyPr wrap="square" anchor="t" lIns="0" rIns="0" tIns="0" bIns="0">
+            <a:spAutoFit/>
+          </a:bodyPr>
+          <a:lstStyle/>
+          <a:p>
+            <a:pPr algn="l">
+              <a:lnSpc>
+                <a:spcPct val="118000"/>
+              </a:lnSpc>
+              <a:spcBef>
+                <a:spcPts val="0"/>
+              </a:spcBef>
+              <a:spcAft>
+                <a:spcPts val="600"/>
+              </a:spcAft>
+            </a:pPr>
+            <a:r>
+              <a:rPr sz="1500" b="1" i="0">
+                <a:solidFill>
+                  <a:srgbClr val="3A1647"/>
+                </a:solidFill>
+                <a:latin typeface="Georgia"/>
+              </a:rPr>
+              <a:t>Safe</a:t>
+            </a:r>
+          </a:p>
+        </p:txBody>
+      </p:sp>
+      <p:sp>
+        <p:nvSpPr>
+          <p:cNvPr id="23" name="TextBox 22"/>
+          <p:cNvSpPr txBox="1"/>
+          <p:nvPr/>
+        </p:nvSpPr>
+        <p:spPr>
+          <a:xfrm>
+            <a:off x="6419088" y="4837176"/>
+            <a:ext cx="4855464" cy="941832"/>
+          </a:xfrm>
+          <a:prstGeom prst="rect">
+            <a:avLst/>
+          </a:prstGeom>
+          <a:noFill/>
+        </p:spPr>
+        <p:txBody>
+          <a:bodyPr wrap="square" anchor="t" lIns="0" rIns="0" tIns="0" bIns="0">
+            <a:spAutoFit/>
+          </a:bodyPr>
+          <a:lstStyle/>
+          <a:p>
+            <a:pPr algn="l">
+              <a:lnSpc>
+                <a:spcPct val="125000"/>
+              </a:lnSpc>
+              <a:spcBef>
+                <a:spcPts val="0"/>
+              </a:spcBef>
+              <a:spcAft>
+                <a:spcPts val="600"/>
+              </a:spcAft>
+            </a:pPr>
+            <a:r>
+              <a:rPr sz="1200" b="0" i="0">
                 <a:solidFill>
                   <a:srgbClr val="2B2230"/>
                 </a:solidFill>
@@ -5251,7 +5434,7 @@
           <a:p>
             <a:pPr algn="l">
               <a:lnSpc>
-                <a:spcPct val="105000"/>
+                <a:spcPct val="118000"/>
               </a:lnSpc>
               <a:spcBef>
                 <a:spcPts val="0"/>
@@ -5280,8 +5463,8 @@
         </p:nvSpPr>
         <p:spPr>
           <a:xfrm>
-            <a:off x="685800" y="566928"/>
-            <a:ext cx="10789920" cy="640080"/>
+            <a:off x="685800" y="585216"/>
+            <a:ext cx="10789920" cy="548640"/>
           </a:xfrm>
           <a:prstGeom prst="rect">
             <a:avLst/>
@@ -5296,7 +5479,7 @@
           <a:p>
             <a:pPr algn="l">
               <a:lnSpc>
-                <a:spcPct val="105000"/>
+                <a:spcPct val="118000"/>
               </a:lnSpc>
               <a:spcBef>
                 <a:spcPts val="0"/>
@@ -5306,7 +5489,7 @@
               </a:spcAft>
             </a:pPr>
             <a:r>
-              <a:rPr sz="3000" b="1" i="0">
+              <a:rPr sz="2500" b="1" i="0">
                 <a:solidFill>
                   <a:srgbClr val="3A1647"/>
                 </a:solidFill>
@@ -5325,7 +5508,7 @@
         </p:nvSpPr>
         <p:spPr>
           <a:xfrm>
-            <a:off x="685800" y="1225296"/>
+            <a:off x="685800" y="1207008"/>
             <a:ext cx="1920240" cy="38100"/>
           </a:xfrm>
           <a:prstGeom prst="rect">
@@ -5385,7 +5568,7 @@
           <a:p>
             <a:pPr algn="l">
               <a:lnSpc>
-                <a:spcPct val="105000"/>
+                <a:spcPct val="118000"/>
               </a:lnSpc>
               <a:spcBef>
                 <a:spcPts val="0"/>
@@ -5448,7 +5631,7 @@
           <a:p>
             <a:pPr algn="l">
               <a:lnSpc>
-                <a:spcPct val="105000"/>
+                <a:spcPct val="118000"/>
               </a:lnSpc>
               <a:spcBef>
                 <a:spcPts val="0"/>
@@ -5470,7 +5653,7 @@
           <a:p>
             <a:pPr algn="l">
               <a:lnSpc>
-                <a:spcPct val="110000"/>
+                <a:spcPct val="128000"/>
               </a:lnSpc>
               <a:spcBef>
                 <a:spcPts val="0"/>
@@ -5492,7 +5675,7 @@
           <a:p>
             <a:pPr algn="l">
               <a:lnSpc>
-                <a:spcPct val="110000"/>
+                <a:spcPct val="128000"/>
               </a:lnSpc>
               <a:spcBef>
                 <a:spcPts val="0"/>
@@ -5514,7 +5697,7 @@
           <a:p>
             <a:pPr algn="l">
               <a:lnSpc>
-                <a:spcPct val="110000"/>
+                <a:spcPct val="128000"/>
               </a:lnSpc>
               <a:spcBef>
                 <a:spcPts val="0"/>
@@ -5536,7 +5719,7 @@
           <a:p>
             <a:pPr algn="l">
               <a:lnSpc>
-                <a:spcPct val="110000"/>
+                <a:spcPct val="128000"/>
               </a:lnSpc>
               <a:spcBef>
                 <a:spcPts val="0"/>
@@ -5841,7 +6024,7 @@
                           </a:solidFill>
                           <a:latin typeface="Georgia"/>
                         </a:rPr>
-                        <a:t>near-zero decode</a:t>
+                        <a:t>near-zero</a:t>
                       </a:r>
                     </a:p>
                   </a:txBody>
@@ -5932,8 +6115,8 @@
         </p:nvSpPr>
         <p:spPr>
           <a:xfrm>
-            <a:off x="6720840" y="4526280"/>
-            <a:ext cx="4754880" cy="1097280"/>
+            <a:off x="6720840" y="4297680"/>
+            <a:ext cx="4754880" cy="1554480"/>
           </a:xfrm>
           <a:prstGeom prst="rect">
             <a:avLst/>
@@ -5948,17 +6131,17 @@
           <a:p>
             <a:pPr algn="l">
               <a:lnSpc>
-                <a:spcPct val="105000"/>
+                <a:spcPct val="125000"/>
               </a:lnSpc>
               <a:spcBef>
                 <a:spcPts val="0"/>
               </a:spcBef>
               <a:spcAft>
-                <a:spcPts val="300"/>
+                <a:spcPts val="1200"/>
               </a:spcAft>
             </a:pPr>
             <a:r>
-              <a:rPr sz="1350" b="0" i="1">
+              <a:rPr sz="1300" b="0" i="1">
                 <a:solidFill>
                   <a:srgbClr val="3A1647"/>
                 </a:solidFill>
@@ -5970,7 +6153,7 @@
           <a:p>
             <a:pPr algn="l">
               <a:lnSpc>
-                <a:spcPct val="105000"/>
+                <a:spcPct val="120000"/>
               </a:lnSpc>
               <a:spcBef>
                 <a:spcPts val="0"/>
@@ -6077,7 +6260,7 @@
           <a:p>
             <a:pPr algn="l">
               <a:lnSpc>
-                <a:spcPct val="105000"/>
+                <a:spcPct val="118000"/>
               </a:lnSpc>
               <a:spcBef>
                 <a:spcPts val="0"/>
@@ -6106,8 +6289,8 @@
         </p:nvSpPr>
         <p:spPr>
           <a:xfrm>
-            <a:off x="685800" y="566928"/>
-            <a:ext cx="10789920" cy="640080"/>
+            <a:off x="685800" y="585216"/>
+            <a:ext cx="10789920" cy="548640"/>
           </a:xfrm>
           <a:prstGeom prst="rect">
             <a:avLst/>
@@ -6122,7 +6305,7 @@
           <a:p>
             <a:pPr algn="l">
               <a:lnSpc>
-                <a:spcPct val="105000"/>
+                <a:spcPct val="118000"/>
               </a:lnSpc>
               <a:spcBef>
                 <a:spcPts val="0"/>
@@ -6132,7 +6315,7 @@
               </a:spcAft>
             </a:pPr>
             <a:r>
-              <a:rPr sz="3000" b="1" i="0">
+              <a:rPr sz="2500" b="1" i="0">
                 <a:solidFill>
                   <a:srgbClr val="3A1647"/>
                 </a:solidFill>
@@ -6151,7 +6334,7 @@
         </p:nvSpPr>
         <p:spPr>
           <a:xfrm>
-            <a:off x="685800" y="1225296"/>
+            <a:off x="685800" y="1207008"/>
             <a:ext cx="1920240" cy="38100"/>
           </a:xfrm>
           <a:prstGeom prst="rect">
@@ -6211,7 +6394,7 @@
           <a:p>
             <a:pPr algn="l">
               <a:lnSpc>
-                <a:spcPct val="105000"/>
+                <a:spcPct val="118000"/>
               </a:lnSpc>
               <a:spcBef>
                 <a:spcPts val="0"/>
@@ -6274,7 +6457,7 @@
           <a:p>
             <a:pPr algn="l">
               <a:lnSpc>
-                <a:spcPct val="105000"/>
+                <a:spcPct val="118000"/>
               </a:lnSpc>
               <a:spcBef>
                 <a:spcPts val="0"/>
@@ -6296,7 +6479,7 @@
           <a:p>
             <a:pPr algn="l">
               <a:lnSpc>
-                <a:spcPct val="108000"/>
+                <a:spcPct val="128000"/>
               </a:lnSpc>
               <a:spcBef>
                 <a:spcPts val="0"/>
@@ -6318,7 +6501,7 @@
           <a:p>
             <a:pPr algn="l">
               <a:lnSpc>
-                <a:spcPct val="108000"/>
+                <a:spcPct val="128000"/>
               </a:lnSpc>
               <a:spcBef>
                 <a:spcPts val="0"/>
@@ -6340,7 +6523,7 @@
           <a:p>
             <a:pPr algn="l">
               <a:lnSpc>
-                <a:spcPct val="108000"/>
+                <a:spcPct val="128000"/>
               </a:lnSpc>
               <a:spcBef>
                 <a:spcPts val="0"/>
@@ -6362,7 +6545,7 @@
           <a:p>
             <a:pPr algn="l">
               <a:lnSpc>
-                <a:spcPct val="108000"/>
+                <a:spcPct val="128000"/>
               </a:lnSpc>
               <a:spcBef>
                 <a:spcPts val="0"/>
@@ -6724,7 +6907,7 @@
           <a:p>
             <a:pPr algn="l">
               <a:lnSpc>
-                <a:spcPct val="110000"/>
+                <a:spcPct val="128000"/>
               </a:lnSpc>
               <a:spcBef>
                 <a:spcPts val="0"/>
@@ -6746,7 +6929,7 @@
           <a:p>
             <a:pPr algn="l">
               <a:lnSpc>
-                <a:spcPct val="110000"/>
+                <a:spcPct val="128000"/>
               </a:lnSpc>
               <a:spcBef>
                 <a:spcPts val="0"/>
@@ -6768,7 +6951,7 @@
           <a:p>
             <a:pPr algn="l">
               <a:lnSpc>
-                <a:spcPct val="110000"/>
+                <a:spcPct val="128000"/>
               </a:lnSpc>
               <a:spcBef>
                 <a:spcPts val="0"/>
@@ -6875,7 +7058,7 @@
           <a:p>
             <a:pPr algn="l">
               <a:lnSpc>
-                <a:spcPct val="105000"/>
+                <a:spcPct val="118000"/>
               </a:lnSpc>
               <a:spcBef>
                 <a:spcPts val="0"/>
@@ -6904,8 +7087,8 @@
         </p:nvSpPr>
         <p:spPr>
           <a:xfrm>
-            <a:off x="685800" y="566928"/>
-            <a:ext cx="10789920" cy="640080"/>
+            <a:off x="685800" y="585216"/>
+            <a:ext cx="10789920" cy="548640"/>
           </a:xfrm>
           <a:prstGeom prst="rect">
             <a:avLst/>
@@ -6920,7 +7103,7 @@
           <a:p>
             <a:pPr algn="l">
               <a:lnSpc>
-                <a:spcPct val="105000"/>
+                <a:spcPct val="118000"/>
               </a:lnSpc>
               <a:spcBef>
                 <a:spcPts val="0"/>
@@ -6930,7 +7113,7 @@
               </a:spcAft>
             </a:pPr>
             <a:r>
-              <a:rPr sz="3000" b="1" i="0">
+              <a:rPr sz="2500" b="1" i="0">
                 <a:solidFill>
                   <a:srgbClr val="3A1647"/>
                 </a:solidFill>
@@ -6949,7 +7132,7 @@
         </p:nvSpPr>
         <p:spPr>
           <a:xfrm>
-            <a:off x="685800" y="1225296"/>
+            <a:off x="685800" y="1207008"/>
             <a:ext cx="1920240" cy="38100"/>
           </a:xfrm>
           <a:prstGeom prst="rect">
@@ -7009,7 +7192,7 @@
           <a:p>
             <a:pPr algn="l">
               <a:lnSpc>
-                <a:spcPct val="105000"/>
+                <a:spcPct val="118000"/>
               </a:lnSpc>
               <a:spcBef>
                 <a:spcPts val="0"/>
@@ -7072,7 +7255,7 @@
           <a:p>
             <a:pPr algn="l">
               <a:lnSpc>
-                <a:spcPct val="110000"/>
+                <a:spcPct val="128000"/>
               </a:lnSpc>
               <a:spcBef>
                 <a:spcPts val="0"/>
@@ -7103,7 +7286,7 @@
           <a:p>
             <a:pPr algn="l">
               <a:lnSpc>
-                <a:spcPct val="110000"/>
+                <a:spcPct val="128000"/>
               </a:lnSpc>
               <a:spcBef>
                 <a:spcPts val="0"/>
@@ -7134,7 +7317,7 @@
           <a:p>
             <a:pPr algn="l">
               <a:lnSpc>
-                <a:spcPct val="110000"/>
+                <a:spcPct val="128000"/>
               </a:lnSpc>
               <a:spcBef>
                 <a:spcPts val="0"/>
@@ -7165,7 +7348,7 @@
           <a:p>
             <a:pPr algn="l">
               <a:lnSpc>
-                <a:spcPct val="110000"/>
+                <a:spcPct val="128000"/>
               </a:lnSpc>
               <a:spcBef>
                 <a:spcPts val="0"/>
@@ -7196,7 +7379,7 @@
           <a:p>
             <a:pPr algn="l">
               <a:lnSpc>
-                <a:spcPct val="110000"/>
+                <a:spcPct val="128000"/>
               </a:lnSpc>
               <a:spcBef>
                 <a:spcPts val="0"/>
@@ -7242,7 +7425,7 @@
         </p:blipFill>
         <p:spPr>
           <a:xfrm>
-            <a:off x="6400800" y="1554480"/>
+            <a:off x="6400800" y="1737360"/>
             <a:ext cx="5120640" cy="2290575"/>
           </a:xfrm>
           <a:prstGeom prst="rect">
@@ -7258,7 +7441,7 @@
         </p:nvSpPr>
         <p:spPr>
           <a:xfrm>
-            <a:off x="6400800" y="5806440"/>
+            <a:off x="6400800" y="4251960"/>
             <a:ext cx="5120640" cy="365760"/>
           </a:xfrm>
           <a:prstGeom prst="rect">
@@ -7274,7 +7457,7 @@
           <a:p>
             <a:pPr algn="ctr">
               <a:lnSpc>
-                <a:spcPct val="105000"/>
+                <a:spcPct val="118000"/>
               </a:lnSpc>
               <a:spcBef>
                 <a:spcPts val="0"/>
@@ -7381,7 +7564,7 @@
           <a:p>
             <a:pPr algn="l">
               <a:lnSpc>
-                <a:spcPct val="105000"/>
+                <a:spcPct val="118000"/>
               </a:lnSpc>
               <a:spcBef>
                 <a:spcPts val="0"/>
@@ -7410,8 +7593,8 @@
         </p:nvSpPr>
         <p:spPr>
           <a:xfrm>
-            <a:off x="685800" y="566928"/>
-            <a:ext cx="10789920" cy="640080"/>
+            <a:off x="685800" y="585216"/>
+            <a:ext cx="10789920" cy="548640"/>
           </a:xfrm>
           <a:prstGeom prst="rect">
             <a:avLst/>
@@ -7426,7 +7609,7 @@
           <a:p>
             <a:pPr algn="l">
               <a:lnSpc>
-                <a:spcPct val="105000"/>
+                <a:spcPct val="118000"/>
               </a:lnSpc>
               <a:spcBef>
                 <a:spcPts val="0"/>
@@ -7436,7 +7619,7 @@
               </a:spcAft>
             </a:pPr>
             <a:r>
-              <a:rPr sz="3000" b="1" i="0">
+              <a:rPr sz="2500" b="1" i="0">
                 <a:solidFill>
                   <a:srgbClr val="3A1647"/>
                 </a:solidFill>
@@ -7455,7 +7638,7 @@
         </p:nvSpPr>
         <p:spPr>
           <a:xfrm>
-            <a:off x="685800" y="1225296"/>
+            <a:off x="685800" y="1207008"/>
             <a:ext cx="1920240" cy="38100"/>
           </a:xfrm>
           <a:prstGeom prst="rect">
@@ -7515,7 +7698,7 @@
           <a:p>
             <a:pPr algn="l">
               <a:lnSpc>
-                <a:spcPct val="105000"/>
+                <a:spcPct val="118000"/>
               </a:lnSpc>
               <a:spcBef>
                 <a:spcPts val="0"/>
@@ -7602,7 +7785,7 @@
           <a:p>
             <a:pPr algn="l">
               <a:lnSpc>
-                <a:spcPct val="105000"/>
+                <a:spcPct val="118000"/>
               </a:lnSpc>
               <a:spcBef>
                 <a:spcPts val="0"/>
@@ -7624,7 +7807,7 @@
           <a:p>
             <a:pPr algn="l">
               <a:lnSpc>
-                <a:spcPct val="105000"/>
+                <a:spcPct val="118000"/>
               </a:lnSpc>
               <a:spcBef>
                 <a:spcPts val="0"/>
@@ -7646,7 +7829,7 @@
           <a:p>
             <a:pPr algn="l">
               <a:lnSpc>
-                <a:spcPct val="105000"/>
+                <a:spcPct val="118000"/>
               </a:lnSpc>
               <a:spcBef>
                 <a:spcPts val="0"/>
@@ -7677,7 +7860,7 @@
           <a:p>
             <a:pPr algn="l">
               <a:lnSpc>
-                <a:spcPct val="105000"/>
+                <a:spcPct val="118000"/>
               </a:lnSpc>
               <a:spcBef>
                 <a:spcPts val="0"/>
@@ -7708,7 +7891,7 @@
           <a:p>
             <a:pPr algn="l">
               <a:lnSpc>
-                <a:spcPct val="115000"/>
+                <a:spcPct val="125000"/>
               </a:lnSpc>
               <a:spcBef>
                 <a:spcPts val="0"/>
@@ -7730,7 +7913,7 @@
           <a:p>
             <a:pPr algn="l">
               <a:lnSpc>
-                <a:spcPct val="115000"/>
+                <a:spcPct val="125000"/>
               </a:lnSpc>
               <a:spcBef>
                 <a:spcPts val="0"/>
@@ -7759,8 +7942,8 @@
         </p:nvSpPr>
         <p:spPr>
           <a:xfrm>
-            <a:off x="1234440" y="5989320"/>
-            <a:ext cx="7680960" cy="365760"/>
+            <a:off x="1234440" y="5257800"/>
+            <a:ext cx="7680960" cy="777240"/>
           </a:xfrm>
           <a:prstGeom prst="rect">
             <a:avLst/>
@@ -7775,7 +7958,7 @@
           <a:p>
             <a:pPr algn="ctr">
               <a:lnSpc>
-                <a:spcPct val="105000"/>
+                <a:spcPct val="118000"/>
               </a:lnSpc>
               <a:spcBef>
                 <a:spcPts val="0"/>
@@ -7785,13 +7968,35 @@
               </a:spcAft>
             </a:pPr>
             <a:r>
-              <a:rPr sz="1050" b="0" i="1">
+              <a:rPr sz="1100" b="0" i="1">
                 <a:solidFill>
                   <a:srgbClr val="8A8692"/>
                 </a:solidFill>
                 <a:latin typeface="Georgia"/>
               </a:rPr>
-              <a:t>Apple M4, localhost loopback (understates Arrow's win on a real network). Source: docs/PERFORMANCE_REPORT.md</a:t>
+              <a:t>Medium dataset · Apple M4 · localhost loopback (understates Arrow's win on a real network).</a:t>
+            </a:r>
+          </a:p>
+          <a:p>
+            <a:pPr algn="ctr">
+              <a:lnSpc>
+                <a:spcPct val="118000"/>
+              </a:lnSpc>
+              <a:spcBef>
+                <a:spcPts val="0"/>
+              </a:spcBef>
+              <a:spcAft>
+                <a:spcPts val="600"/>
+              </a:spcAft>
+            </a:pPr>
+            <a:r>
+              <a:rPr sz="1100" b="0" i="1">
+                <a:solidFill>
+                  <a:srgbClr val="8A8692"/>
+                </a:solidFill>
+                <a:latin typeface="Georgia"/>
+              </a:rPr>
+              <a:t>Source: docs/PERFORMANCE_REPORT.md</a:t>
             </a:r>
           </a:p>
         </p:txBody>
@@ -7882,7 +8087,7 @@
           <a:p>
             <a:pPr algn="l">
               <a:lnSpc>
-                <a:spcPct val="105000"/>
+                <a:spcPct val="118000"/>
               </a:lnSpc>
               <a:spcBef>
                 <a:spcPts val="0"/>
@@ -7911,8 +8116,8 @@
         </p:nvSpPr>
         <p:spPr>
           <a:xfrm>
-            <a:off x="685800" y="566928"/>
-            <a:ext cx="10789920" cy="640080"/>
+            <a:off x="685800" y="585216"/>
+            <a:ext cx="10789920" cy="548640"/>
           </a:xfrm>
           <a:prstGeom prst="rect">
             <a:avLst/>
@@ -7927,7 +8132,7 @@
           <a:p>
             <a:pPr algn="l">
               <a:lnSpc>
-                <a:spcPct val="105000"/>
+                <a:spcPct val="118000"/>
               </a:lnSpc>
               <a:spcBef>
                 <a:spcPts val="0"/>
@@ -7937,7 +8142,7 @@
               </a:spcAft>
             </a:pPr>
             <a:r>
-              <a:rPr sz="3000" b="1" i="0">
+              <a:rPr sz="2500" b="1" i="0">
                 <a:solidFill>
                   <a:srgbClr val="3A1647"/>
                 </a:solidFill>
@@ -7956,7 +8161,7 @@
         </p:nvSpPr>
         <p:spPr>
           <a:xfrm>
-            <a:off x="685800" y="1225296"/>
+            <a:off x="685800" y="1207008"/>
             <a:ext cx="1920240" cy="38100"/>
           </a:xfrm>
           <a:prstGeom prst="rect">
@@ -8016,7 +8221,7 @@
           <a:p>
             <a:pPr algn="l">
               <a:lnSpc>
-                <a:spcPct val="105000"/>
+                <a:spcPct val="118000"/>
               </a:lnSpc>
               <a:spcBef>
                 <a:spcPts val="0"/>
@@ -8079,7 +8284,7 @@
           <a:p>
             <a:pPr algn="l">
               <a:lnSpc>
-                <a:spcPct val="112000"/>
+                <a:spcPct val="128000"/>
               </a:lnSpc>
               <a:spcBef>
                 <a:spcPts val="0"/>
@@ -8101,7 +8306,7 @@
           <a:p>
             <a:pPr algn="l">
               <a:lnSpc>
-                <a:spcPct val="110000"/>
+                <a:spcPct val="128000"/>
               </a:lnSpc>
               <a:spcBef>
                 <a:spcPts val="0"/>
@@ -8123,7 +8328,7 @@
           <a:p>
             <a:pPr algn="l">
               <a:lnSpc>
-                <a:spcPct val="110000"/>
+                <a:spcPct val="128000"/>
               </a:lnSpc>
               <a:spcBef>
                 <a:spcPts val="0"/>
@@ -8163,7 +8368,7 @@
           <a:p>
             <a:pPr algn="l">
               <a:lnSpc>
-                <a:spcPct val="110000"/>
+                <a:spcPct val="128000"/>
               </a:lnSpc>
               <a:spcBef>
                 <a:spcPts val="0"/>
@@ -8226,7 +8431,7 @@
           <a:p>
             <a:pPr algn="l">
               <a:lnSpc>
-                <a:spcPct val="110000"/>
+                <a:spcPct val="128000"/>
               </a:lnSpc>
               <a:spcBef>
                 <a:spcPts val="0"/>
@@ -8248,7 +8453,7 @@
           <a:p>
             <a:pPr algn="l">
               <a:lnSpc>
-                <a:spcPct val="110000"/>
+                <a:spcPct val="128000"/>
               </a:lnSpc>
               <a:spcBef>
                 <a:spcPts val="0"/>
@@ -8270,7 +8475,7 @@
           <a:p>
             <a:pPr algn="l">
               <a:lnSpc>
-                <a:spcPct val="110000"/>
+                <a:spcPct val="128000"/>
               </a:lnSpc>
               <a:spcBef>
                 <a:spcPts val="0"/>
@@ -8333,7 +8538,7 @@
           <a:p>
             <a:pPr algn="l">
               <a:lnSpc>
-                <a:spcPct val="110000"/>
+                <a:spcPct val="128000"/>
               </a:lnSpc>
               <a:spcBef>
                 <a:spcPts val="0"/>
@@ -8355,7 +8560,7 @@
           <a:p>
             <a:pPr algn="l">
               <a:lnSpc>
-                <a:spcPct val="110000"/>
+                <a:spcPct val="128000"/>
               </a:lnSpc>
               <a:spcBef>
                 <a:spcPts val="0"/>
@@ -8377,7 +8582,7 @@
           <a:p>
             <a:pPr algn="l">
               <a:lnSpc>
-                <a:spcPct val="110000"/>
+                <a:spcPct val="128000"/>
               </a:lnSpc>
               <a:spcBef>
                 <a:spcPts val="0"/>
@@ -8399,7 +8604,7 @@
           <a:p>
             <a:pPr algn="l">
               <a:lnSpc>
-                <a:spcPct val="110000"/>
+                <a:spcPct val="128000"/>
               </a:lnSpc>
               <a:spcBef>
                 <a:spcPts val="0"/>
@@ -8421,7 +8626,7 @@
           <a:p>
             <a:pPr algn="l">
               <a:lnSpc>
-                <a:spcPct val="110000"/>
+                <a:spcPct val="128000"/>
               </a:lnSpc>
               <a:spcBef>
                 <a:spcPts val="0"/>
@@ -8443,7 +8648,7 @@
           <a:p>
             <a:pPr algn="l">
               <a:lnSpc>
-                <a:spcPct val="110000"/>
+                <a:spcPct val="128000"/>
               </a:lnSpc>
               <a:spcBef>
                 <a:spcPts val="0"/>
@@ -8465,7 +8670,7 @@
           <a:p>
             <a:pPr algn="l">
               <a:lnSpc>
-                <a:spcPct val="110000"/>
+                <a:spcPct val="128000"/>
               </a:lnSpc>
               <a:spcBef>
                 <a:spcPts val="0"/>
@@ -8487,7 +8692,7 @@
           <a:p>
             <a:pPr algn="l">
               <a:lnSpc>
-                <a:spcPct val="110000"/>
+                <a:spcPct val="128000"/>
               </a:lnSpc>
               <a:spcBef>
                 <a:spcPts val="0"/>
@@ -8532,7 +8737,7 @@
           <a:p>
             <a:pPr algn="ctr">
               <a:lnSpc>
-                <a:spcPct val="105000"/>
+                <a:spcPct val="118000"/>
               </a:lnSpc>
               <a:spcBef>
                 <a:spcPts val="0"/>
@@ -8683,7 +8888,7 @@
           <a:p>
             <a:pPr algn="l">
               <a:lnSpc>
-                <a:spcPct val="105000"/>
+                <a:spcPct val="118000"/>
               </a:lnSpc>
               <a:spcBef>
                 <a:spcPts val="0"/>
@@ -8713,7 +8918,7 @@
         <p:spPr>
           <a:xfrm>
             <a:off x="868680" y="1828800"/>
-            <a:ext cx="10607040" cy="3291840"/>
+            <a:ext cx="10607040" cy="3657600"/>
           </a:xfrm>
           <a:prstGeom prst="rect">
             <a:avLst/>
@@ -8728,7 +8933,7 @@
           <a:p>
             <a:pPr algn="l">
               <a:lnSpc>
-                <a:spcPct val="110000"/>
+                <a:spcPct val="128000"/>
               </a:lnSpc>
               <a:spcBef>
                 <a:spcPts val="0"/>
@@ -8759,7 +8964,7 @@
           <a:p>
             <a:pPr algn="l">
               <a:lnSpc>
-                <a:spcPct val="110000"/>
+                <a:spcPct val="128000"/>
               </a:lnSpc>
               <a:spcBef>
                 <a:spcPts val="0"/>
@@ -8790,7 +8995,7 @@
           <a:p>
             <a:pPr algn="l">
               <a:lnSpc>
-                <a:spcPct val="110000"/>
+                <a:spcPct val="128000"/>
               </a:lnSpc>
               <a:spcBef>
                 <a:spcPts val="0"/>
@@ -8821,7 +9026,7 @@
           <a:p>
             <a:pPr algn="l">
               <a:lnSpc>
-                <a:spcPct val="110000"/>
+                <a:spcPct val="128000"/>
               </a:lnSpc>
               <a:spcBef>
                 <a:spcPts val="0"/>
@@ -8875,7 +9080,7 @@
           <a:p>
             <a:pPr algn="l">
               <a:lnSpc>
-                <a:spcPct val="105000"/>
+                <a:spcPct val="118000"/>
               </a:lnSpc>
               <a:spcBef>
                 <a:spcPts val="0"/>

--- a/presentation/kob.pptx
+++ b/presentation/kob.pptx
@@ -14,6 +14,7 @@
     <p:sldId id="262" r:id="rId13"/>
     <p:sldId id="263" r:id="rId14"/>
     <p:sldId id="264" r:id="rId15"/>
+    <p:sldId id="265" r:id="rId16"/>
   </p:sldIdLst>
   <p:sldSz cx="12191695" cy="6858000" type="screen4x3"/>
   <p:notesSz cx="6858000" cy="9144000"/>
@@ -3403,6 +3404,358 @@
 </p:sld>
 </file>
 
+<file path=ppt/slides/slide10.xml><?xml version="1.0" encoding="utf-8"?>
+<p:sld xmlns:a="http://schemas.openxmlformats.org/drawingml/2006/main" xmlns:p="http://schemas.openxmlformats.org/presentationml/2006/main" xmlns:r="http://schemas.openxmlformats.org/officeDocument/2006/relationships">
+  <p:cSld>
+    <p:spTree>
+      <p:nvGrpSpPr>
+        <p:cNvPr id="1" name=""/>
+        <p:cNvGrpSpPr/>
+        <p:nvPr/>
+      </p:nvGrpSpPr>
+      <p:grpSpPr/>
+      <p:sp>
+        <p:nvSpPr>
+          <p:cNvPr id="2" name="Rectangle 1"/>
+          <p:cNvSpPr/>
+          <p:nvPr/>
+        </p:nvSpPr>
+        <p:spPr>
+          <a:xfrm>
+            <a:off x="0" y="0"/>
+            <a:ext cx="12191695" cy="6858000"/>
+          </a:xfrm>
+          <a:prstGeom prst="rect">
+            <a:avLst/>
+          </a:prstGeom>
+          <a:solidFill>
+            <a:srgbClr val="3A1647"/>
+          </a:solidFill>
+          <a:ln>
+            <a:noFill/>
+          </a:ln>
+          <a:effectLst/>
+        </p:spPr>
+        <p:style>
+          <a:lnRef idx="1">
+            <a:schemeClr val="accent1"/>
+          </a:lnRef>
+          <a:fillRef idx="3">
+            <a:schemeClr val="accent1"/>
+          </a:fillRef>
+          <a:effectRef idx="2">
+            <a:schemeClr val="accent1"/>
+          </a:effectRef>
+          <a:fontRef idx="minor">
+            <a:schemeClr val="lt1"/>
+          </a:fontRef>
+        </p:style>
+        <p:txBody>
+          <a:bodyPr rtlCol="0" anchor="ctr"/>
+          <a:lstStyle/>
+          <a:p>
+            <a:pPr algn="ctr"/>
+          </a:p>
+        </p:txBody>
+      </p:sp>
+      <p:sp>
+        <p:nvSpPr>
+          <p:cNvPr id="3" name="Rectangle 2"/>
+          <p:cNvSpPr/>
+          <p:nvPr/>
+        </p:nvSpPr>
+        <p:spPr>
+          <a:xfrm>
+            <a:off x="0" y="1554480"/>
+            <a:ext cx="12191695" cy="54864"/>
+          </a:xfrm>
+          <a:prstGeom prst="rect">
+            <a:avLst/>
+          </a:prstGeom>
+          <a:solidFill>
+            <a:srgbClr val="C71E7A"/>
+          </a:solidFill>
+          <a:ln>
+            <a:noFill/>
+          </a:ln>
+          <a:effectLst/>
+        </p:spPr>
+        <p:style>
+          <a:lnRef idx="1">
+            <a:schemeClr val="accent1"/>
+          </a:lnRef>
+          <a:fillRef idx="3">
+            <a:schemeClr val="accent1"/>
+          </a:fillRef>
+          <a:effectRef idx="2">
+            <a:schemeClr val="accent1"/>
+          </a:effectRef>
+          <a:fontRef idx="minor">
+            <a:schemeClr val="lt1"/>
+          </a:fontRef>
+        </p:style>
+        <p:txBody>
+          <a:bodyPr rtlCol="0" anchor="ctr"/>
+          <a:lstStyle/>
+          <a:p>
+            <a:pPr algn="ctr"/>
+          </a:p>
+        </p:txBody>
+      </p:sp>
+      <p:sp>
+        <p:nvSpPr>
+          <p:cNvPr id="4" name="TextBox 3"/>
+          <p:cNvSpPr txBox="1"/>
+          <p:nvPr/>
+        </p:nvSpPr>
+        <p:spPr>
+          <a:xfrm>
+            <a:off x="822960" y="640080"/>
+            <a:ext cx="10515600" cy="822960"/>
+          </a:xfrm>
+          <a:prstGeom prst="rect">
+            <a:avLst/>
+          </a:prstGeom>
+          <a:noFill/>
+        </p:spPr>
+        <p:txBody>
+          <a:bodyPr wrap="square" anchor="t" lIns="0" rIns="0" tIns="0" bIns="0">
+            <a:spAutoFit/>
+          </a:bodyPr>
+          <a:lstStyle/>
+          <a:p>
+            <a:pPr algn="l">
+              <a:lnSpc>
+                <a:spcPct val="118000"/>
+              </a:lnSpc>
+              <a:spcBef>
+                <a:spcPts val="0"/>
+              </a:spcBef>
+              <a:spcAft>
+                <a:spcPts val="600"/>
+              </a:spcAft>
+            </a:pPr>
+            <a:r>
+              <a:rPr sz="3400" b="1" i="0">
+                <a:solidFill>
+                  <a:srgbClr val="FFFFFF"/>
+                </a:solidFill>
+                <a:latin typeface="Georgia"/>
+              </a:rPr>
+              <a:t>Takeaways</a:t>
+            </a:r>
+          </a:p>
+        </p:txBody>
+      </p:sp>
+      <p:sp>
+        <p:nvSpPr>
+          <p:cNvPr id="5" name="TextBox 4"/>
+          <p:cNvSpPr txBox="1"/>
+          <p:nvPr/>
+        </p:nvSpPr>
+        <p:spPr>
+          <a:xfrm>
+            <a:off x="868680" y="1828800"/>
+            <a:ext cx="10607040" cy="3657600"/>
+          </a:xfrm>
+          <a:prstGeom prst="rect">
+            <a:avLst/>
+          </a:prstGeom>
+          <a:noFill/>
+        </p:spPr>
+        <p:txBody>
+          <a:bodyPr wrap="square" anchor="t" lIns="0" rIns="0" tIns="0" bIns="0">
+            <a:spAutoFit/>
+          </a:bodyPr>
+          <a:lstStyle/>
+          <a:p>
+            <a:pPr algn="l">
+              <a:lnSpc>
+                <a:spcPct val="128000"/>
+              </a:lnSpc>
+              <a:spcBef>
+                <a:spcPts val="0"/>
+              </a:spcBef>
+              <a:spcAft>
+                <a:spcPts val="1400"/>
+              </a:spcAft>
+            </a:pPr>
+            <a:r>
+              <a:rPr sz="1800" b="1" i="0">
+                <a:solidFill>
+                  <a:srgbClr val="CB9FE0"/>
+                </a:solidFill>
+                <a:latin typeface="Georgia"/>
+              </a:rPr>
+              <a:t>●  Use Arrow on the wire, default to Flight. </a:t>
+            </a:r>
+            <a:r>
+              <a:rPr sz="1800" b="0" i="0">
+                <a:solidFill>
+                  <a:srgbClr val="E6D8EE"/>
+                </a:solidFill>
+                <a:latin typeface="Georgia"/>
+              </a:rPr>
+              <a:t>Not JSON (150–1750× slower, 8× heavier), not Protobuf (5–56× slower).</a:t>
+            </a:r>
+          </a:p>
+          <a:p>
+            <a:pPr algn="l">
+              <a:lnSpc>
+                <a:spcPct val="128000"/>
+              </a:lnSpc>
+              <a:spcBef>
+                <a:spcPts val="0"/>
+              </a:spcBef>
+              <a:spcAft>
+                <a:spcPts val="1400"/>
+              </a:spcAft>
+            </a:pPr>
+            <a:r>
+              <a:rPr sz="1800" b="1" i="0">
+                <a:solidFill>
+                  <a:srgbClr val="CB9FE0"/>
+                </a:solidFill>
+                <a:latin typeface="Georgia"/>
+              </a:rPr>
+              <a:t>●  Self-discovering beats configured. </a:t>
+            </a:r>
+            <a:r>
+              <a:rPr sz="1800" b="0" i="0">
+                <a:solidFill>
+                  <a:srgbClr val="E6D8EE"/>
+                </a:solidFill>
+                <a:latin typeface="Georgia"/>
+              </a:rPr>
+              <a:t>Point kob at a folder; new data appears live, no restart, no schema.</a:t>
+            </a:r>
+          </a:p>
+          <a:p>
+            <a:pPr algn="l">
+              <a:lnSpc>
+                <a:spcPct val="128000"/>
+              </a:lnSpc>
+              <a:spcBef>
+                <a:spcPts val="0"/>
+              </a:spcBef>
+              <a:spcAft>
+                <a:spcPts val="1400"/>
+              </a:spcAft>
+            </a:pPr>
+            <a:r>
+              <a:rPr sz="1800" b="1" i="0">
+                <a:solidFill>
+                  <a:srgbClr val="CB9FE0"/>
+                </a:solidFill>
+                <a:latin typeface="Georgia"/>
+              </a:rPr>
+              <a:t>●  Minimal &amp; safe by construction. </a:t>
+            </a:r>
+            <a:r>
+              <a:rPr sz="1800" b="0" i="0">
+                <a:solidFill>
+                  <a:srgbClr val="E6D8EE"/>
+                </a:solidFill>
+                <a:latin typeface="Georgia"/>
+              </a:rPr>
+              <a:t>Four deps, ~750-line core, read-only, parameterised, sandboxed.</a:t>
+            </a:r>
+          </a:p>
+          <a:p>
+            <a:pPr algn="l">
+              <a:lnSpc>
+                <a:spcPct val="128000"/>
+              </a:lnSpc>
+              <a:spcBef>
+                <a:spcPts val="0"/>
+              </a:spcBef>
+              <a:spcAft>
+                <a:spcPts val="600"/>
+              </a:spcAft>
+            </a:pPr>
+            <a:r>
+              <a:rPr sz="1800" b="1" i="0">
+                <a:solidFill>
+                  <a:srgbClr val="CB9FE0"/>
+                </a:solidFill>
+                <a:latin typeface="Georgia"/>
+              </a:rPr>
+              <a:t>●  It's the wire, not the engine. </a:t>
+            </a:r>
+            <a:r>
+              <a:rPr sz="1800" b="0" i="0">
+                <a:solidFill>
+                  <a:srgbClr val="E6D8EE"/>
+                </a:solidFill>
+                <a:latin typeface="Georgia"/>
+              </a:rPr>
+              <a:t>Hold DuckDB constant and the format alone moves latency by 1750×.</a:t>
+            </a:r>
+          </a:p>
+        </p:txBody>
+      </p:sp>
+      <p:sp>
+        <p:nvSpPr>
+          <p:cNvPr id="6" name="TextBox 5"/>
+          <p:cNvSpPr txBox="1"/>
+          <p:nvPr/>
+        </p:nvSpPr>
+        <p:spPr>
+          <a:xfrm>
+            <a:off x="868680" y="5577840"/>
+            <a:ext cx="10607040" cy="731520"/>
+          </a:xfrm>
+          <a:prstGeom prst="rect">
+            <a:avLst/>
+          </a:prstGeom>
+          <a:noFill/>
+        </p:spPr>
+        <p:txBody>
+          <a:bodyPr wrap="square" anchor="t" lIns="0" rIns="0" tIns="0" bIns="0">
+            <a:spAutoFit/>
+          </a:bodyPr>
+          <a:lstStyle/>
+          <a:p>
+            <a:pPr algn="l">
+              <a:lnSpc>
+                <a:spcPct val="118000"/>
+              </a:lnSpc>
+              <a:spcBef>
+                <a:spcPts val="0"/>
+              </a:spcBef>
+              <a:spcAft>
+                <a:spcPts val="600"/>
+              </a:spcAft>
+            </a:pPr>
+            <a:r>
+              <a:rPr sz="1300" b="0" i="0">
+                <a:solidFill>
+                  <a:srgbClr val="B7A9C2"/>
+                </a:solidFill>
+                <a:latin typeface="Georgia"/>
+              </a:rPr>
+              <a:t>README.md  ·  docs/DESIGN.md  ·  docs/PERFORMANCE_REPORT.md          </a:t>
+            </a:r>
+            <a:r>
+              <a:rPr sz="1300" b="1" i="0">
+                <a:solidFill>
+                  <a:srgbClr val="CB9FE0"/>
+                </a:solidFill>
+                <a:latin typeface="Georgia"/>
+              </a:rPr>
+              <a:t>github.com/iyedexe/kob</a:t>
+            </a:r>
+          </a:p>
+        </p:txBody>
+      </p:sp>
+    </p:spTree>
+  </p:cSld>
+  <p:clrMapOvr>
+    <a:masterClrMapping/>
+  </p:clrMapOvr>
+</p:sld>
+</file>
+
 <file path=ppt/slides/slide2.xml><?xml version="1.0" encoding="utf-8"?>
 <p:sld xmlns:a="http://schemas.openxmlformats.org/drawingml/2006/main" xmlns:p="http://schemas.openxmlformats.org/presentationml/2006/main" xmlns:r="http://schemas.openxmlformats.org/officeDocument/2006/relationships">
   <p:cSld>
@@ -3649,7 +4002,7 @@
                 </a:solidFill>
                 <a:latin typeface="Georgia"/>
               </a:rPr>
-              <a:t>          2 / 9</a:t>
+              <a:t>          2 / 10</a:t>
             </a:r>
           </a:p>
         </p:txBody>
@@ -4586,7 +4939,7 @@
                 </a:solidFill>
                 <a:latin typeface="Georgia"/>
               </a:rPr>
-              <a:t>          3 / 9</a:t>
+              <a:t>          3 / 10</a:t>
             </a:r>
           </a:p>
         </p:txBody>
@@ -5450,7 +5803,7 @@
                 </a:solidFill>
                 <a:latin typeface="Georgia"/>
               </a:rPr>
-              <a:t>THEORY</a:t>
+              <a:t>DATA LAYOUT</a:t>
             </a:r>
           </a:p>
         </p:txBody>
@@ -5495,7 +5848,7 @@
                 </a:solidFill>
                 <a:latin typeface="Georgia"/>
               </a:rPr>
-              <a:t>Why Apache Arrow — the 30-second theory</a:t>
+              <a:t>List of dicts vs. columns — the same data, two shapes</a:t>
             </a:r>
           </a:p>
         </p:txBody>
@@ -5602,7 +5955,731 @@
                 </a:solidFill>
                 <a:latin typeface="Georgia"/>
               </a:rPr>
-              <a:t>          4 / 9</a:t>
+              <a:t>          4 / 10</a:t>
+            </a:r>
+          </a:p>
+        </p:txBody>
+      </p:sp>
+      <p:sp>
+        <p:nvSpPr>
+          <p:cNvPr id="7" name="TextBox 6"/>
+          <p:cNvSpPr txBox="1"/>
+          <p:nvPr/>
+        </p:nvSpPr>
+        <p:spPr>
+          <a:xfrm>
+            <a:off x="685800" y="1371600"/>
+            <a:ext cx="10789920" cy="548640"/>
+          </a:xfrm>
+          <a:prstGeom prst="rect">
+            <a:avLst/>
+          </a:prstGeom>
+          <a:noFill/>
+        </p:spPr>
+        <p:txBody>
+          <a:bodyPr wrap="square" anchor="t" lIns="0" rIns="0" tIns="0" bIns="0">
+            <a:spAutoFit/>
+          </a:bodyPr>
+          <a:lstStyle/>
+          <a:p>
+            <a:pPr algn="l">
+              <a:lnSpc>
+                <a:spcPct val="125000"/>
+              </a:lnSpc>
+              <a:spcBef>
+                <a:spcPts val="0"/>
+              </a:spcBef>
+              <a:spcAft>
+                <a:spcPts val="600"/>
+              </a:spcAft>
+            </a:pPr>
+            <a:r>
+              <a:rPr sz="1500" b="0" i="0">
+                <a:solidFill>
+                  <a:srgbClr val="2B2230"/>
+                </a:solidFill>
+                <a:latin typeface="Georgia"/>
+              </a:rPr>
+              <a:t>Before the speed story — the SAME little table, in the two shapes a server can hand you.</a:t>
+            </a:r>
+          </a:p>
+        </p:txBody>
+      </p:sp>
+      <p:sp>
+        <p:nvSpPr>
+          <p:cNvPr id="8" name="Rounded Rectangle 7"/>
+          <p:cNvSpPr/>
+          <p:nvPr/>
+        </p:nvSpPr>
+        <p:spPr>
+          <a:xfrm>
+            <a:off x="685800" y="2057400"/>
+            <a:ext cx="5257800" cy="2103120"/>
+          </a:xfrm>
+          <a:prstGeom prst="roundRect">
+            <a:avLst/>
+          </a:prstGeom>
+          <a:solidFill>
+            <a:srgbClr val="2A1633"/>
+          </a:solidFill>
+          <a:ln>
+            <a:noFill/>
+          </a:ln>
+          <a:effectLst/>
+        </p:spPr>
+        <p:style>
+          <a:lnRef idx="1">
+            <a:schemeClr val="accent1"/>
+          </a:lnRef>
+          <a:fillRef idx="3">
+            <a:schemeClr val="accent1"/>
+          </a:fillRef>
+          <a:effectRef idx="2">
+            <a:schemeClr val="accent1"/>
+          </a:effectRef>
+          <a:fontRef idx="minor">
+            <a:schemeClr val="lt1"/>
+          </a:fontRef>
+        </p:style>
+        <p:txBody>
+          <a:bodyPr rtlCol="0" anchor="ctr" wrap="square" lIns="201168" rIns="182880" tIns="128016" bIns="128016"/>
+          <a:lstStyle/>
+          <a:p>
+            <a:pPr algn="l">
+              <a:lnSpc>
+                <a:spcPct val="128000"/>
+              </a:lnSpc>
+              <a:spcBef>
+                <a:spcPts val="0"/>
+              </a:spcBef>
+              <a:spcAft>
+                <a:spcPts val="300"/>
+              </a:spcAft>
+            </a:pPr>
+            <a:r>
+              <a:rPr sz="1200" b="0" i="0">
+                <a:solidFill>
+                  <a:srgbClr val="ECE3F2"/>
+                </a:solidFill>
+                <a:latin typeface="Consolas"/>
+              </a:rPr>
+              <a:t>[</a:t>
+            </a:r>
+          </a:p>
+          <a:p>
+            <a:pPr algn="l">
+              <a:lnSpc>
+                <a:spcPct val="128000"/>
+              </a:lnSpc>
+              <a:spcBef>
+                <a:spcPts val="0"/>
+              </a:spcBef>
+              <a:spcAft>
+                <a:spcPts val="300"/>
+              </a:spcAft>
+            </a:pPr>
+            <a:r>
+              <a:rPr sz="1200" b="0" i="0">
+                <a:solidFill>
+                  <a:srgbClr val="ECE3F2"/>
+                </a:solidFill>
+                <a:latin typeface="Consolas"/>
+              </a:rPr>
+              <a:t>  {"symbol":"AAPL", "strike":200, "bid":5.20},</a:t>
+            </a:r>
+          </a:p>
+          <a:p>
+            <a:pPr algn="l">
+              <a:lnSpc>
+                <a:spcPct val="128000"/>
+              </a:lnSpc>
+              <a:spcBef>
+                <a:spcPts val="0"/>
+              </a:spcBef>
+              <a:spcAft>
+                <a:spcPts val="300"/>
+              </a:spcAft>
+            </a:pPr>
+            <a:r>
+              <a:rPr sz="1200" b="0" i="0">
+                <a:solidFill>
+                  <a:srgbClr val="ECE3F2"/>
+                </a:solidFill>
+                <a:latin typeface="Consolas"/>
+              </a:rPr>
+              <a:t>  {"symbol":"AAPL", "strike":205, "bid":3.10},</a:t>
+            </a:r>
+          </a:p>
+          <a:p>
+            <a:pPr algn="l">
+              <a:lnSpc>
+                <a:spcPct val="128000"/>
+              </a:lnSpc>
+              <a:spcBef>
+                <a:spcPts val="0"/>
+              </a:spcBef>
+              <a:spcAft>
+                <a:spcPts val="300"/>
+              </a:spcAft>
+            </a:pPr>
+            <a:r>
+              <a:rPr sz="1200" b="0" i="0">
+                <a:solidFill>
+                  <a:srgbClr val="ECE3F2"/>
+                </a:solidFill>
+                <a:latin typeface="Consolas"/>
+              </a:rPr>
+              <a:t>  {"symbol":"MSFT", "strike":300, "bid":8.40}</a:t>
+            </a:r>
+          </a:p>
+          <a:p>
+            <a:pPr algn="l">
+              <a:lnSpc>
+                <a:spcPct val="128000"/>
+              </a:lnSpc>
+              <a:spcBef>
+                <a:spcPts val="0"/>
+              </a:spcBef>
+              <a:spcAft>
+                <a:spcPts val="300"/>
+              </a:spcAft>
+            </a:pPr>
+            <a:r>
+              <a:rPr sz="1200" b="0" i="0">
+                <a:solidFill>
+                  <a:srgbClr val="ECE3F2"/>
+                </a:solidFill>
+                <a:latin typeface="Consolas"/>
+              </a:rPr>
+              <a:t>]</a:t>
+            </a:r>
+          </a:p>
+        </p:txBody>
+      </p:sp>
+      <p:sp>
+        <p:nvSpPr>
+          <p:cNvPr id="9" name="TextBox 8"/>
+          <p:cNvSpPr txBox="1"/>
+          <p:nvPr/>
+        </p:nvSpPr>
+        <p:spPr>
+          <a:xfrm>
+            <a:off x="685800" y="4224528"/>
+            <a:ext cx="5257800" cy="1005840"/>
+          </a:xfrm>
+          <a:prstGeom prst="rect">
+            <a:avLst/>
+          </a:prstGeom>
+          <a:noFill/>
+        </p:spPr>
+        <p:txBody>
+          <a:bodyPr wrap="square" anchor="t" lIns="0" rIns="0" tIns="0" bIns="0">
+            <a:spAutoFit/>
+          </a:bodyPr>
+          <a:lstStyle/>
+          <a:p>
+            <a:pPr algn="l">
+              <a:lnSpc>
+                <a:spcPct val="122000"/>
+              </a:lnSpc>
+              <a:spcBef>
+                <a:spcPts val="0"/>
+              </a:spcBef>
+              <a:spcAft>
+                <a:spcPts val="600"/>
+              </a:spcAft>
+            </a:pPr>
+            <a:r>
+              <a:rPr sz="1250" b="1" i="0">
+                <a:solidFill>
+                  <a:srgbClr val="C71E7A"/>
+                </a:solidFill>
+                <a:latin typeface="Georgia"/>
+              </a:rPr>
+              <a:t>Row-oriented — JSON, a list of dicts.  </a:t>
+            </a:r>
+            <a:r>
+              <a:rPr sz="1200" b="0" i="0">
+                <a:solidFill>
+                  <a:srgbClr val="2B2230"/>
+                </a:solidFill>
+                <a:latin typeface="Georgia"/>
+              </a:rPr>
+              <a:t>Keys repeat on every row; values stored field-by-field. To read one column you walk every row and pull that field — decode all of it, then rebuild columns.</a:t>
+            </a:r>
+          </a:p>
+        </p:txBody>
+      </p:sp>
+      <p:sp>
+        <p:nvSpPr>
+          <p:cNvPr id="10" name="Rounded Rectangle 9"/>
+          <p:cNvSpPr/>
+          <p:nvPr/>
+        </p:nvSpPr>
+        <p:spPr>
+          <a:xfrm>
+            <a:off x="6263640" y="2057400"/>
+            <a:ext cx="5257800" cy="2103120"/>
+          </a:xfrm>
+          <a:prstGeom prst="roundRect">
+            <a:avLst/>
+          </a:prstGeom>
+          <a:solidFill>
+            <a:srgbClr val="2A1633"/>
+          </a:solidFill>
+          <a:ln>
+            <a:noFill/>
+          </a:ln>
+          <a:effectLst/>
+        </p:spPr>
+        <p:style>
+          <a:lnRef idx="1">
+            <a:schemeClr val="accent1"/>
+          </a:lnRef>
+          <a:fillRef idx="3">
+            <a:schemeClr val="accent1"/>
+          </a:fillRef>
+          <a:effectRef idx="2">
+            <a:schemeClr val="accent1"/>
+          </a:effectRef>
+          <a:fontRef idx="minor">
+            <a:schemeClr val="lt1"/>
+          </a:fontRef>
+        </p:style>
+        <p:txBody>
+          <a:bodyPr rtlCol="0" anchor="ctr" wrap="square" lIns="201168" rIns="182880" tIns="128016" bIns="128016"/>
+          <a:lstStyle/>
+          <a:p>
+            <a:pPr algn="l">
+              <a:lnSpc>
+                <a:spcPct val="128000"/>
+              </a:lnSpc>
+              <a:spcBef>
+                <a:spcPts val="0"/>
+              </a:spcBef>
+              <a:spcAft>
+                <a:spcPts val="300"/>
+              </a:spcAft>
+            </a:pPr>
+            <a:r>
+              <a:rPr sz="1200" b="0" i="0">
+                <a:solidFill>
+                  <a:srgbClr val="ECE3F2"/>
+                </a:solidFill>
+                <a:latin typeface="Consolas"/>
+              </a:rPr>
+              <a:t>symbol : ["AAPL", "AAPL", "MSFT"]</a:t>
+            </a:r>
+          </a:p>
+          <a:p>
+            <a:pPr algn="l">
+              <a:lnSpc>
+                <a:spcPct val="128000"/>
+              </a:lnSpc>
+              <a:spcBef>
+                <a:spcPts val="0"/>
+              </a:spcBef>
+              <a:spcAft>
+                <a:spcPts val="300"/>
+              </a:spcAft>
+            </a:pPr>
+            <a:r>
+              <a:rPr sz="1200" b="0" i="0">
+                <a:solidFill>
+                  <a:srgbClr val="ECE3F2"/>
+                </a:solidFill>
+                <a:latin typeface="Consolas"/>
+              </a:rPr>
+              <a:t>strike : [ 200,    205,    300  ]</a:t>
+            </a:r>
+          </a:p>
+          <a:p>
+            <a:pPr algn="l">
+              <a:lnSpc>
+                <a:spcPct val="128000"/>
+              </a:lnSpc>
+              <a:spcBef>
+                <a:spcPts val="0"/>
+              </a:spcBef>
+              <a:spcAft>
+                <a:spcPts val="300"/>
+              </a:spcAft>
+            </a:pPr>
+            <a:r>
+              <a:rPr sz="1200" b="0" i="0">
+                <a:solidFill>
+                  <a:srgbClr val="ECE3F2"/>
+                </a:solidFill>
+                <a:latin typeface="Consolas"/>
+              </a:rPr>
+              <a:t>bid    : [ 5.20,   3.10,   8.40 ]</a:t>
+            </a:r>
+          </a:p>
+        </p:txBody>
+      </p:sp>
+      <p:sp>
+        <p:nvSpPr>
+          <p:cNvPr id="11" name="TextBox 10"/>
+          <p:cNvSpPr txBox="1"/>
+          <p:nvPr/>
+        </p:nvSpPr>
+        <p:spPr>
+          <a:xfrm>
+            <a:off x="6263640" y="4224528"/>
+            <a:ext cx="5257800" cy="1005840"/>
+          </a:xfrm>
+          <a:prstGeom prst="rect">
+            <a:avLst/>
+          </a:prstGeom>
+          <a:noFill/>
+        </p:spPr>
+        <p:txBody>
+          <a:bodyPr wrap="square" anchor="t" lIns="0" rIns="0" tIns="0" bIns="0">
+            <a:spAutoFit/>
+          </a:bodyPr>
+          <a:lstStyle/>
+          <a:p>
+            <a:pPr algn="l">
+              <a:lnSpc>
+                <a:spcPct val="122000"/>
+              </a:lnSpc>
+              <a:spcBef>
+                <a:spcPts val="0"/>
+              </a:spcBef>
+              <a:spcAft>
+                <a:spcPts val="600"/>
+              </a:spcAft>
+            </a:pPr>
+            <a:r>
+              <a:rPr sz="1250" b="1" i="0">
+                <a:solidFill>
+                  <a:srgbClr val="6D2C8F"/>
+                </a:solidFill>
+                <a:latin typeface="Georgia"/>
+              </a:rPr>
+              <a:t>Columnar — a DataFrame / Arrow.  </a:t>
+            </a:r>
+            <a:r>
+              <a:rPr sz="1200" b="0" i="0">
+                <a:solidFill>
+                  <a:srgbClr val="2B2230"/>
+                </a:solidFill>
+                <a:latin typeface="Georgia"/>
+              </a:rPr>
+              <a:t>Each column is one contiguous array; keys stored once. A whole column is already laid out for vectorized ops, compression, and zero-copy transfer.</a:t>
+            </a:r>
+          </a:p>
+        </p:txBody>
+      </p:sp>
+      <p:sp>
+        <p:nvSpPr>
+          <p:cNvPr id="12" name="TextBox 11"/>
+          <p:cNvSpPr txBox="1"/>
+          <p:nvPr/>
+        </p:nvSpPr>
+        <p:spPr>
+          <a:xfrm>
+            <a:off x="685800" y="5440680"/>
+            <a:ext cx="10789920" cy="822960"/>
+          </a:xfrm>
+          <a:prstGeom prst="rect">
+            <a:avLst/>
+          </a:prstGeom>
+          <a:noFill/>
+        </p:spPr>
+        <p:txBody>
+          <a:bodyPr wrap="square" anchor="t" lIns="0" rIns="0" tIns="0" bIns="0">
+            <a:spAutoFit/>
+          </a:bodyPr>
+          <a:lstStyle/>
+          <a:p>
+            <a:pPr algn="l">
+              <a:lnSpc>
+                <a:spcPct val="124000"/>
+              </a:lnSpc>
+              <a:spcBef>
+                <a:spcPts val="0"/>
+              </a:spcBef>
+              <a:spcAft>
+                <a:spcPts val="600"/>
+              </a:spcAft>
+            </a:pPr>
+            <a:r>
+              <a:rPr sz="1400" b="1" i="0">
+                <a:solidFill>
+                  <a:srgbClr val="3A1647"/>
+                </a:solidFill>
+                <a:latin typeface="Georgia"/>
+              </a:rPr>
+              <a:t>Why it matters:  </a:t>
+            </a:r>
+            <a:r>
+              <a:rPr sz="1300" b="0" i="0">
+                <a:solidFill>
+                  <a:srgbClr val="2B2230"/>
+                </a:solidFill>
+                <a:latin typeface="Georgia"/>
+              </a:rPr>
+              <a:t>pandas, Polars and Arrow are all columnar in memory — so kob serving Arrow is that exact layout, nothing to translate; JSON forces a row-by-row encode on the way out and a decode + column-rebuild on the way in.</a:t>
+            </a:r>
+          </a:p>
+        </p:txBody>
+      </p:sp>
+    </p:spTree>
+  </p:cSld>
+  <p:clrMapOvr>
+    <a:masterClrMapping/>
+  </p:clrMapOvr>
+</p:sld>
+</file>
+
+<file path=ppt/slides/slide5.xml><?xml version="1.0" encoding="utf-8"?>
+<p:sld xmlns:a="http://schemas.openxmlformats.org/drawingml/2006/main" xmlns:p="http://schemas.openxmlformats.org/presentationml/2006/main" xmlns:r="http://schemas.openxmlformats.org/officeDocument/2006/relationships">
+  <p:cSld>
+    <p:spTree>
+      <p:nvGrpSpPr>
+        <p:cNvPr id="1" name=""/>
+        <p:cNvGrpSpPr/>
+        <p:nvPr/>
+      </p:nvGrpSpPr>
+      <p:grpSpPr/>
+      <p:sp>
+        <p:nvSpPr>
+          <p:cNvPr id="2" name="Rectangle 1"/>
+          <p:cNvSpPr/>
+          <p:nvPr/>
+        </p:nvSpPr>
+        <p:spPr>
+          <a:xfrm>
+            <a:off x="0" y="0"/>
+            <a:ext cx="146304" cy="6858000"/>
+          </a:xfrm>
+          <a:prstGeom prst="rect">
+            <a:avLst/>
+          </a:prstGeom>
+          <a:solidFill>
+            <a:srgbClr val="6D2C8F"/>
+          </a:solidFill>
+          <a:ln>
+            <a:noFill/>
+          </a:ln>
+          <a:effectLst/>
+        </p:spPr>
+        <p:style>
+          <a:lnRef idx="1">
+            <a:schemeClr val="accent1"/>
+          </a:lnRef>
+          <a:fillRef idx="3">
+            <a:schemeClr val="accent1"/>
+          </a:fillRef>
+          <a:effectRef idx="2">
+            <a:schemeClr val="accent1"/>
+          </a:effectRef>
+          <a:fontRef idx="minor">
+            <a:schemeClr val="lt1"/>
+          </a:fontRef>
+        </p:style>
+        <p:txBody>
+          <a:bodyPr rtlCol="0" anchor="ctr"/>
+          <a:lstStyle/>
+          <a:p>
+            <a:pPr algn="ctr"/>
+          </a:p>
+        </p:txBody>
+      </p:sp>
+      <p:sp>
+        <p:nvSpPr>
+          <p:cNvPr id="3" name="TextBox 2"/>
+          <p:cNvSpPr txBox="1"/>
+          <p:nvPr/>
+        </p:nvSpPr>
+        <p:spPr>
+          <a:xfrm>
+            <a:off x="685800" y="329184"/>
+            <a:ext cx="10789920" cy="274320"/>
+          </a:xfrm>
+          <a:prstGeom prst="rect">
+            <a:avLst/>
+          </a:prstGeom>
+          <a:noFill/>
+        </p:spPr>
+        <p:txBody>
+          <a:bodyPr wrap="square" anchor="t" lIns="0" rIns="0" tIns="0" bIns="0">
+            <a:spAutoFit/>
+          </a:bodyPr>
+          <a:lstStyle/>
+          <a:p>
+            <a:pPr algn="l">
+              <a:lnSpc>
+                <a:spcPct val="118000"/>
+              </a:lnSpc>
+              <a:spcBef>
+                <a:spcPts val="0"/>
+              </a:spcBef>
+              <a:spcAft>
+                <a:spcPts val="600"/>
+              </a:spcAft>
+            </a:pPr>
+            <a:r>
+              <a:rPr sz="1200" b="1" i="0">
+                <a:solidFill>
+                  <a:srgbClr val="C71E7A"/>
+                </a:solidFill>
+                <a:latin typeface="Georgia"/>
+              </a:rPr>
+              <a:t>THEORY</a:t>
+            </a:r>
+          </a:p>
+        </p:txBody>
+      </p:sp>
+      <p:sp>
+        <p:nvSpPr>
+          <p:cNvPr id="4" name="TextBox 3"/>
+          <p:cNvSpPr txBox="1"/>
+          <p:nvPr/>
+        </p:nvSpPr>
+        <p:spPr>
+          <a:xfrm>
+            <a:off x="685800" y="585216"/>
+            <a:ext cx="10789920" cy="548640"/>
+          </a:xfrm>
+          <a:prstGeom prst="rect">
+            <a:avLst/>
+          </a:prstGeom>
+          <a:noFill/>
+        </p:spPr>
+        <p:txBody>
+          <a:bodyPr wrap="square" anchor="t" lIns="0" rIns="0" tIns="0" bIns="0">
+            <a:spAutoFit/>
+          </a:bodyPr>
+          <a:lstStyle/>
+          <a:p>
+            <a:pPr algn="l">
+              <a:lnSpc>
+                <a:spcPct val="118000"/>
+              </a:lnSpc>
+              <a:spcBef>
+                <a:spcPts val="0"/>
+              </a:spcBef>
+              <a:spcAft>
+                <a:spcPts val="600"/>
+              </a:spcAft>
+            </a:pPr>
+            <a:r>
+              <a:rPr sz="2500" b="1" i="0">
+                <a:solidFill>
+                  <a:srgbClr val="3A1647"/>
+                </a:solidFill>
+                <a:latin typeface="Georgia"/>
+              </a:rPr>
+              <a:t>Why Apache Arrow — the 30-second theory</a:t>
+            </a:r>
+          </a:p>
+        </p:txBody>
+      </p:sp>
+      <p:sp>
+        <p:nvSpPr>
+          <p:cNvPr id="5" name="Rectangle 4"/>
+          <p:cNvSpPr/>
+          <p:nvPr/>
+        </p:nvSpPr>
+        <p:spPr>
+          <a:xfrm>
+            <a:off x="685800" y="1207008"/>
+            <a:ext cx="1920240" cy="38100"/>
+          </a:xfrm>
+          <a:prstGeom prst="rect">
+            <a:avLst/>
+          </a:prstGeom>
+          <a:solidFill>
+            <a:srgbClr val="6D2C8F"/>
+          </a:solidFill>
+          <a:ln>
+            <a:noFill/>
+          </a:ln>
+          <a:effectLst/>
+        </p:spPr>
+        <p:style>
+          <a:lnRef idx="1">
+            <a:schemeClr val="accent1"/>
+          </a:lnRef>
+          <a:fillRef idx="3">
+            <a:schemeClr val="accent1"/>
+          </a:fillRef>
+          <a:effectRef idx="2">
+            <a:schemeClr val="accent1"/>
+          </a:effectRef>
+          <a:fontRef idx="minor">
+            <a:schemeClr val="lt1"/>
+          </a:fontRef>
+        </p:style>
+        <p:txBody>
+          <a:bodyPr rtlCol="0" anchor="ctr"/>
+          <a:lstStyle/>
+          <a:p>
+            <a:pPr algn="ctr"/>
+          </a:p>
+        </p:txBody>
+      </p:sp>
+      <p:sp>
+        <p:nvSpPr>
+          <p:cNvPr id="6" name="TextBox 5"/>
+          <p:cNvSpPr txBox="1"/>
+          <p:nvPr/>
+        </p:nvSpPr>
+        <p:spPr>
+          <a:xfrm>
+            <a:off x="685800" y="6419088"/>
+            <a:ext cx="10789920" cy="292608"/>
+          </a:xfrm>
+          <a:prstGeom prst="rect">
+            <a:avLst/>
+          </a:prstGeom>
+          <a:noFill/>
+        </p:spPr>
+        <p:txBody>
+          <a:bodyPr wrap="square" anchor="t" lIns="0" rIns="0" tIns="0" bIns="0">
+            <a:spAutoFit/>
+          </a:bodyPr>
+          <a:lstStyle/>
+          <a:p>
+            <a:pPr algn="l">
+              <a:lnSpc>
+                <a:spcPct val="118000"/>
+              </a:lnSpc>
+              <a:spcBef>
+                <a:spcPts val="0"/>
+              </a:spcBef>
+              <a:spcAft>
+                <a:spcPts val="600"/>
+              </a:spcAft>
+            </a:pPr>
+            <a:r>
+              <a:rPr sz="1000" b="1" i="0">
+                <a:solidFill>
+                  <a:srgbClr val="6D2C8F"/>
+                </a:solidFill>
+                <a:latin typeface="Georgia"/>
+              </a:rPr>
+              <a:t>kob</a:t>
+            </a:r>
+            <a:r>
+              <a:rPr sz="1000" b="0" i="0">
+                <a:solidFill>
+                  <a:srgbClr val="8A8692"/>
+                </a:solidFill>
+                <a:latin typeface="Georgia"/>
+              </a:rPr>
+              <a:t>  ·  self-discovering Parquet → Apache Arrow</a:t>
+            </a:r>
+            <a:r>
+              <a:rPr sz="1000" b="0" i="0">
+                <a:solidFill>
+                  <a:srgbClr val="8A8692"/>
+                </a:solidFill>
+                <a:latin typeface="Georgia"/>
+              </a:rPr>
+              <a:t>          5 / 10</a:t>
             </a:r>
           </a:p>
         </p:txBody>
@@ -6182,7 +7259,7 @@
 </p:sld>
 </file>
 
-<file path=ppt/slides/slide5.xml><?xml version="1.0" encoding="utf-8"?>
+<file path=ppt/slides/slide6.xml><?xml version="1.0" encoding="utf-8"?>
 <p:sld xmlns:a="http://schemas.openxmlformats.org/drawingml/2006/main" xmlns:p="http://schemas.openxmlformats.org/presentationml/2006/main" xmlns:r="http://schemas.openxmlformats.org/officeDocument/2006/relationships">
   <p:cSld>
     <p:spTree>
@@ -6428,7 +7505,7 @@
                 </a:solidFill>
                 <a:latin typeface="Georgia"/>
               </a:rPr>
-              <a:t>          5 / 9</a:t>
+              <a:t>          6 / 10</a:t>
             </a:r>
           </a:p>
         </p:txBody>
@@ -6980,512 +8057,6 @@
 </p:sld>
 </file>
 
-<file path=ppt/slides/slide6.xml><?xml version="1.0" encoding="utf-8"?>
-<p:sld xmlns:a="http://schemas.openxmlformats.org/drawingml/2006/main" xmlns:p="http://schemas.openxmlformats.org/presentationml/2006/main" xmlns:r="http://schemas.openxmlformats.org/officeDocument/2006/relationships">
-  <p:cSld>
-    <p:spTree>
-      <p:nvGrpSpPr>
-        <p:cNvPr id="1" name=""/>
-        <p:cNvGrpSpPr/>
-        <p:nvPr/>
-      </p:nvGrpSpPr>
-      <p:grpSpPr/>
-      <p:sp>
-        <p:nvSpPr>
-          <p:cNvPr id="2" name="Rectangle 1"/>
-          <p:cNvSpPr/>
-          <p:nvPr/>
-        </p:nvSpPr>
-        <p:spPr>
-          <a:xfrm>
-            <a:off x="0" y="0"/>
-            <a:ext cx="146304" cy="6858000"/>
-          </a:xfrm>
-          <a:prstGeom prst="rect">
-            <a:avLst/>
-          </a:prstGeom>
-          <a:solidFill>
-            <a:srgbClr val="6D2C8F"/>
-          </a:solidFill>
-          <a:ln>
-            <a:noFill/>
-          </a:ln>
-          <a:effectLst/>
-        </p:spPr>
-        <p:style>
-          <a:lnRef idx="1">
-            <a:schemeClr val="accent1"/>
-          </a:lnRef>
-          <a:fillRef idx="3">
-            <a:schemeClr val="accent1"/>
-          </a:fillRef>
-          <a:effectRef idx="2">
-            <a:schemeClr val="accent1"/>
-          </a:effectRef>
-          <a:fontRef idx="minor">
-            <a:schemeClr val="lt1"/>
-          </a:fontRef>
-        </p:style>
-        <p:txBody>
-          <a:bodyPr rtlCol="0" anchor="ctr"/>
-          <a:lstStyle/>
-          <a:p>
-            <a:pPr algn="ctr"/>
-          </a:p>
-        </p:txBody>
-      </p:sp>
-      <p:sp>
-        <p:nvSpPr>
-          <p:cNvPr id="3" name="TextBox 2"/>
-          <p:cNvSpPr txBox="1"/>
-          <p:nvPr/>
-        </p:nvSpPr>
-        <p:spPr>
-          <a:xfrm>
-            <a:off x="685800" y="329184"/>
-            <a:ext cx="10789920" cy="274320"/>
-          </a:xfrm>
-          <a:prstGeom prst="rect">
-            <a:avLst/>
-          </a:prstGeom>
-          <a:noFill/>
-        </p:spPr>
-        <p:txBody>
-          <a:bodyPr wrap="square" anchor="t" lIns="0" rIns="0" tIns="0" bIns="0">
-            <a:spAutoFit/>
-          </a:bodyPr>
-          <a:lstStyle/>
-          <a:p>
-            <a:pPr algn="l">
-              <a:lnSpc>
-                <a:spcPct val="118000"/>
-              </a:lnSpc>
-              <a:spcBef>
-                <a:spcPts val="0"/>
-              </a:spcBef>
-              <a:spcAft>
-                <a:spcPts val="600"/>
-              </a:spcAft>
-            </a:pPr>
-            <a:r>
-              <a:rPr sz="1200" b="1" i="0">
-                <a:solidFill>
-                  <a:srgbClr val="C71E7A"/>
-                </a:solidFill>
-                <a:latin typeface="Georgia"/>
-              </a:rPr>
-              <a:t>RESULTS</a:t>
-            </a:r>
-          </a:p>
-        </p:txBody>
-      </p:sp>
-      <p:sp>
-        <p:nvSpPr>
-          <p:cNvPr id="4" name="TextBox 3"/>
-          <p:cNvSpPr txBox="1"/>
-          <p:nvPr/>
-        </p:nvSpPr>
-        <p:spPr>
-          <a:xfrm>
-            <a:off x="685800" y="585216"/>
-            <a:ext cx="10789920" cy="548640"/>
-          </a:xfrm>
-          <a:prstGeom prst="rect">
-            <a:avLst/>
-          </a:prstGeom>
-          <a:noFill/>
-        </p:spPr>
-        <p:txBody>
-          <a:bodyPr wrap="square" anchor="t" lIns="0" rIns="0" tIns="0" bIns="0">
-            <a:spAutoFit/>
-          </a:bodyPr>
-          <a:lstStyle/>
-          <a:p>
-            <a:pPr algn="l">
-              <a:lnSpc>
-                <a:spcPct val="118000"/>
-              </a:lnSpc>
-              <a:spcBef>
-                <a:spcPts val="0"/>
-              </a:spcBef>
-              <a:spcAft>
-                <a:spcPts val="600"/>
-              </a:spcAft>
-            </a:pPr>
-            <a:r>
-              <a:rPr sz="2500" b="1" i="0">
-                <a:solidFill>
-                  <a:srgbClr val="3A1647"/>
-                </a:solidFill>
-                <a:latin typeface="Georgia"/>
-              </a:rPr>
-              <a:t>Key findings</a:t>
-            </a:r>
-          </a:p>
-        </p:txBody>
-      </p:sp>
-      <p:sp>
-        <p:nvSpPr>
-          <p:cNvPr id="5" name="Rectangle 4"/>
-          <p:cNvSpPr/>
-          <p:nvPr/>
-        </p:nvSpPr>
-        <p:spPr>
-          <a:xfrm>
-            <a:off x="685800" y="1207008"/>
-            <a:ext cx="1920240" cy="38100"/>
-          </a:xfrm>
-          <a:prstGeom prst="rect">
-            <a:avLst/>
-          </a:prstGeom>
-          <a:solidFill>
-            <a:srgbClr val="6D2C8F"/>
-          </a:solidFill>
-          <a:ln>
-            <a:noFill/>
-          </a:ln>
-          <a:effectLst/>
-        </p:spPr>
-        <p:style>
-          <a:lnRef idx="1">
-            <a:schemeClr val="accent1"/>
-          </a:lnRef>
-          <a:fillRef idx="3">
-            <a:schemeClr val="accent1"/>
-          </a:fillRef>
-          <a:effectRef idx="2">
-            <a:schemeClr val="accent1"/>
-          </a:effectRef>
-          <a:fontRef idx="minor">
-            <a:schemeClr val="lt1"/>
-          </a:fontRef>
-        </p:style>
-        <p:txBody>
-          <a:bodyPr rtlCol="0" anchor="ctr"/>
-          <a:lstStyle/>
-          <a:p>
-            <a:pPr algn="ctr"/>
-          </a:p>
-        </p:txBody>
-      </p:sp>
-      <p:sp>
-        <p:nvSpPr>
-          <p:cNvPr id="6" name="TextBox 5"/>
-          <p:cNvSpPr txBox="1"/>
-          <p:nvPr/>
-        </p:nvSpPr>
-        <p:spPr>
-          <a:xfrm>
-            <a:off x="685800" y="6419088"/>
-            <a:ext cx="10789920" cy="292608"/>
-          </a:xfrm>
-          <a:prstGeom prst="rect">
-            <a:avLst/>
-          </a:prstGeom>
-          <a:noFill/>
-        </p:spPr>
-        <p:txBody>
-          <a:bodyPr wrap="square" anchor="t" lIns="0" rIns="0" tIns="0" bIns="0">
-            <a:spAutoFit/>
-          </a:bodyPr>
-          <a:lstStyle/>
-          <a:p>
-            <a:pPr algn="l">
-              <a:lnSpc>
-                <a:spcPct val="118000"/>
-              </a:lnSpc>
-              <a:spcBef>
-                <a:spcPts val="0"/>
-              </a:spcBef>
-              <a:spcAft>
-                <a:spcPts val="600"/>
-              </a:spcAft>
-            </a:pPr>
-            <a:r>
-              <a:rPr sz="1000" b="1" i="0">
-                <a:solidFill>
-                  <a:srgbClr val="6D2C8F"/>
-                </a:solidFill>
-                <a:latin typeface="Georgia"/>
-              </a:rPr>
-              <a:t>kob</a:t>
-            </a:r>
-            <a:r>
-              <a:rPr sz="1000" b="0" i="0">
-                <a:solidFill>
-                  <a:srgbClr val="8A8692"/>
-                </a:solidFill>
-                <a:latin typeface="Georgia"/>
-              </a:rPr>
-              <a:t>  ·  self-discovering Parquet → Apache Arrow</a:t>
-            </a:r>
-            <a:r>
-              <a:rPr sz="1000" b="0" i="0">
-                <a:solidFill>
-                  <a:srgbClr val="8A8692"/>
-                </a:solidFill>
-                <a:latin typeface="Georgia"/>
-              </a:rPr>
-              <a:t>          6 / 9</a:t>
-            </a:r>
-          </a:p>
-        </p:txBody>
-      </p:sp>
-      <p:sp>
-        <p:nvSpPr>
-          <p:cNvPr id="7" name="TextBox 6"/>
-          <p:cNvSpPr txBox="1"/>
-          <p:nvPr/>
-        </p:nvSpPr>
-        <p:spPr>
-          <a:xfrm>
-            <a:off x="685800" y="1417320"/>
-            <a:ext cx="5486400" cy="4206240"/>
-          </a:xfrm>
-          <a:prstGeom prst="rect">
-            <a:avLst/>
-          </a:prstGeom>
-          <a:noFill/>
-        </p:spPr>
-        <p:txBody>
-          <a:bodyPr wrap="square" anchor="t" lIns="0" rIns="0" tIns="0" bIns="0">
-            <a:spAutoFit/>
-          </a:bodyPr>
-          <a:lstStyle/>
-          <a:p>
-            <a:pPr algn="l">
-              <a:lnSpc>
-                <a:spcPct val="128000"/>
-              </a:lnSpc>
-              <a:spcBef>
-                <a:spcPts val="0"/>
-              </a:spcBef>
-              <a:spcAft>
-                <a:spcPts val="1000"/>
-              </a:spcAft>
-            </a:pPr>
-            <a:r>
-              <a:rPr sz="1500" b="1" i="0">
-                <a:solidFill>
-                  <a:srgbClr val="3A1647"/>
-                </a:solidFill>
-                <a:latin typeface="Georgia"/>
-              </a:rPr>
-              <a:t>●  Arrow wins by 1–3 orders of magnitude</a:t>
-            </a:r>
-            <a:r>
-              <a:rPr sz="1500" b="0" i="0">
-                <a:solidFill>
-                  <a:srgbClr val="2B2230"/>
-                </a:solidFill>
-                <a:latin typeface="Georgia"/>
-              </a:rPr>
-              <a:t> — 150–1750× faster than JSON, 5–56× faster than the best Protobuf.</a:t>
-            </a:r>
-          </a:p>
-          <a:p>
-            <a:pPr algn="l">
-              <a:lnSpc>
-                <a:spcPct val="128000"/>
-              </a:lnSpc>
-              <a:spcBef>
-                <a:spcPts val="0"/>
-              </a:spcBef>
-              <a:spcAft>
-                <a:spcPts val="1000"/>
-              </a:spcAft>
-            </a:pPr>
-            <a:r>
-              <a:rPr sz="1500" b="1" i="0">
-                <a:solidFill>
-                  <a:srgbClr val="3A1647"/>
-                </a:solidFill>
-                <a:latin typeface="Georgia"/>
-              </a:rPr>
-              <a:t>●  Binary ≠ fast.</a:t>
-            </a:r>
-            <a:r>
-              <a:rPr sz="1500" b="0" i="0">
-                <a:solidFill>
-                  <a:srgbClr val="2B2230"/>
-                </a:solidFill>
-                <a:latin typeface="Georgia"/>
-              </a:rPr>
-              <a:t> Protobuf is binary and still 5–56× slower — it must parse every value.</a:t>
-            </a:r>
-          </a:p>
-          <a:p>
-            <a:pPr algn="l">
-              <a:lnSpc>
-                <a:spcPct val="128000"/>
-              </a:lnSpc>
-              <a:spcBef>
-                <a:spcPts val="0"/>
-              </a:spcBef>
-              <a:spcAft>
-                <a:spcPts val="1000"/>
-              </a:spcAft>
-            </a:pPr>
-            <a:r>
-              <a:rPr sz="1500" b="1" i="0">
-                <a:solidFill>
-                  <a:srgbClr val="3A1647"/>
-                </a:solidFill>
-                <a:latin typeface="Georgia"/>
-              </a:rPr>
-              <a:t>●  The gap grows with result size</a:t>
-            </a:r>
-            <a:r>
-              <a:rPr sz="1500" b="0" i="0">
-                <a:solidFill>
-                  <a:srgbClr val="2B2230"/>
-                </a:solidFill>
-                <a:latin typeface="Georgia"/>
-              </a:rPr>
-              <a:t> — ~150× on 29k rows → ~1750× on 1.75M rows.</a:t>
-            </a:r>
-          </a:p>
-          <a:p>
-            <a:pPr algn="l">
-              <a:lnSpc>
-                <a:spcPct val="128000"/>
-              </a:lnSpc>
-              <a:spcBef>
-                <a:spcPts val="0"/>
-              </a:spcBef>
-              <a:spcAft>
-                <a:spcPts val="1000"/>
-              </a:spcAft>
-            </a:pPr>
-            <a:r>
-              <a:rPr sz="1500" b="1" i="0">
-                <a:solidFill>
-                  <a:srgbClr val="3A1647"/>
-                </a:solidFill>
-                <a:latin typeface="Georgia"/>
-              </a:rPr>
-              <a:t>●  JSON is a bandwidth hog too</a:t>
-            </a:r>
-            <a:r>
-              <a:rPr sz="1500" b="0" i="0">
-                <a:solidFill>
-                  <a:srgbClr val="2B2230"/>
-                </a:solidFill>
-                <a:latin typeface="Georgia"/>
-              </a:rPr>
-              <a:t> — 8× heavier on the wire than Arrow + zstd.</a:t>
-            </a:r>
-          </a:p>
-          <a:p>
-            <a:pPr algn="l">
-              <a:lnSpc>
-                <a:spcPct val="128000"/>
-              </a:lnSpc>
-              <a:spcBef>
-                <a:spcPts val="0"/>
-              </a:spcBef>
-              <a:spcAft>
-                <a:spcPts val="600"/>
-              </a:spcAft>
-            </a:pPr>
-            <a:r>
-              <a:rPr sz="1500" b="1" i="0">
-                <a:solidFill>
-                  <a:srgbClr val="3A1647"/>
-                </a:solidFill>
-                <a:latin typeface="Georgia"/>
-              </a:rPr>
-              <a:t>●  Same engine throughout.</a:t>
-            </a:r>
-            <a:r>
-              <a:rPr sz="1500" b="0" i="0">
-                <a:solidFill>
-                  <a:srgbClr val="2B2230"/>
-                </a:solidFill>
-                <a:latin typeface="Georgia"/>
-              </a:rPr>
-              <a:t> Only the wire format changes — so the wire is the cause.</a:t>
-            </a:r>
-          </a:p>
-        </p:txBody>
-      </p:sp>
-      <p:pic>
-        <p:nvPicPr>
-          <p:cNvPr id="8" name="Picture 7" descr="speedup.png"/>
-          <p:cNvPicPr>
-            <a:picLocks noChangeAspect="1"/>
-          </p:cNvPicPr>
-          <p:nvPr/>
-        </p:nvPicPr>
-        <p:blipFill>
-          <a:blip r:embed="rId2"/>
-          <a:stretch>
-            <a:fillRect/>
-          </a:stretch>
-        </p:blipFill>
-        <p:spPr>
-          <a:xfrm>
-            <a:off x="6400800" y="1737360"/>
-            <a:ext cx="5120640" cy="2290575"/>
-          </a:xfrm>
-          <a:prstGeom prst="rect">
-            <a:avLst/>
-          </a:prstGeom>
-        </p:spPr>
-      </p:pic>
-      <p:sp>
-        <p:nvSpPr>
-          <p:cNvPr id="9" name="TextBox 8"/>
-          <p:cNvSpPr txBox="1"/>
-          <p:nvPr/>
-        </p:nvSpPr>
-        <p:spPr>
-          <a:xfrm>
-            <a:off x="6400800" y="4251960"/>
-            <a:ext cx="5120640" cy="365760"/>
-          </a:xfrm>
-          <a:prstGeom prst="rect">
-            <a:avLst/>
-          </a:prstGeom>
-          <a:noFill/>
-        </p:spPr>
-        <p:txBody>
-          <a:bodyPr wrap="square" anchor="t" lIns="0" rIns="0" tIns="0" bIns="0">
-            <a:spAutoFit/>
-          </a:bodyPr>
-          <a:lstStyle/>
-          <a:p>
-            <a:pPr algn="ctr">
-              <a:lnSpc>
-                <a:spcPct val="118000"/>
-              </a:lnSpc>
-              <a:spcBef>
-                <a:spcPts val="0"/>
-              </a:spcBef>
-              <a:spcAft>
-                <a:spcPts val="600"/>
-              </a:spcAft>
-            </a:pPr>
-            <a:r>
-              <a:rPr sz="1100" b="0" i="1">
-                <a:solidFill>
-                  <a:srgbClr val="8A8692"/>
-                </a:solidFill>
-                <a:latin typeface="Georgia"/>
-              </a:rPr>
-              <a:t>Speedup vs REST/JSON, 1.75M-row pull (medium dataset).</a:t>
-            </a:r>
-          </a:p>
-        </p:txBody>
-      </p:sp>
-    </p:spTree>
-  </p:cSld>
-  <p:clrMapOvr>
-    <a:masterClrMapping/>
-  </p:clrMapOvr>
-</p:sld>
-</file>
-
 <file path=ppt/slides/slide7.xml><?xml version="1.0" encoding="utf-8"?>
 <p:sld xmlns:a="http://schemas.openxmlformats.org/drawingml/2006/main" xmlns:p="http://schemas.openxmlformats.org/presentationml/2006/main" xmlns:r="http://schemas.openxmlformats.org/officeDocument/2006/relationships">
   <p:cSld>
@@ -7580,7 +8151,7 @@
                 </a:solidFill>
                 <a:latin typeface="Georgia"/>
               </a:rPr>
-              <a:t>BENCHMARK</a:t>
+              <a:t>RESULTS</a:t>
             </a:r>
           </a:p>
         </p:txBody>
@@ -7625,7 +8196,7 @@
                 </a:solidFill>
                 <a:latin typeface="Georgia"/>
               </a:rPr>
-              <a:t>Performance: same query, five wire formats</a:t>
+              <a:t>Key findings</a:t>
             </a:r>
           </a:p>
         </p:txBody>
@@ -7732,14 +8303,192 @@
                 </a:solidFill>
                 <a:latin typeface="Georgia"/>
               </a:rPr>
-              <a:t>          7 / 9</a:t>
+              <a:t>          7 / 10</a:t>
+            </a:r>
+          </a:p>
+        </p:txBody>
+      </p:sp>
+      <p:sp>
+        <p:nvSpPr>
+          <p:cNvPr id="7" name="TextBox 6"/>
+          <p:cNvSpPr txBox="1"/>
+          <p:nvPr/>
+        </p:nvSpPr>
+        <p:spPr>
+          <a:xfrm>
+            <a:off x="685800" y="1417320"/>
+            <a:ext cx="5486400" cy="4206240"/>
+          </a:xfrm>
+          <a:prstGeom prst="rect">
+            <a:avLst/>
+          </a:prstGeom>
+          <a:noFill/>
+        </p:spPr>
+        <p:txBody>
+          <a:bodyPr wrap="square" anchor="t" lIns="0" rIns="0" tIns="0" bIns="0">
+            <a:spAutoFit/>
+          </a:bodyPr>
+          <a:lstStyle/>
+          <a:p>
+            <a:pPr algn="l">
+              <a:lnSpc>
+                <a:spcPct val="128000"/>
+              </a:lnSpc>
+              <a:spcBef>
+                <a:spcPts val="0"/>
+              </a:spcBef>
+              <a:spcAft>
+                <a:spcPts val="1000"/>
+              </a:spcAft>
+            </a:pPr>
+            <a:r>
+              <a:rPr sz="1500" b="1" i="0">
+                <a:solidFill>
+                  <a:srgbClr val="3A1647"/>
+                </a:solidFill>
+                <a:latin typeface="Georgia"/>
+              </a:rPr>
+              <a:t>●  Arrow wins by 1–3 orders of magnitude</a:t>
+            </a:r>
+            <a:r>
+              <a:rPr sz="1500" b="0" i="0">
+                <a:solidFill>
+                  <a:srgbClr val="2B2230"/>
+                </a:solidFill>
+                <a:latin typeface="Georgia"/>
+              </a:rPr>
+              <a:t> — 150–1750× faster than JSON, 5–56× faster than the best Protobuf.</a:t>
+            </a:r>
+          </a:p>
+          <a:p>
+            <a:pPr algn="l">
+              <a:lnSpc>
+                <a:spcPct val="128000"/>
+              </a:lnSpc>
+              <a:spcBef>
+                <a:spcPts val="0"/>
+              </a:spcBef>
+              <a:spcAft>
+                <a:spcPts val="1000"/>
+              </a:spcAft>
+            </a:pPr>
+            <a:r>
+              <a:rPr sz="1500" b="1" i="0">
+                <a:solidFill>
+                  <a:srgbClr val="3A1647"/>
+                </a:solidFill>
+                <a:latin typeface="Georgia"/>
+              </a:rPr>
+              <a:t>●  Binary ≠ fast.</a:t>
+            </a:r>
+            <a:r>
+              <a:rPr sz="1500" b="0" i="0">
+                <a:solidFill>
+                  <a:srgbClr val="2B2230"/>
+                </a:solidFill>
+                <a:latin typeface="Georgia"/>
+              </a:rPr>
+              <a:t> Protobuf is binary and still 5–56× slower — it must parse every value.</a:t>
+            </a:r>
+          </a:p>
+          <a:p>
+            <a:pPr algn="l">
+              <a:lnSpc>
+                <a:spcPct val="128000"/>
+              </a:lnSpc>
+              <a:spcBef>
+                <a:spcPts val="0"/>
+              </a:spcBef>
+              <a:spcAft>
+                <a:spcPts val="1000"/>
+              </a:spcAft>
+            </a:pPr>
+            <a:r>
+              <a:rPr sz="1500" b="1" i="0">
+                <a:solidFill>
+                  <a:srgbClr val="3A1647"/>
+                </a:solidFill>
+                <a:latin typeface="Georgia"/>
+              </a:rPr>
+              <a:t>●  The gap grows with result size</a:t>
+            </a:r>
+            <a:r>
+              <a:rPr sz="1500" b="0" i="0">
+                <a:solidFill>
+                  <a:srgbClr val="2B2230"/>
+                </a:solidFill>
+                <a:latin typeface="Georgia"/>
+              </a:rPr>
+              <a:t> — ~150× on 29k rows → ~1750× on 1.75M rows.</a:t>
+            </a:r>
+          </a:p>
+          <a:p>
+            <a:pPr algn="l">
+              <a:lnSpc>
+                <a:spcPct val="128000"/>
+              </a:lnSpc>
+              <a:spcBef>
+                <a:spcPts val="0"/>
+              </a:spcBef>
+              <a:spcAft>
+                <a:spcPts val="1000"/>
+              </a:spcAft>
+            </a:pPr>
+            <a:r>
+              <a:rPr sz="1500" b="1" i="0">
+                <a:solidFill>
+                  <a:srgbClr val="3A1647"/>
+                </a:solidFill>
+                <a:latin typeface="Georgia"/>
+              </a:rPr>
+              <a:t>●  JSON is a bandwidth hog too</a:t>
+            </a:r>
+            <a:r>
+              <a:rPr sz="1500" b="0" i="0">
+                <a:solidFill>
+                  <a:srgbClr val="2B2230"/>
+                </a:solidFill>
+                <a:latin typeface="Georgia"/>
+              </a:rPr>
+              <a:t> — 8× heavier on the wire than Arrow + zstd.</a:t>
+            </a:r>
+          </a:p>
+          <a:p>
+            <a:pPr algn="l">
+              <a:lnSpc>
+                <a:spcPct val="128000"/>
+              </a:lnSpc>
+              <a:spcBef>
+                <a:spcPts val="0"/>
+              </a:spcBef>
+              <a:spcAft>
+                <a:spcPts val="600"/>
+              </a:spcAft>
+            </a:pPr>
+            <a:r>
+              <a:rPr sz="1500" b="1" i="0">
+                <a:solidFill>
+                  <a:srgbClr val="3A1647"/>
+                </a:solidFill>
+                <a:latin typeface="Georgia"/>
+              </a:rPr>
+              <a:t>●  Same engine throughout.</a:t>
+            </a:r>
+            <a:r>
+              <a:rPr sz="1500" b="0" i="0">
+                <a:solidFill>
+                  <a:srgbClr val="2B2230"/>
+                </a:solidFill>
+                <a:latin typeface="Georgia"/>
+              </a:rPr>
+              <a:t> Only the wire format changes — so the wire is the cause.</a:t>
             </a:r>
           </a:p>
         </p:txBody>
       </p:sp>
       <p:pic>
         <p:nvPicPr>
-          <p:cNvPr id="7" name="Picture 6" descr="latency.png"/>
+          <p:cNvPr id="8" name="Picture 7" descr="speedup.png"/>
           <p:cNvPicPr>
             <a:picLocks noChangeAspect="1"/>
           </p:cNvPicPr>
@@ -7753,8 +8502,8 @@
         </p:blipFill>
         <p:spPr>
           <a:xfrm>
-            <a:off x="1234440" y="1508760"/>
-            <a:ext cx="7680960" cy="3443189"/>
+            <a:off x="6400800" y="1737360"/>
+            <a:ext cx="5120640" cy="2290575"/>
           </a:xfrm>
           <a:prstGeom prst="rect">
             <a:avLst/>
@@ -7763,14 +8512,14 @@
       </p:pic>
       <p:sp>
         <p:nvSpPr>
-          <p:cNvPr id="8" name="TextBox 7"/>
+          <p:cNvPr id="9" name="TextBox 8"/>
           <p:cNvSpPr txBox="1"/>
           <p:nvPr/>
         </p:nvSpPr>
         <p:spPr>
           <a:xfrm>
-            <a:off x="9144000" y="1737360"/>
-            <a:ext cx="2377440" cy="4206240"/>
+            <a:off x="6400800" y="4251960"/>
+            <a:ext cx="5120640" cy="365760"/>
           </a:xfrm>
           <a:prstGeom prst="rect">
             <a:avLst/>
@@ -7783,7 +8532,7 @@
           </a:bodyPr>
           <a:lstStyle/>
           <a:p>
-            <a:pPr algn="l">
+            <a:pPr algn="ctr">
               <a:lnSpc>
                 <a:spcPct val="118000"/>
               </a:lnSpc>
@@ -7791,212 +8540,17 @@
                 <a:spcPts val="0"/>
               </a:spcBef>
               <a:spcAft>
-                <a:spcPts val="200"/>
-              </a:spcAft>
-            </a:pPr>
-            <a:r>
-              <a:rPr sz="1500" b="1" i="0">
-                <a:solidFill>
-                  <a:srgbClr val="3A1647"/>
-                </a:solidFill>
-                <a:latin typeface="Georgia"/>
-              </a:rPr>
-              <a:t>1.75M rows</a:t>
-            </a:r>
-          </a:p>
-          <a:p>
-            <a:pPr algn="l">
-              <a:lnSpc>
-                <a:spcPct val="118000"/>
-              </a:lnSpc>
-              <a:spcBef>
-                <a:spcPts val="0"/>
-              </a:spcBef>
-              <a:spcAft>
-                <a:spcPts val="1400"/>
-              </a:spcAft>
-            </a:pPr>
-            <a:r>
-              <a:rPr sz="1150" b="0" i="0">
+                <a:spcPts val="600"/>
+              </a:spcAft>
+            </a:pPr>
+            <a:r>
+              <a:rPr sz="1100" b="0" i="1">
                 <a:solidFill>
                   <a:srgbClr val="8A8692"/>
                 </a:solidFill>
                 <a:latin typeface="Georgia"/>
               </a:rPr>
-              <a:t>one query, one engine</a:t>
-            </a:r>
-          </a:p>
-          <a:p>
-            <a:pPr algn="l">
-              <a:lnSpc>
-                <a:spcPct val="118000"/>
-              </a:lnSpc>
-              <a:spcBef>
-                <a:spcPts val="0"/>
-              </a:spcBef>
-              <a:spcAft>
-                <a:spcPts val="600"/>
-              </a:spcAft>
-            </a:pPr>
-            <a:r>
-              <a:rPr sz="1400" b="1" i="0">
-                <a:solidFill>
-                  <a:srgbClr val="6D2C8F"/>
-                </a:solidFill>
-                <a:latin typeface="Georgia"/>
-              </a:rPr>
-              <a:t>Flight  </a:t>
-            </a:r>
-            <a:r>
-              <a:rPr sz="1400" b="0" i="0">
-                <a:solidFill>
-                  <a:srgbClr val="2B2230"/>
-                </a:solidFill>
-                <a:latin typeface="Georgia"/>
-              </a:rPr>
-              <a:t>67 ms</a:t>
-            </a:r>
-          </a:p>
-          <a:p>
-            <a:pPr algn="l">
-              <a:lnSpc>
-                <a:spcPct val="118000"/>
-              </a:lnSpc>
-              <a:spcBef>
-                <a:spcPts val="0"/>
-              </a:spcBef>
-              <a:spcAft>
-                <a:spcPts val="1400"/>
-              </a:spcAft>
-            </a:pPr>
-            <a:r>
-              <a:rPr sz="1400" b="1" i="0">
-                <a:solidFill>
-                  <a:srgbClr val="C71E7A"/>
-                </a:solidFill>
-                <a:latin typeface="Georgia"/>
-              </a:rPr>
-              <a:t>JSON  </a:t>
-            </a:r>
-            <a:r>
-              <a:rPr sz="1400" b="0" i="0">
-                <a:solidFill>
-                  <a:srgbClr val="2B2230"/>
-                </a:solidFill>
-                <a:latin typeface="Georgia"/>
-              </a:rPr>
-              <a:t>117 s</a:t>
-            </a:r>
-          </a:p>
-          <a:p>
-            <a:pPr algn="l">
-              <a:lnSpc>
-                <a:spcPct val="125000"/>
-              </a:lnSpc>
-              <a:spcBef>
-                <a:spcPts val="0"/>
-              </a:spcBef>
-              <a:spcAft>
-                <a:spcPts val="1000"/>
-              </a:spcAft>
-            </a:pPr>
-            <a:r>
-              <a:rPr sz="1300" b="0" i="1">
-                <a:solidFill>
-                  <a:srgbClr val="3A1647"/>
-                </a:solidFill>
-                <a:latin typeface="Georgia"/>
-              </a:rPr>
-              <a:t>Same result, ~1750× apart.</a:t>
-            </a:r>
-          </a:p>
-          <a:p>
-            <a:pPr algn="l">
-              <a:lnSpc>
-                <a:spcPct val="125000"/>
-              </a:lnSpc>
-              <a:spcBef>
-                <a:spcPts val="0"/>
-              </a:spcBef>
-              <a:spcAft>
-                <a:spcPts val="600"/>
-              </a:spcAft>
-            </a:pPr>
-            <a:r>
-              <a:rPr sz="1150" b="0" i="0">
-                <a:solidFill>
-                  <a:srgbClr val="8A8692"/>
-                </a:solidFill>
-                <a:latin typeface="Georgia"/>
-              </a:rPr>
-              <a:t>Pushdown happens before serialization — and compounds with picking a fast wire.</a:t>
-            </a:r>
-          </a:p>
-        </p:txBody>
-      </p:sp>
-      <p:sp>
-        <p:nvSpPr>
-          <p:cNvPr id="9" name="TextBox 8"/>
-          <p:cNvSpPr txBox="1"/>
-          <p:nvPr/>
-        </p:nvSpPr>
-        <p:spPr>
-          <a:xfrm>
-            <a:off x="1234440" y="5257800"/>
-            <a:ext cx="7680960" cy="777240"/>
-          </a:xfrm>
-          <a:prstGeom prst="rect">
-            <a:avLst/>
-          </a:prstGeom>
-          <a:noFill/>
-        </p:spPr>
-        <p:txBody>
-          <a:bodyPr wrap="square" anchor="t" lIns="0" rIns="0" tIns="0" bIns="0">
-            <a:spAutoFit/>
-          </a:bodyPr>
-          <a:lstStyle/>
-          <a:p>
-            <a:pPr algn="ctr">
-              <a:lnSpc>
-                <a:spcPct val="118000"/>
-              </a:lnSpc>
-              <a:spcBef>
-                <a:spcPts val="0"/>
-              </a:spcBef>
-              <a:spcAft>
-                <a:spcPts val="600"/>
-              </a:spcAft>
-            </a:pPr>
-            <a:r>
-              <a:rPr sz="1100" b="0" i="1">
-                <a:solidFill>
-                  <a:srgbClr val="8A8692"/>
-                </a:solidFill>
-                <a:latin typeface="Georgia"/>
-              </a:rPr>
-              <a:t>Medium dataset · Apple M4 · localhost loopback (understates Arrow's win on a real network).</a:t>
-            </a:r>
-          </a:p>
-          <a:p>
-            <a:pPr algn="ctr">
-              <a:lnSpc>
-                <a:spcPct val="118000"/>
-              </a:lnSpc>
-              <a:spcBef>
-                <a:spcPts val="0"/>
-              </a:spcBef>
-              <a:spcAft>
-                <a:spcPts val="600"/>
-              </a:spcAft>
-            </a:pPr>
-            <a:r>
-              <a:rPr sz="1100" b="0" i="1">
-                <a:solidFill>
-                  <a:srgbClr val="8A8692"/>
-                </a:solidFill>
-                <a:latin typeface="Georgia"/>
-              </a:rPr>
-              <a:t>Source: docs/PERFORMANCE_REPORT.md</a:t>
+              <a:t>Speedup vs REST/JSON, 1.75M-row pull (medium dataset).</a:t>
             </a:r>
           </a:p>
         </p:txBody>
@@ -8103,7 +8657,7 @@
                 </a:solidFill>
                 <a:latin typeface="Georgia"/>
               </a:rPr>
-              <a:t>SEE IT</a:t>
+              <a:t>BENCHMARK</a:t>
             </a:r>
           </a:p>
         </p:txBody>
@@ -8148,7 +8702,7 @@
                 </a:solidFill>
                 <a:latin typeface="Georgia"/>
               </a:rPr>
-              <a:t>Demo: one query, every transport</a:t>
+              <a:t>Performance: same query, five wire formats</a:t>
             </a:r>
           </a:p>
         </p:txBody>
@@ -8255,21 +8809,45 @@
                 </a:solidFill>
                 <a:latin typeface="Georgia"/>
               </a:rPr>
-              <a:t>          8 / 9</a:t>
-            </a:r>
-          </a:p>
-        </p:txBody>
-      </p:sp>
-      <p:sp>
-        <p:nvSpPr>
-          <p:cNvPr id="7" name="TextBox 6"/>
+              <a:t>          8 / 10</a:t>
+            </a:r>
+          </a:p>
+        </p:txBody>
+      </p:sp>
+      <p:pic>
+        <p:nvPicPr>
+          <p:cNvPr id="7" name="Picture 6" descr="latency.png"/>
+          <p:cNvPicPr>
+            <a:picLocks noChangeAspect="1"/>
+          </p:cNvPicPr>
+          <p:nvPr/>
+        </p:nvPicPr>
+        <p:blipFill>
+          <a:blip r:embed="rId2"/>
+          <a:stretch>
+            <a:fillRect/>
+          </a:stretch>
+        </p:blipFill>
+        <p:spPr>
+          <a:xfrm>
+            <a:off x="1234440" y="1508760"/>
+            <a:ext cx="7680960" cy="3443189"/>
+          </a:xfrm>
+          <a:prstGeom prst="rect">
+            <a:avLst/>
+          </a:prstGeom>
+        </p:spPr>
+      </p:pic>
+      <p:sp>
+        <p:nvSpPr>
+          <p:cNvPr id="8" name="TextBox 7"/>
           <p:cNvSpPr txBox="1"/>
           <p:nvPr/>
         </p:nvSpPr>
         <p:spPr>
           <a:xfrm>
-            <a:off x="685800" y="1371600"/>
-            <a:ext cx="5577840" cy="4206240"/>
+            <a:off x="9144000" y="1737360"/>
+            <a:ext cx="2377440" cy="4206240"/>
           </a:xfrm>
           <a:prstGeom prst="rect">
             <a:avLst/>
@@ -8284,91 +8862,135 @@
           <a:p>
             <a:pPr algn="l">
               <a:lnSpc>
-                <a:spcPct val="128000"/>
-              </a:lnSpc>
-              <a:spcBef>
-                <a:spcPts val="0"/>
-              </a:spcBef>
-              <a:spcAft>
-                <a:spcPts val="1200"/>
-              </a:spcAft>
-            </a:pPr>
-            <a:r>
-              <a:rPr sz="1500" b="0" i="0">
+                <a:spcPct val="118000"/>
+              </a:lnSpc>
+              <a:spcBef>
+                <a:spcPts val="0"/>
+              </a:spcBef>
+              <a:spcAft>
+                <a:spcPts val="200"/>
+              </a:spcAft>
+            </a:pPr>
+            <a:r>
+              <a:rPr sz="1500" b="1" i="0">
+                <a:solidFill>
+                  <a:srgbClr val="3A1647"/>
+                </a:solidFill>
+                <a:latin typeface="Georgia"/>
+              </a:rPr>
+              <a:t>1.75M rows</a:t>
+            </a:r>
+          </a:p>
+          <a:p>
+            <a:pPr algn="l">
+              <a:lnSpc>
+                <a:spcPct val="118000"/>
+              </a:lnSpc>
+              <a:spcBef>
+                <a:spcPts val="0"/>
+              </a:spcBef>
+              <a:spcAft>
+                <a:spcPts val="1400"/>
+              </a:spcAft>
+            </a:pPr>
+            <a:r>
+              <a:rPr sz="1150" b="0" i="0">
+                <a:solidFill>
+                  <a:srgbClr val="8A8692"/>
+                </a:solidFill>
+                <a:latin typeface="Georgia"/>
+              </a:rPr>
+              <a:t>one query, one engine</a:t>
+            </a:r>
+          </a:p>
+          <a:p>
+            <a:pPr algn="l">
+              <a:lnSpc>
+                <a:spcPct val="118000"/>
+              </a:lnSpc>
+              <a:spcBef>
+                <a:spcPts val="0"/>
+              </a:spcBef>
+              <a:spcAft>
+                <a:spcPts val="600"/>
+              </a:spcAft>
+            </a:pPr>
+            <a:r>
+              <a:rPr sz="1400" b="1" i="0">
+                <a:solidFill>
+                  <a:srgbClr val="6D2C8F"/>
+                </a:solidFill>
+                <a:latin typeface="Georgia"/>
+              </a:rPr>
+              <a:t>Flight  </a:t>
+            </a:r>
+            <a:r>
+              <a:rPr sz="1400" b="0" i="0">
                 <a:solidFill>
                   <a:srgbClr val="2B2230"/>
                 </a:solidFill>
                 <a:latin typeface="Georgia"/>
               </a:rPr>
-              <a:t>A runnable notebook spins up all four transports, runs the SAME query over each, checks they return identical data, and times them.</a:t>
-            </a:r>
-          </a:p>
-          <a:p>
-            <a:pPr algn="l">
-              <a:lnSpc>
-                <a:spcPct val="128000"/>
-              </a:lnSpc>
-              <a:spcBef>
-                <a:spcPts val="0"/>
-              </a:spcBef>
-              <a:spcAft>
-                <a:spcPts val="800"/>
+              <a:t>67 ms</a:t>
+            </a:r>
+          </a:p>
+          <a:p>
+            <a:pPr algn="l">
+              <a:lnSpc>
+                <a:spcPct val="118000"/>
+              </a:lnSpc>
+              <a:spcBef>
+                <a:spcPts val="0"/>
+              </a:spcBef>
+              <a:spcAft>
+                <a:spcPts val="1400"/>
               </a:spcAft>
             </a:pPr>
             <a:r>
               <a:rPr sz="1400" b="1" i="0">
                 <a:solidFill>
+                  <a:srgbClr val="C71E7A"/>
+                </a:solidFill>
+                <a:latin typeface="Georgia"/>
+              </a:rPr>
+              <a:t>JSON  </a:t>
+            </a:r>
+            <a:r>
+              <a:rPr sz="1400" b="0" i="0">
+                <a:solidFill>
+                  <a:srgbClr val="2B2230"/>
+                </a:solidFill>
+                <a:latin typeface="Georgia"/>
+              </a:rPr>
+              <a:t>117 s</a:t>
+            </a:r>
+          </a:p>
+          <a:p>
+            <a:pPr algn="l">
+              <a:lnSpc>
+                <a:spcPct val="125000"/>
+              </a:lnSpc>
+              <a:spcBef>
+                <a:spcPts val="0"/>
+              </a:spcBef>
+              <a:spcAft>
+                <a:spcPts val="1000"/>
+              </a:spcAft>
+            </a:pPr>
+            <a:r>
+              <a:rPr sz="1300" b="0" i="1">
+                <a:solidFill>
                   <a:srgbClr val="3A1647"/>
                 </a:solidFill>
                 <a:latin typeface="Georgia"/>
               </a:rPr>
-              <a:t>●  Arrow Flight  ·  Arrow-over-HTTP  ·  REST/JSON  ·  gRPC/Protobuf</a:t>
-            </a:r>
-          </a:p>
-          <a:p>
-            <a:pPr algn="l">
-              <a:lnSpc>
-                <a:spcPct val="128000"/>
-              </a:lnSpc>
-              <a:spcBef>
-                <a:spcPts val="0"/>
-              </a:spcBef>
-              <a:spcAft>
-                <a:spcPts val="800"/>
-              </a:spcAft>
-            </a:pPr>
-            <a:r>
-              <a:rPr sz="1400" b="0" i="0">
-                <a:solidFill>
-                  <a:srgbClr val="2B2230"/>
-                </a:solidFill>
-                <a:latin typeface="Georgia"/>
-              </a:rPr>
-              <a:t>●  Result:  </a:t>
-            </a:r>
-            <a:r>
-              <a:rPr sz="1400" b="1" i="0">
-                <a:solidFill>
-                  <a:srgbClr val="6D2C8F"/>
-                </a:solidFill>
-                <a:latin typeface="Georgia"/>
-              </a:rPr>
-              <a:t>all four return the identical 14,006 rows</a:t>
-            </a:r>
-            <a:r>
-              <a:rPr sz="1400" b="0" i="0">
-                <a:solidFill>
-                  <a:srgbClr val="2B2230"/>
-                </a:solidFill>
-                <a:latin typeface="Georgia"/>
-              </a:rPr>
-              <a:t> — Flight fastest by far.</a:t>
-            </a:r>
-          </a:p>
-          <a:p>
-            <a:pPr algn="l">
-              <a:lnSpc>
-                <a:spcPct val="128000"/>
+              <a:t>Same result, ~1750× apart.</a:t>
+            </a:r>
+          </a:p>
+          <a:p>
+            <a:pPr algn="l">
+              <a:lnSpc>
+                <a:spcPct val="125000"/>
               </a:lnSpc>
               <a:spcBef>
                 <a:spcPts val="0"/>
@@ -8378,351 +9000,27 @@
               </a:spcAft>
             </a:pPr>
             <a:r>
-              <a:rPr sz="1400" b="0" i="0">
-                <a:solidFill>
-                  <a:srgbClr val="2B2230"/>
-                </a:solidFill>
-                <a:latin typeface="Georgia"/>
-              </a:rPr>
-              <a:t>●  Discovery, filtering and serialization are all kob's job — zero schema config.</a:t>
-            </a:r>
-          </a:p>
-        </p:txBody>
-      </p:sp>
-      <p:sp>
-        <p:nvSpPr>
-          <p:cNvPr id="8" name="Rounded Rectangle 7"/>
-          <p:cNvSpPr/>
-          <p:nvPr/>
-        </p:nvSpPr>
-        <p:spPr>
-          <a:xfrm>
-            <a:off x="6400800" y="1554480"/>
-            <a:ext cx="5074920" cy="1234440"/>
-          </a:xfrm>
-          <a:prstGeom prst="roundRect">
-            <a:avLst/>
-          </a:prstGeom>
-          <a:solidFill>
-            <a:srgbClr val="2A1633"/>
-          </a:solidFill>
-          <a:ln>
-            <a:noFill/>
-          </a:ln>
-          <a:effectLst/>
-        </p:spPr>
-        <p:style>
-          <a:lnRef idx="1">
-            <a:schemeClr val="accent1"/>
-          </a:lnRef>
-          <a:fillRef idx="3">
-            <a:schemeClr val="accent1"/>
-          </a:fillRef>
-          <a:effectRef idx="2">
-            <a:schemeClr val="accent1"/>
-          </a:effectRef>
-          <a:fontRef idx="minor">
-            <a:schemeClr val="lt1"/>
-          </a:fontRef>
-        </p:style>
-        <p:txBody>
-          <a:bodyPr rtlCol="0" anchor="ctr" wrap="square" lIns="201168" rIns="182880" tIns="128016" bIns="128016"/>
-          <a:lstStyle/>
-          <a:p>
-            <a:pPr algn="l">
-              <a:lnSpc>
-                <a:spcPct val="128000"/>
-              </a:lnSpc>
-              <a:spcBef>
-                <a:spcPts val="0"/>
-              </a:spcBef>
-              <a:spcAft>
-                <a:spcPts val="300"/>
-              </a:spcAft>
-            </a:pPr>
-            <a:r>
-              <a:rPr sz="1300" b="0" i="0">
-                <a:solidFill>
-                  <a:srgbClr val="ECE3F2"/>
-                </a:solidFill>
-                <a:latin typeface="Consolas"/>
-              </a:rPr>
-              <a:t># install + launch the demo</a:t>
-            </a:r>
-          </a:p>
-          <a:p>
-            <a:pPr algn="l">
-              <a:lnSpc>
-                <a:spcPct val="128000"/>
-              </a:lnSpc>
-              <a:spcBef>
-                <a:spcPts val="0"/>
-              </a:spcBef>
-              <a:spcAft>
-                <a:spcPts val="300"/>
-              </a:spcAft>
-            </a:pPr>
-            <a:r>
-              <a:rPr sz="1300" b="0" i="0">
-                <a:solidFill>
-                  <a:srgbClr val="ECE3F2"/>
-                </a:solidFill>
-                <a:latin typeface="Consolas"/>
-              </a:rPr>
-              <a:t>uv sync --extra demo</a:t>
-            </a:r>
-          </a:p>
-          <a:p>
-            <a:pPr algn="l">
-              <a:lnSpc>
-                <a:spcPct val="128000"/>
-              </a:lnSpc>
-              <a:spcBef>
-                <a:spcPts val="0"/>
-              </a:spcBef>
-              <a:spcAft>
-                <a:spcPts val="300"/>
-              </a:spcAft>
-            </a:pPr>
-            <a:r>
-              <a:rPr sz="1300" b="0" i="0">
-                <a:solidFill>
-                  <a:srgbClr val="ECE3F2"/>
-                </a:solidFill>
-                <a:latin typeface="Consolas"/>
-              </a:rPr>
-              <a:t>make notebook</a:t>
-            </a:r>
-          </a:p>
-        </p:txBody>
-      </p:sp>
-      <p:sp>
-        <p:nvSpPr>
-          <p:cNvPr id="9" name="Rounded Rectangle 8"/>
-          <p:cNvSpPr/>
-          <p:nvPr/>
-        </p:nvSpPr>
-        <p:spPr>
-          <a:xfrm>
-            <a:off x="6400800" y="3063240"/>
-            <a:ext cx="5074920" cy="2468880"/>
-          </a:xfrm>
-          <a:prstGeom prst="roundRect">
-            <a:avLst/>
-          </a:prstGeom>
-          <a:solidFill>
-            <a:srgbClr val="2A1633"/>
-          </a:solidFill>
-          <a:ln>
-            <a:noFill/>
-          </a:ln>
-          <a:effectLst/>
-        </p:spPr>
-        <p:style>
-          <a:lnRef idx="1">
-            <a:schemeClr val="accent1"/>
-          </a:lnRef>
-          <a:fillRef idx="3">
-            <a:schemeClr val="accent1"/>
-          </a:fillRef>
-          <a:effectRef idx="2">
-            <a:schemeClr val="accent1"/>
-          </a:effectRef>
-          <a:fontRef idx="minor">
-            <a:schemeClr val="lt1"/>
-          </a:fontRef>
-        </p:style>
-        <p:txBody>
-          <a:bodyPr rtlCol="0" anchor="ctr" wrap="square" lIns="201168" rIns="182880" tIns="128016" bIns="128016"/>
-          <a:lstStyle/>
-          <a:p>
-            <a:pPr algn="l">
-              <a:lnSpc>
-                <a:spcPct val="128000"/>
-              </a:lnSpc>
-              <a:spcBef>
-                <a:spcPts val="0"/>
-              </a:spcBef>
-              <a:spcAft>
-                <a:spcPts val="300"/>
-              </a:spcAft>
-            </a:pPr>
-            <a:r>
               <a:rPr sz="1150" b="0" i="0">
                 <a:solidFill>
-                  <a:srgbClr val="ECE3F2"/>
-                </a:solidFill>
-                <a:latin typeface="Consolas"/>
-              </a:rPr>
-              <a:t>{</a:t>
-            </a:r>
-          </a:p>
-          <a:p>
-            <a:pPr algn="l">
-              <a:lnSpc>
-                <a:spcPct val="128000"/>
-              </a:lnSpc>
-              <a:spcBef>
-                <a:spcPts val="0"/>
-              </a:spcBef>
-              <a:spcAft>
-                <a:spcPts val="300"/>
-              </a:spcAft>
-            </a:pPr>
-            <a:r>
-              <a:rPr sz="1150" b="0" i="0">
-                <a:solidFill>
-                  <a:srgbClr val="ECE3F2"/>
-                </a:solidFill>
-                <a:latin typeface="Consolas"/>
-              </a:rPr>
-              <a:t>  "dataset": "optionmetrics",</a:t>
-            </a:r>
-          </a:p>
-          <a:p>
-            <a:pPr algn="l">
-              <a:lnSpc>
-                <a:spcPct val="128000"/>
-              </a:lnSpc>
-              <a:spcBef>
-                <a:spcPts val="0"/>
-              </a:spcBef>
-              <a:spcAft>
-                <a:spcPts val="300"/>
-              </a:spcAft>
-            </a:pPr>
-            <a:r>
-              <a:rPr sz="1150" b="0" i="0">
-                <a:solidFill>
-                  <a:srgbClr val="ECE3F2"/>
-                </a:solidFill>
-                <a:latin typeface="Consolas"/>
-              </a:rPr>
-              <a:t>  "columns": ["date","strike","impl_vol","delta"],</a:t>
-            </a:r>
-          </a:p>
-          <a:p>
-            <a:pPr algn="l">
-              <a:lnSpc>
-                <a:spcPct val="128000"/>
-              </a:lnSpc>
-              <a:spcBef>
-                <a:spcPts val="0"/>
-              </a:spcBef>
-              <a:spcAft>
-                <a:spcPts val="300"/>
-              </a:spcAft>
-            </a:pPr>
-            <a:r>
-              <a:rPr sz="1150" b="0" i="0">
-                <a:solidFill>
-                  <a:srgbClr val="ECE3F2"/>
-                </a:solidFill>
-                <a:latin typeface="Consolas"/>
-              </a:rPr>
-              <a:t>  "filters": [</a:t>
-            </a:r>
-          </a:p>
-          <a:p>
-            <a:pPr algn="l">
-              <a:lnSpc>
-                <a:spcPct val="128000"/>
-              </a:lnSpc>
-              <a:spcBef>
-                <a:spcPts val="0"/>
-              </a:spcBef>
-              <a:spcAft>
-                <a:spcPts val="300"/>
-              </a:spcAft>
-            </a:pPr>
-            <a:r>
-              <a:rPr sz="1150" b="0" i="0">
-                <a:solidFill>
-                  <a:srgbClr val="ECE3F2"/>
-                </a:solidFill>
-                <a:latin typeface="Consolas"/>
-              </a:rPr>
-              <a:t>    {"column":"underlying","op":"=","value":"AAPL"},</a:t>
-            </a:r>
-          </a:p>
-          <a:p>
-            <a:pPr algn="l">
-              <a:lnSpc>
-                <a:spcPct val="128000"/>
-              </a:lnSpc>
-              <a:spcBef>
-                <a:spcPts val="0"/>
-              </a:spcBef>
-              <a:spcAft>
-                <a:spcPts val="300"/>
-              </a:spcAft>
-            </a:pPr>
-            <a:r>
-              <a:rPr sz="1150" b="0" i="0">
-                <a:solidFill>
-                  <a:srgbClr val="ECE3F2"/>
-                </a:solidFill>
-                <a:latin typeface="Consolas"/>
-              </a:rPr>
-              <a:t>    {"column":"delta","op":"&gt;=","value":0.4}</a:t>
-            </a:r>
-          </a:p>
-          <a:p>
-            <a:pPr algn="l">
-              <a:lnSpc>
-                <a:spcPct val="128000"/>
-              </a:lnSpc>
-              <a:spcBef>
-                <a:spcPts val="0"/>
-              </a:spcBef>
-              <a:spcAft>
-                <a:spcPts val="300"/>
-              </a:spcAft>
-            </a:pPr>
-            <a:r>
-              <a:rPr sz="1150" b="0" i="0">
-                <a:solidFill>
-                  <a:srgbClr val="ECE3F2"/>
-                </a:solidFill>
-                <a:latin typeface="Consolas"/>
-              </a:rPr>
-              <a:t>  ]</a:t>
-            </a:r>
-          </a:p>
-          <a:p>
-            <a:pPr algn="l">
-              <a:lnSpc>
-                <a:spcPct val="128000"/>
-              </a:lnSpc>
-              <a:spcBef>
-                <a:spcPts val="0"/>
-              </a:spcBef>
-              <a:spcAft>
-                <a:spcPts val="300"/>
-              </a:spcAft>
-            </a:pPr>
-            <a:r>
-              <a:rPr sz="1150" b="0" i="0">
-                <a:solidFill>
-                  <a:srgbClr val="ECE3F2"/>
-                </a:solidFill>
-                <a:latin typeface="Consolas"/>
-              </a:rPr>
-              <a:t>}</a:t>
-            </a:r>
-          </a:p>
-        </p:txBody>
-      </p:sp>
-      <p:sp>
-        <p:nvSpPr>
-          <p:cNvPr id="10" name="TextBox 9"/>
+                  <a:srgbClr val="8A8692"/>
+                </a:solidFill>
+                <a:latin typeface="Georgia"/>
+              </a:rPr>
+              <a:t>Pushdown happens before serialization — and compounds with picking a fast wire.</a:t>
+            </a:r>
+          </a:p>
+        </p:txBody>
+      </p:sp>
+      <p:sp>
+        <p:nvSpPr>
+          <p:cNvPr id="9" name="TextBox 8"/>
           <p:cNvSpPr txBox="1"/>
           <p:nvPr/>
         </p:nvSpPr>
         <p:spPr>
           <a:xfrm>
-            <a:off x="6400800" y="5623560"/>
-            <a:ext cx="5074920" cy="365760"/>
+            <a:off x="1234440" y="5257800"/>
+            <a:ext cx="7680960" cy="777240"/>
           </a:xfrm>
           <a:prstGeom prst="rect">
             <a:avLst/>
@@ -8753,7 +9051,29 @@
                 </a:solidFill>
                 <a:latin typeface="Georgia"/>
               </a:rPr>
-              <a:t>notebooks/kob_transports_demo.ipynb</a:t>
+              <a:t>Medium dataset · Apple M4 · localhost loopback (understates Arrow's win on a real network).</a:t>
+            </a:r>
+          </a:p>
+          <a:p>
+            <a:pPr algn="ctr">
+              <a:lnSpc>
+                <a:spcPct val="118000"/>
+              </a:lnSpc>
+              <a:spcBef>
+                <a:spcPts val="0"/>
+              </a:spcBef>
+              <a:spcAft>
+                <a:spcPts val="600"/>
+              </a:spcAft>
+            </a:pPr>
+            <a:r>
+              <a:rPr sz="1100" b="0" i="1">
+                <a:solidFill>
+                  <a:srgbClr val="8A8692"/>
+                </a:solidFill>
+                <a:latin typeface="Georgia"/>
+              </a:rPr>
+              <a:t>Source: docs/PERFORMANCE_REPORT.md</a:t>
             </a:r>
           </a:p>
         </p:txBody>
@@ -8785,13 +9105,13 @@
         <p:spPr>
           <a:xfrm>
             <a:off x="0" y="0"/>
-            <a:ext cx="12191695" cy="6858000"/>
+            <a:ext cx="146304" cy="6858000"/>
           </a:xfrm>
           <a:prstGeom prst="rect">
             <a:avLst/>
           </a:prstGeom>
           <a:solidFill>
-            <a:srgbClr val="3A1647"/>
+            <a:srgbClr val="6D2C8F"/>
           </a:solidFill>
           <a:ln>
             <a:noFill/>
@@ -8822,20 +9142,110 @@
       </p:sp>
       <p:sp>
         <p:nvSpPr>
-          <p:cNvPr id="3" name="Rectangle 2"/>
+          <p:cNvPr id="3" name="TextBox 2"/>
+          <p:cNvSpPr txBox="1"/>
+          <p:nvPr/>
+        </p:nvSpPr>
+        <p:spPr>
+          <a:xfrm>
+            <a:off x="685800" y="329184"/>
+            <a:ext cx="10789920" cy="274320"/>
+          </a:xfrm>
+          <a:prstGeom prst="rect">
+            <a:avLst/>
+          </a:prstGeom>
+          <a:noFill/>
+        </p:spPr>
+        <p:txBody>
+          <a:bodyPr wrap="square" anchor="t" lIns="0" rIns="0" tIns="0" bIns="0">
+            <a:spAutoFit/>
+          </a:bodyPr>
+          <a:lstStyle/>
+          <a:p>
+            <a:pPr algn="l">
+              <a:lnSpc>
+                <a:spcPct val="118000"/>
+              </a:lnSpc>
+              <a:spcBef>
+                <a:spcPts val="0"/>
+              </a:spcBef>
+              <a:spcAft>
+                <a:spcPts val="600"/>
+              </a:spcAft>
+            </a:pPr>
+            <a:r>
+              <a:rPr sz="1200" b="1" i="0">
+                <a:solidFill>
+                  <a:srgbClr val="C71E7A"/>
+                </a:solidFill>
+                <a:latin typeface="Georgia"/>
+              </a:rPr>
+              <a:t>SEE IT</a:t>
+            </a:r>
+          </a:p>
+        </p:txBody>
+      </p:sp>
+      <p:sp>
+        <p:nvSpPr>
+          <p:cNvPr id="4" name="TextBox 3"/>
+          <p:cNvSpPr txBox="1"/>
+          <p:nvPr/>
+        </p:nvSpPr>
+        <p:spPr>
+          <a:xfrm>
+            <a:off x="685800" y="585216"/>
+            <a:ext cx="10789920" cy="548640"/>
+          </a:xfrm>
+          <a:prstGeom prst="rect">
+            <a:avLst/>
+          </a:prstGeom>
+          <a:noFill/>
+        </p:spPr>
+        <p:txBody>
+          <a:bodyPr wrap="square" anchor="t" lIns="0" rIns="0" tIns="0" bIns="0">
+            <a:spAutoFit/>
+          </a:bodyPr>
+          <a:lstStyle/>
+          <a:p>
+            <a:pPr algn="l">
+              <a:lnSpc>
+                <a:spcPct val="118000"/>
+              </a:lnSpc>
+              <a:spcBef>
+                <a:spcPts val="0"/>
+              </a:spcBef>
+              <a:spcAft>
+                <a:spcPts val="600"/>
+              </a:spcAft>
+            </a:pPr>
+            <a:r>
+              <a:rPr sz="2500" b="1" i="0">
+                <a:solidFill>
+                  <a:srgbClr val="3A1647"/>
+                </a:solidFill>
+                <a:latin typeface="Georgia"/>
+              </a:rPr>
+              <a:t>Demo: one query, every transport</a:t>
+            </a:r>
+          </a:p>
+        </p:txBody>
+      </p:sp>
+      <p:sp>
+        <p:nvSpPr>
+          <p:cNvPr id="5" name="Rectangle 4"/>
           <p:cNvSpPr/>
           <p:nvPr/>
         </p:nvSpPr>
         <p:spPr>
           <a:xfrm>
-            <a:off x="0" y="1554480"/>
-            <a:ext cx="12191695" cy="54864"/>
+            <a:off x="685800" y="1207008"/>
+            <a:ext cx="1920240" cy="38100"/>
           </a:xfrm>
           <a:prstGeom prst="rect">
             <a:avLst/>
           </a:prstGeom>
           <a:solidFill>
-            <a:srgbClr val="C71E7A"/>
+            <a:srgbClr val="6D2C8F"/>
           </a:solidFill>
           <a:ln>
             <a:noFill/>
@@ -8866,14 +9276,14 @@
       </p:sp>
       <p:sp>
         <p:nvSpPr>
-          <p:cNvPr id="4" name="TextBox 3"/>
+          <p:cNvPr id="6" name="TextBox 5"/>
           <p:cNvSpPr txBox="1"/>
           <p:nvPr/>
         </p:nvSpPr>
         <p:spPr>
           <a:xfrm>
-            <a:off x="822960" y="640080"/>
-            <a:ext cx="10515600" cy="822960"/>
+            <a:off x="685800" y="6419088"/>
+            <a:ext cx="10789920" cy="292608"/>
           </a:xfrm>
           <a:prstGeom prst="rect">
             <a:avLst/>
@@ -8898,27 +9308,45 @@
               </a:spcAft>
             </a:pPr>
             <a:r>
-              <a:rPr sz="3400" b="1" i="0">
-                <a:solidFill>
-                  <a:srgbClr val="FFFFFF"/>
-                </a:solidFill>
-                <a:latin typeface="Georgia"/>
-              </a:rPr>
-              <a:t>Takeaways</a:t>
-            </a:r>
-          </a:p>
-        </p:txBody>
-      </p:sp>
-      <p:sp>
-        <p:nvSpPr>
-          <p:cNvPr id="5" name="TextBox 4"/>
+              <a:rPr sz="1000" b="1" i="0">
+                <a:solidFill>
+                  <a:srgbClr val="6D2C8F"/>
+                </a:solidFill>
+                <a:latin typeface="Georgia"/>
+              </a:rPr>
+              <a:t>kob</a:t>
+            </a:r>
+            <a:r>
+              <a:rPr sz="1000" b="0" i="0">
+                <a:solidFill>
+                  <a:srgbClr val="8A8692"/>
+                </a:solidFill>
+                <a:latin typeface="Georgia"/>
+              </a:rPr>
+              <a:t>  ·  self-discovering Parquet → Apache Arrow</a:t>
+            </a:r>
+            <a:r>
+              <a:rPr sz="1000" b="0" i="0">
+                <a:solidFill>
+                  <a:srgbClr val="8A8692"/>
+                </a:solidFill>
+                <a:latin typeface="Georgia"/>
+              </a:rPr>
+              <a:t>          9 / 10</a:t>
+            </a:r>
+          </a:p>
+        </p:txBody>
+      </p:sp>
+      <p:sp>
+        <p:nvSpPr>
+          <p:cNvPr id="7" name="TextBox 6"/>
           <p:cNvSpPr txBox="1"/>
           <p:nvPr/>
         </p:nvSpPr>
         <p:spPr>
           <a:xfrm>
-            <a:off x="868680" y="1828800"/>
-            <a:ext cx="10607040" cy="3657600"/>
+            <a:off x="685800" y="1371600"/>
+            <a:ext cx="5577840" cy="4206240"/>
           </a:xfrm>
           <a:prstGeom prst="rect">
             <a:avLst/>
@@ -8939,26 +9367,17 @@
                 <a:spcPts val="0"/>
               </a:spcBef>
               <a:spcAft>
-                <a:spcPts val="1400"/>
-              </a:spcAft>
-            </a:pPr>
-            <a:r>
-              <a:rPr sz="1800" b="1" i="0">
-                <a:solidFill>
-                  <a:srgbClr val="CB9FE0"/>
-                </a:solidFill>
-                <a:latin typeface="Georgia"/>
-              </a:rPr>
-              <a:t>●  Use Arrow on the wire, default to Flight. </a:t>
-            </a:r>
-            <a:r>
-              <a:rPr sz="1800" b="0" i="0">
-                <a:solidFill>
-                  <a:srgbClr val="E6D8EE"/>
-                </a:solidFill>
-                <a:latin typeface="Georgia"/>
-              </a:rPr>
-              <a:t>Not JSON (150–1750× slower, 8× heavier), not Protobuf (5–56× slower).</a:t>
+                <a:spcPts val="1200"/>
+              </a:spcAft>
+            </a:pPr>
+            <a:r>
+              <a:rPr sz="1500" b="0" i="0">
+                <a:solidFill>
+                  <a:srgbClr val="2B2230"/>
+                </a:solidFill>
+                <a:latin typeface="Georgia"/>
+              </a:rPr>
+              <a:t>A runnable notebook spins up all four transports, runs the SAME query over each, checks they return identical data, and times them.</a:t>
             </a:r>
           </a:p>
           <a:p>
@@ -8970,26 +9389,17 @@
                 <a:spcPts val="0"/>
               </a:spcBef>
               <a:spcAft>
-                <a:spcPts val="1400"/>
-              </a:spcAft>
-            </a:pPr>
-            <a:r>
-              <a:rPr sz="1800" b="1" i="0">
-                <a:solidFill>
-                  <a:srgbClr val="CB9FE0"/>
-                </a:solidFill>
-                <a:latin typeface="Georgia"/>
-              </a:rPr>
-              <a:t>●  Self-discovering beats configured. </a:t>
-            </a:r>
-            <a:r>
-              <a:rPr sz="1800" b="0" i="0">
-                <a:solidFill>
-                  <a:srgbClr val="E6D8EE"/>
-                </a:solidFill>
-                <a:latin typeface="Georgia"/>
-              </a:rPr>
-              <a:t>Point kob at a folder; new data appears live, no restart, no schema.</a:t>
+                <a:spcPts val="800"/>
+              </a:spcAft>
+            </a:pPr>
+            <a:r>
+              <a:rPr sz="1400" b="1" i="0">
+                <a:solidFill>
+                  <a:srgbClr val="3A1647"/>
+                </a:solidFill>
+                <a:latin typeface="Georgia"/>
+              </a:rPr>
+              <a:t>●  Arrow Flight  ·  Arrow-over-HTTP  ·  REST/JSON  ·  gRPC/Protobuf</a:t>
             </a:r>
           </a:p>
           <a:p>
@@ -9001,26 +9411,35 @@
                 <a:spcPts val="0"/>
               </a:spcBef>
               <a:spcAft>
-                <a:spcPts val="1400"/>
-              </a:spcAft>
-            </a:pPr>
-            <a:r>
-              <a:rPr sz="1800" b="1" i="0">
-                <a:solidFill>
-                  <a:srgbClr val="CB9FE0"/>
-                </a:solidFill>
-                <a:latin typeface="Georgia"/>
-              </a:rPr>
-              <a:t>●  Minimal &amp; safe by construction. </a:t>
-            </a:r>
-            <a:r>
-              <a:rPr sz="1800" b="0" i="0">
-                <a:solidFill>
-                  <a:srgbClr val="E6D8EE"/>
-                </a:solidFill>
-                <a:latin typeface="Georgia"/>
-              </a:rPr>
-              <a:t>Four deps, ~750-line core, read-only, parameterised, sandboxed.</a:t>
+                <a:spcPts val="800"/>
+              </a:spcAft>
+            </a:pPr>
+            <a:r>
+              <a:rPr sz="1400" b="0" i="0">
+                <a:solidFill>
+                  <a:srgbClr val="2B2230"/>
+                </a:solidFill>
+                <a:latin typeface="Georgia"/>
+              </a:rPr>
+              <a:t>●  Result:  </a:t>
+            </a:r>
+            <a:r>
+              <a:rPr sz="1400" b="1" i="0">
+                <a:solidFill>
+                  <a:srgbClr val="6D2C8F"/>
+                </a:solidFill>
+                <a:latin typeface="Georgia"/>
+              </a:rPr>
+              <a:t>all four return the identical 14,006 rows</a:t>
+            </a:r>
+            <a:r>
+              <a:rPr sz="1400" b="0" i="0">
+                <a:solidFill>
+                  <a:srgbClr val="2B2230"/>
+                </a:solidFill>
+                <a:latin typeface="Georgia"/>
+              </a:rPr>
+              <a:t> — Flight fastest by far.</a:t>
             </a:r>
           </a:p>
           <a:p>
@@ -9036,36 +9455,351 @@
               </a:spcAft>
             </a:pPr>
             <a:r>
-              <a:rPr sz="1800" b="1" i="0">
-                <a:solidFill>
-                  <a:srgbClr val="CB9FE0"/>
-                </a:solidFill>
-                <a:latin typeface="Georgia"/>
-              </a:rPr>
-              <a:t>●  It's the wire, not the engine. </a:t>
-            </a:r>
-            <a:r>
-              <a:rPr sz="1800" b="0" i="0">
-                <a:solidFill>
-                  <a:srgbClr val="E6D8EE"/>
-                </a:solidFill>
-                <a:latin typeface="Georgia"/>
-              </a:rPr>
-              <a:t>Hold DuckDB constant and the format alone moves latency by 1750×.</a:t>
-            </a:r>
-          </a:p>
-        </p:txBody>
-      </p:sp>
-      <p:sp>
-        <p:nvSpPr>
-          <p:cNvPr id="6" name="TextBox 5"/>
+              <a:rPr sz="1400" b="0" i="0">
+                <a:solidFill>
+                  <a:srgbClr val="2B2230"/>
+                </a:solidFill>
+                <a:latin typeface="Georgia"/>
+              </a:rPr>
+              <a:t>●  Discovery, filtering and serialization are all kob's job — zero schema config.</a:t>
+            </a:r>
+          </a:p>
+        </p:txBody>
+      </p:sp>
+      <p:sp>
+        <p:nvSpPr>
+          <p:cNvPr id="8" name="Rounded Rectangle 7"/>
+          <p:cNvSpPr/>
+          <p:nvPr/>
+        </p:nvSpPr>
+        <p:spPr>
+          <a:xfrm>
+            <a:off x="6400800" y="1554480"/>
+            <a:ext cx="5074920" cy="1234440"/>
+          </a:xfrm>
+          <a:prstGeom prst="roundRect">
+            <a:avLst/>
+          </a:prstGeom>
+          <a:solidFill>
+            <a:srgbClr val="2A1633"/>
+          </a:solidFill>
+          <a:ln>
+            <a:noFill/>
+          </a:ln>
+          <a:effectLst/>
+        </p:spPr>
+        <p:style>
+          <a:lnRef idx="1">
+            <a:schemeClr val="accent1"/>
+          </a:lnRef>
+          <a:fillRef idx="3">
+            <a:schemeClr val="accent1"/>
+          </a:fillRef>
+          <a:effectRef idx="2">
+            <a:schemeClr val="accent1"/>
+          </a:effectRef>
+          <a:fontRef idx="minor">
+            <a:schemeClr val="lt1"/>
+          </a:fontRef>
+        </p:style>
+        <p:txBody>
+          <a:bodyPr rtlCol="0" anchor="ctr" wrap="square" lIns="201168" rIns="182880" tIns="128016" bIns="128016"/>
+          <a:lstStyle/>
+          <a:p>
+            <a:pPr algn="l">
+              <a:lnSpc>
+                <a:spcPct val="128000"/>
+              </a:lnSpc>
+              <a:spcBef>
+                <a:spcPts val="0"/>
+              </a:spcBef>
+              <a:spcAft>
+                <a:spcPts val="300"/>
+              </a:spcAft>
+            </a:pPr>
+            <a:r>
+              <a:rPr sz="1300" b="0" i="0">
+                <a:solidFill>
+                  <a:srgbClr val="ECE3F2"/>
+                </a:solidFill>
+                <a:latin typeface="Consolas"/>
+              </a:rPr>
+              <a:t># install + launch the demo</a:t>
+            </a:r>
+          </a:p>
+          <a:p>
+            <a:pPr algn="l">
+              <a:lnSpc>
+                <a:spcPct val="128000"/>
+              </a:lnSpc>
+              <a:spcBef>
+                <a:spcPts val="0"/>
+              </a:spcBef>
+              <a:spcAft>
+                <a:spcPts val="300"/>
+              </a:spcAft>
+            </a:pPr>
+            <a:r>
+              <a:rPr sz="1300" b="0" i="0">
+                <a:solidFill>
+                  <a:srgbClr val="ECE3F2"/>
+                </a:solidFill>
+                <a:latin typeface="Consolas"/>
+              </a:rPr>
+              <a:t>uv sync --extra demo</a:t>
+            </a:r>
+          </a:p>
+          <a:p>
+            <a:pPr algn="l">
+              <a:lnSpc>
+                <a:spcPct val="128000"/>
+              </a:lnSpc>
+              <a:spcBef>
+                <a:spcPts val="0"/>
+              </a:spcBef>
+              <a:spcAft>
+                <a:spcPts val="300"/>
+              </a:spcAft>
+            </a:pPr>
+            <a:r>
+              <a:rPr sz="1300" b="0" i="0">
+                <a:solidFill>
+                  <a:srgbClr val="ECE3F2"/>
+                </a:solidFill>
+                <a:latin typeface="Consolas"/>
+              </a:rPr>
+              <a:t>make notebook</a:t>
+            </a:r>
+          </a:p>
+        </p:txBody>
+      </p:sp>
+      <p:sp>
+        <p:nvSpPr>
+          <p:cNvPr id="9" name="Rounded Rectangle 8"/>
+          <p:cNvSpPr/>
+          <p:nvPr/>
+        </p:nvSpPr>
+        <p:spPr>
+          <a:xfrm>
+            <a:off x="6400800" y="3063240"/>
+            <a:ext cx="5074920" cy="2468880"/>
+          </a:xfrm>
+          <a:prstGeom prst="roundRect">
+            <a:avLst/>
+          </a:prstGeom>
+          <a:solidFill>
+            <a:srgbClr val="2A1633"/>
+          </a:solidFill>
+          <a:ln>
+            <a:noFill/>
+          </a:ln>
+          <a:effectLst/>
+        </p:spPr>
+        <p:style>
+          <a:lnRef idx="1">
+            <a:schemeClr val="accent1"/>
+          </a:lnRef>
+          <a:fillRef idx="3">
+            <a:schemeClr val="accent1"/>
+          </a:fillRef>
+          <a:effectRef idx="2">
+            <a:schemeClr val="accent1"/>
+          </a:effectRef>
+          <a:fontRef idx="minor">
+            <a:schemeClr val="lt1"/>
+          </a:fontRef>
+        </p:style>
+        <p:txBody>
+          <a:bodyPr rtlCol="0" anchor="ctr" wrap="square" lIns="201168" rIns="182880" tIns="128016" bIns="128016"/>
+          <a:lstStyle/>
+          <a:p>
+            <a:pPr algn="l">
+              <a:lnSpc>
+                <a:spcPct val="128000"/>
+              </a:lnSpc>
+              <a:spcBef>
+                <a:spcPts val="0"/>
+              </a:spcBef>
+              <a:spcAft>
+                <a:spcPts val="300"/>
+              </a:spcAft>
+            </a:pPr>
+            <a:r>
+              <a:rPr sz="1150" b="0" i="0">
+                <a:solidFill>
+                  <a:srgbClr val="ECE3F2"/>
+                </a:solidFill>
+                <a:latin typeface="Consolas"/>
+              </a:rPr>
+              <a:t>{</a:t>
+            </a:r>
+          </a:p>
+          <a:p>
+            <a:pPr algn="l">
+              <a:lnSpc>
+                <a:spcPct val="128000"/>
+              </a:lnSpc>
+              <a:spcBef>
+                <a:spcPts val="0"/>
+              </a:spcBef>
+              <a:spcAft>
+                <a:spcPts val="300"/>
+              </a:spcAft>
+            </a:pPr>
+            <a:r>
+              <a:rPr sz="1150" b="0" i="0">
+                <a:solidFill>
+                  <a:srgbClr val="ECE3F2"/>
+                </a:solidFill>
+                <a:latin typeface="Consolas"/>
+              </a:rPr>
+              <a:t>  "dataset": "optionmetrics",</a:t>
+            </a:r>
+          </a:p>
+          <a:p>
+            <a:pPr algn="l">
+              <a:lnSpc>
+                <a:spcPct val="128000"/>
+              </a:lnSpc>
+              <a:spcBef>
+                <a:spcPts val="0"/>
+              </a:spcBef>
+              <a:spcAft>
+                <a:spcPts val="300"/>
+              </a:spcAft>
+            </a:pPr>
+            <a:r>
+              <a:rPr sz="1150" b="0" i="0">
+                <a:solidFill>
+                  <a:srgbClr val="ECE3F2"/>
+                </a:solidFill>
+                <a:latin typeface="Consolas"/>
+              </a:rPr>
+              <a:t>  "columns": ["date","strike","impl_vol","delta"],</a:t>
+            </a:r>
+          </a:p>
+          <a:p>
+            <a:pPr algn="l">
+              <a:lnSpc>
+                <a:spcPct val="128000"/>
+              </a:lnSpc>
+              <a:spcBef>
+                <a:spcPts val="0"/>
+              </a:spcBef>
+              <a:spcAft>
+                <a:spcPts val="300"/>
+              </a:spcAft>
+            </a:pPr>
+            <a:r>
+              <a:rPr sz="1150" b="0" i="0">
+                <a:solidFill>
+                  <a:srgbClr val="ECE3F2"/>
+                </a:solidFill>
+                <a:latin typeface="Consolas"/>
+              </a:rPr>
+              <a:t>  "filters": [</a:t>
+            </a:r>
+          </a:p>
+          <a:p>
+            <a:pPr algn="l">
+              <a:lnSpc>
+                <a:spcPct val="128000"/>
+              </a:lnSpc>
+              <a:spcBef>
+                <a:spcPts val="0"/>
+              </a:spcBef>
+              <a:spcAft>
+                <a:spcPts val="300"/>
+              </a:spcAft>
+            </a:pPr>
+            <a:r>
+              <a:rPr sz="1150" b="0" i="0">
+                <a:solidFill>
+                  <a:srgbClr val="ECE3F2"/>
+                </a:solidFill>
+                <a:latin typeface="Consolas"/>
+              </a:rPr>
+              <a:t>    {"column":"underlying","op":"=","value":"AAPL"},</a:t>
+            </a:r>
+          </a:p>
+          <a:p>
+            <a:pPr algn="l">
+              <a:lnSpc>
+                <a:spcPct val="128000"/>
+              </a:lnSpc>
+              <a:spcBef>
+                <a:spcPts val="0"/>
+              </a:spcBef>
+              <a:spcAft>
+                <a:spcPts val="300"/>
+              </a:spcAft>
+            </a:pPr>
+            <a:r>
+              <a:rPr sz="1150" b="0" i="0">
+                <a:solidFill>
+                  <a:srgbClr val="ECE3F2"/>
+                </a:solidFill>
+                <a:latin typeface="Consolas"/>
+              </a:rPr>
+              <a:t>    {"column":"delta","op":"&gt;=","value":0.4}</a:t>
+            </a:r>
+          </a:p>
+          <a:p>
+            <a:pPr algn="l">
+              <a:lnSpc>
+                <a:spcPct val="128000"/>
+              </a:lnSpc>
+              <a:spcBef>
+                <a:spcPts val="0"/>
+              </a:spcBef>
+              <a:spcAft>
+                <a:spcPts val="300"/>
+              </a:spcAft>
+            </a:pPr>
+            <a:r>
+              <a:rPr sz="1150" b="0" i="0">
+                <a:solidFill>
+                  <a:srgbClr val="ECE3F2"/>
+                </a:solidFill>
+                <a:latin typeface="Consolas"/>
+              </a:rPr>
+              <a:t>  ]</a:t>
+            </a:r>
+          </a:p>
+          <a:p>
+            <a:pPr algn="l">
+              <a:lnSpc>
+                <a:spcPct val="128000"/>
+              </a:lnSpc>
+              <a:spcBef>
+                <a:spcPts val="0"/>
+              </a:spcBef>
+              <a:spcAft>
+                <a:spcPts val="300"/>
+              </a:spcAft>
+            </a:pPr>
+            <a:r>
+              <a:rPr sz="1150" b="0" i="0">
+                <a:solidFill>
+                  <a:srgbClr val="ECE3F2"/>
+                </a:solidFill>
+                <a:latin typeface="Consolas"/>
+              </a:rPr>
+              <a:t>}</a:t>
+            </a:r>
+          </a:p>
+        </p:txBody>
+      </p:sp>
+      <p:sp>
+        <p:nvSpPr>
+          <p:cNvPr id="10" name="TextBox 9"/>
           <p:cNvSpPr txBox="1"/>
           <p:nvPr/>
         </p:nvSpPr>
         <p:spPr>
           <a:xfrm>
-            <a:off x="868680" y="5577840"/>
-            <a:ext cx="10607040" cy="731520"/>
+            <a:off x="6400800" y="5623560"/>
+            <a:ext cx="5074920" cy="365760"/>
           </a:xfrm>
           <a:prstGeom prst="rect">
             <a:avLst/>
@@ -9078,7 +9812,7 @@
           </a:bodyPr>
           <a:lstStyle/>
           <a:p>
-            <a:pPr algn="l">
+            <a:pPr algn="ctr">
               <a:lnSpc>
                 <a:spcPct val="118000"/>
               </a:lnSpc>
@@ -9090,22 +9824,13 @@
               </a:spcAft>
             </a:pPr>
             <a:r>
-              <a:rPr sz="1300" b="0" i="0">
-                <a:solidFill>
-                  <a:srgbClr val="B7A9C2"/>
-                </a:solidFill>
-                <a:latin typeface="Georgia"/>
-              </a:rPr>
-              <a:t>README.md  ·  docs/DESIGN.md  ·  docs/PERFORMANCE_REPORT.md          </a:t>
-            </a:r>
-            <a:r>
-              <a:rPr sz="1300" b="1" i="0">
-                <a:solidFill>
-                  <a:srgbClr val="CB9FE0"/>
-                </a:solidFill>
-                <a:latin typeface="Georgia"/>
-              </a:rPr>
-              <a:t>github.com/iyedexe/kob</a:t>
+              <a:rPr sz="1100" b="0" i="1">
+                <a:solidFill>
+                  <a:srgbClr val="8A8692"/>
+                </a:solidFill>
+                <a:latin typeface="Georgia"/>
+              </a:rPr>
+              <a:t>notebooks/kob_transports_demo.ipynb</a:t>
             </a:r>
           </a:p>
         </p:txBody>
